--- a/docs/webinar-resources/Module4-BMC-American-System-Hamiltonian-Value-Streams-Lean.pptx
+++ b/docs/webinar-resources/Module4-BMC-American-System-Hamiltonian-Value-Streams-Lean.pptx
@@ -1833,13 +1833,6 @@
 <file path=ppt/slides/slide1.xml><?xml version="1.0" encoding="utf-8"?>
 <p:sld xmlns:a="http://schemas.openxmlformats.org/drawingml/2006/main" xmlns:r="http://schemas.openxmlformats.org/officeDocument/2006/relationships" xmlns:p="http://schemas.openxmlformats.org/presentationml/2006/main">
   <p:cSld name="Slide 1">
-    <p:bg>
-      <p:bgPr>
-        <a:solidFill>
-          <a:srgbClr val="111111"/>
-        </a:solidFill>
-      </p:bgPr>
-    </p:bg>
     <p:spTree>
       <p:nvGrpSpPr>
         <p:cNvPr id="1" name=""/>
@@ -1856,13 +1849,38 @@
       </p:grpSpPr>
       <p:sp>
         <p:nvSpPr>
-          <p:cNvPr id="2" name="Text 0"/>
-          <p:cNvSpPr/>
-          <p:nvPr/>
-        </p:nvSpPr>
-        <p:spPr>
-          <a:xfrm>
-            <a:off x="548640" y="1188720"/>
+          <p:cNvPr id="2" name="Shape 0"/>
+          <p:cNvSpPr/>
+          <p:nvPr/>
+        </p:nvSpPr>
+        <p:spPr>
+          <a:xfrm>
+            <a:off x="0" y="0"/>
+            <a:ext cx="9144000" cy="5143500"/>
+          </a:xfrm>
+          <a:prstGeom prst="rect">
+            <a:avLst/>
+          </a:prstGeom>
+          <a:solidFill>
+            <a:srgbClr val="111111"/>
+          </a:solidFill>
+          <a:ln w="12700">
+            <a:solidFill>
+              <a:srgbClr val="111111"/>
+            </a:solidFill>
+            <a:prstDash val="solid"/>
+          </a:ln>
+        </p:spPr>
+      </p:sp>
+      <p:sp>
+        <p:nvSpPr>
+          <p:cNvPr id="3" name="Text 1"/>
+          <p:cNvSpPr/>
+          <p:nvPr/>
+        </p:nvSpPr>
+        <p:spPr>
+          <a:xfrm>
+            <a:off x="548640" y="1143000"/>
             <a:ext cx="8046720" cy="320040"/>
           </a:xfrm>
           <a:prstGeom prst="rect">
@@ -1879,9 +1897,9 @@
               <a:buNone/>
             </a:pPr>
             <a:r>
-              <a:rPr lang="en-US" sz="1400" spc="300" kern="0" dirty="0">
-                <a:solidFill>
-                  <a:srgbClr val="AAAAAA"/>
+              <a:rPr lang="en-US" sz="1400" b="1" spc="200" kern="0" dirty="0">
+                <a:solidFill>
+                  <a:srgbClr val="C9A227"/>
                 </a:solidFill>
                 <a:latin typeface="Arial" pitchFamily="34" charset="0"/>
                 <a:ea typeface="Arial" pitchFamily="34" charset="-122"/>
@@ -1895,32 +1913,32 @@
       </p:sp>
       <p:sp>
         <p:nvSpPr>
-          <p:cNvPr id="3" name="Text 1"/>
-          <p:cNvSpPr/>
-          <p:nvPr/>
-        </p:nvSpPr>
-        <p:spPr>
-          <a:xfrm>
-            <a:off x="548640" y="1645920"/>
-            <a:ext cx="8046720" cy="1280160"/>
-          </a:xfrm>
-          <a:prstGeom prst="rect">
-            <a:avLst/>
-          </a:prstGeom>
-          <a:noFill/>
-          <a:ln/>
-        </p:spPr>
-        <p:txBody>
-          <a:bodyPr wrap="square" lIns="0" tIns="0" rIns="0" bIns="0" rtlCol="0" anchor="ctr"/>
-          <a:lstStyle/>
-          <a:p>
-            <a:pPr indent="0" marL="0">
-              <a:buNone/>
-            </a:pPr>
-            <a:r>
-              <a:rPr lang="en-US" sz="2800" b="1" dirty="0">
-                <a:solidFill>
-                  <a:srgbClr val="F5F5F5"/>
+          <p:cNvPr id="4" name="Text 2"/>
+          <p:cNvSpPr/>
+          <p:nvPr/>
+        </p:nvSpPr>
+        <p:spPr>
+          <a:xfrm>
+            <a:off x="548640" y="1600200"/>
+            <a:ext cx="8046720" cy="1097280"/>
+          </a:xfrm>
+          <a:prstGeom prst="rect">
+            <a:avLst/>
+          </a:prstGeom>
+          <a:noFill/>
+          <a:ln/>
+        </p:spPr>
+        <p:txBody>
+          <a:bodyPr wrap="square" lIns="0" tIns="0" rIns="0" bIns="0" rtlCol="0" anchor="ctr"/>
+          <a:lstStyle/>
+          <a:p>
+            <a:pPr indent="0" marL="0">
+              <a:buNone/>
+            </a:pPr>
+            <a:r>
+              <a:rPr lang="en-US" sz="2600" b="1" dirty="0">
+                <a:solidFill>
+                  <a:srgbClr val="FFFFFF"/>
                 </a:solidFill>
                 <a:latin typeface="Arial" pitchFamily="34" charset="0"/>
                 <a:ea typeface="Arial" pitchFamily="34" charset="-122"/>
@@ -1928,16 +1946,16 @@
               </a:rPr>
               <a:t>Updating Value Stream Mapping &amp; Lean</a:t>
             </a:r>
-            <a:endParaRPr lang="en-US" sz="2800" dirty="0"/>
-          </a:p>
-          <a:p>
-            <a:pPr indent="0" marL="0">
-              <a:buNone/>
-            </a:pPr>
-            <a:r>
-              <a:rPr lang="en-US" sz="2800" b="1" dirty="0">
-                <a:solidFill>
-                  <a:srgbClr val="F5F5F5"/>
+            <a:endParaRPr lang="en-US" sz="2600" dirty="0"/>
+          </a:p>
+          <a:p>
+            <a:pPr indent="0" marL="0">
+              <a:buNone/>
+            </a:pPr>
+            <a:r>
+              <a:rPr lang="en-US" sz="2600" b="1" dirty="0">
+                <a:solidFill>
+                  <a:srgbClr val="FFFFFF"/>
                 </a:solidFill>
                 <a:latin typeface="Arial" pitchFamily="34" charset="0"/>
                 <a:ea typeface="Arial" pitchFamily="34" charset="-122"/>
@@ -1945,38 +1963,63 @@
               </a:rPr>
               <a:t>for the Hamiltonian System</a:t>
             </a:r>
-            <a:endParaRPr lang="en-US" sz="2800" dirty="0"/>
-          </a:p>
-        </p:txBody>
-      </p:sp>
-      <p:sp>
-        <p:nvSpPr>
-          <p:cNvPr id="4" name="Text 2"/>
-          <p:cNvSpPr/>
-          <p:nvPr/>
-        </p:nvSpPr>
-        <p:spPr>
-          <a:xfrm>
-            <a:off x="548640" y="3108960"/>
-            <a:ext cx="8046720" cy="365760"/>
-          </a:xfrm>
-          <a:prstGeom prst="rect">
-            <a:avLst/>
-          </a:prstGeom>
-          <a:noFill/>
-          <a:ln/>
-        </p:spPr>
-        <p:txBody>
-          <a:bodyPr wrap="square" lIns="0" tIns="0" rIns="0" bIns="0" rtlCol="0" anchor="ctr"/>
-          <a:lstStyle/>
-          <a:p>
-            <a:pPr indent="0" marL="0">
-              <a:buNone/>
-            </a:pPr>
-            <a:r>
-              <a:rPr lang="en-US" sz="1800" dirty="0">
-                <a:solidFill>
-                  <a:srgbClr val="CCCCCC"/>
+            <a:endParaRPr lang="en-US" sz="2600" dirty="0"/>
+          </a:p>
+        </p:txBody>
+      </p:sp>
+      <p:sp>
+        <p:nvSpPr>
+          <p:cNvPr id="5" name="Shape 3"/>
+          <p:cNvSpPr/>
+          <p:nvPr/>
+        </p:nvSpPr>
+        <p:spPr>
+          <a:xfrm>
+            <a:off x="548640" y="2834640"/>
+            <a:ext cx="1645920" cy="54864"/>
+          </a:xfrm>
+          <a:prstGeom prst="rect">
+            <a:avLst/>
+          </a:prstGeom>
+          <a:solidFill>
+            <a:srgbClr val="C9A227"/>
+          </a:solidFill>
+          <a:ln w="12700">
+            <a:solidFill>
+              <a:srgbClr val="C9A227"/>
+            </a:solidFill>
+            <a:prstDash val="solid"/>
+          </a:ln>
+        </p:spPr>
+      </p:sp>
+      <p:sp>
+        <p:nvSpPr>
+          <p:cNvPr id="6" name="Text 4"/>
+          <p:cNvSpPr/>
+          <p:nvPr/>
+        </p:nvSpPr>
+        <p:spPr>
+          <a:xfrm>
+            <a:off x="548640" y="3063240"/>
+            <a:ext cx="8046720" cy="320040"/>
+          </a:xfrm>
+          <a:prstGeom prst="rect">
+            <a:avLst/>
+          </a:prstGeom>
+          <a:noFill/>
+          <a:ln/>
+        </p:spPr>
+        <p:txBody>
+          <a:bodyPr wrap="square" lIns="0" tIns="0" rIns="0" bIns="0" rtlCol="0" anchor="ctr"/>
+          <a:lstStyle/>
+          <a:p>
+            <a:pPr indent="0" marL="0">
+              <a:buNone/>
+            </a:pPr>
+            <a:r>
+              <a:rPr lang="en-US" sz="1500" dirty="0">
+                <a:solidFill>
+                  <a:srgbClr val="C8C8C8"/>
                 </a:solidFill>
                 <a:latin typeface="Arial" pitchFamily="34" charset="0"/>
                 <a:ea typeface="Arial" pitchFamily="34" charset="-122"/>
@@ -1984,19 +2027,19 @@
               </a:rPr>
               <a:t>Building Productive American Capability</a:t>
             </a:r>
-            <a:endParaRPr lang="en-US" sz="1800" dirty="0"/>
-          </a:p>
-        </p:txBody>
-      </p:sp>
-      <p:sp>
-        <p:nvSpPr>
-          <p:cNvPr id="5" name="Text 3"/>
-          <p:cNvSpPr/>
-          <p:nvPr/>
-        </p:nvSpPr>
-        <p:spPr>
-          <a:xfrm>
-            <a:off x="548640" y="4114800"/>
+            <a:endParaRPr lang="en-US" sz="1500" dirty="0"/>
+          </a:p>
+        </p:txBody>
+      </p:sp>
+      <p:sp>
+        <p:nvSpPr>
+          <p:cNvPr id="7" name="Text 5"/>
+          <p:cNvSpPr/>
+          <p:nvPr/>
+        </p:nvSpPr>
+        <p:spPr>
+          <a:xfrm>
+            <a:off x="548640" y="4160520"/>
             <a:ext cx="8046720" cy="274320"/>
           </a:xfrm>
           <a:prstGeom prst="rect">
@@ -2013,9 +2056,9 @@
               <a:buNone/>
             </a:pPr>
             <a:r>
-              <a:rPr lang="en-US" sz="1400" dirty="0">
-                <a:solidFill>
-                  <a:srgbClr val="999999"/>
+              <a:rPr lang="en-US" sz="1300" dirty="0">
+                <a:solidFill>
+                  <a:srgbClr val="A0A0A0"/>
                 </a:solidFill>
                 <a:latin typeface="Arial" pitchFamily="34" charset="0"/>
                 <a:ea typeface="Arial" pitchFamily="34" charset="-122"/>
@@ -2023,7 +2066,7 @@
               </a:rPr>
               <a:t>Joshua Konkle  ·  Chief of Staff Strategist</a:t>
             </a:r>
-            <a:endParaRPr lang="en-US" sz="1400" dirty="0"/>
+            <a:endParaRPr lang="en-US" sz="1300" dirty="0"/>
           </a:p>
         </p:txBody>
       </p:sp>
@@ -2038,13 +2081,6 @@
 <file path=ppt/slides/slide10.xml><?xml version="1.0" encoding="utf-8"?>
 <p:sld xmlns:a="http://schemas.openxmlformats.org/drawingml/2006/main" xmlns:r="http://schemas.openxmlformats.org/officeDocument/2006/relationships" xmlns:p="http://schemas.openxmlformats.org/presentationml/2006/main">
   <p:cSld name="Slide 10">
-    <p:bg>
-      <p:bgPr>
-        <a:solidFill>
-          <a:srgbClr val="FFFFFF"/>
-        </a:solidFill>
-      </p:bgPr>
-    </p:bg>
     <p:spTree>
       <p:nvGrpSpPr>
         <p:cNvPr id="1" name=""/>
@@ -2061,32 +2097,57 @@
       </p:grpSpPr>
       <p:sp>
         <p:nvSpPr>
-          <p:cNvPr id="2" name="Text 0"/>
+          <p:cNvPr id="2" name="Shape 0"/>
+          <p:cNvSpPr/>
+          <p:nvPr/>
+        </p:nvSpPr>
+        <p:spPr>
+          <a:xfrm>
+            <a:off x="0" y="0"/>
+            <a:ext cx="9144000" cy="5143500"/>
+          </a:xfrm>
+          <a:prstGeom prst="rect">
+            <a:avLst/>
+          </a:prstGeom>
+          <a:solidFill>
+            <a:srgbClr val="FFFFFF"/>
+          </a:solidFill>
+          <a:ln w="12700">
+            <a:solidFill>
+              <a:srgbClr val="FFFFFF"/>
+            </a:solidFill>
+            <a:prstDash val="solid"/>
+          </a:ln>
+        </p:spPr>
+      </p:sp>
+      <p:sp>
+        <p:nvSpPr>
+          <p:cNvPr id="3" name="Text 1"/>
           <p:cNvSpPr/>
           <p:nvPr/>
         </p:nvSpPr>
         <p:spPr>
           <a:xfrm>
             <a:off x="457200" y="320040"/>
-            <a:ext cx="8229600" cy="457200"/>
-          </a:xfrm>
-          <a:prstGeom prst="rect">
-            <a:avLst/>
-          </a:prstGeom>
-          <a:noFill/>
-          <a:ln/>
-        </p:spPr>
-        <p:txBody>
-          <a:bodyPr wrap="square" lIns="0" tIns="0" rIns="0" bIns="0" rtlCol="0" anchor="ctr"/>
-          <a:lstStyle/>
-          <a:p>
-            <a:pPr indent="0" marL="0">
-              <a:buNone/>
-            </a:pPr>
-            <a:r>
-              <a:rPr lang="en-US" sz="2800" b="1" dirty="0">
-                <a:solidFill>
-                  <a:srgbClr val="1A1A1A"/>
+            <a:ext cx="8229600" cy="365760"/>
+          </a:xfrm>
+          <a:prstGeom prst="rect">
+            <a:avLst/>
+          </a:prstGeom>
+          <a:noFill/>
+          <a:ln/>
+        </p:spPr>
+        <p:txBody>
+          <a:bodyPr wrap="square" lIns="0" tIns="0" rIns="0" bIns="0" rtlCol="0" anchor="ctr"/>
+          <a:lstStyle/>
+          <a:p>
+            <a:pPr indent="0" marL="0">
+              <a:buNone/>
+            </a:pPr>
+            <a:r>
+              <a:rPr lang="en-US" sz="2400" b="1" dirty="0">
+                <a:solidFill>
+                  <a:srgbClr val="1B2A4A"/>
                 </a:solidFill>
                 <a:latin typeface="Arial" pitchFamily="34" charset="0"/>
                 <a:ea typeface="Arial" pitchFamily="34" charset="-122"/>
@@ -2094,58 +2155,38 @@
               </a:rPr>
               <a:t>Exercise</a:t>
             </a:r>
-            <a:endParaRPr lang="en-US" sz="2800" dirty="0"/>
-          </a:p>
-        </p:txBody>
-      </p:sp>
-      <p:sp>
-        <p:nvSpPr>
-          <p:cNvPr id="3" name="Shape 1"/>
+            <a:endParaRPr lang="en-US" sz="2400" dirty="0"/>
+          </a:p>
+        </p:txBody>
+      </p:sp>
+      <p:sp>
+        <p:nvSpPr>
+          <p:cNvPr id="4" name="Text 2"/>
           <p:cNvSpPr/>
           <p:nvPr/>
         </p:nvSpPr>
         <p:spPr>
           <a:xfrm>
             <a:off x="457200" y="1097280"/>
-            <a:ext cx="8229600" cy="3017520"/>
-          </a:xfrm>
-          <a:prstGeom prst="rect">
-            <a:avLst/>
-          </a:prstGeom>
-          <a:solidFill>
-            <a:srgbClr val="F7F7F7"/>
-          </a:solidFill>
-          <a:ln/>
-        </p:spPr>
-      </p:sp>
-      <p:sp>
-        <p:nvSpPr>
-          <p:cNvPr id="4" name="Text 2"/>
-          <p:cNvSpPr/>
-          <p:nvPr/>
-        </p:nvSpPr>
-        <p:spPr>
-          <a:xfrm>
-            <a:off x="731520" y="1371600"/>
-            <a:ext cx="7680960" cy="411480"/>
-          </a:xfrm>
-          <a:prstGeom prst="rect">
-            <a:avLst/>
-          </a:prstGeom>
-          <a:noFill/>
-          <a:ln/>
-        </p:spPr>
-        <p:txBody>
-          <a:bodyPr wrap="square" lIns="0" tIns="0" rIns="0" bIns="0" rtlCol="0" anchor="ctr"/>
-          <a:lstStyle/>
-          <a:p>
-            <a:pPr indent="0" marL="0">
-              <a:buNone/>
-            </a:pPr>
-            <a:r>
-              <a:rPr lang="en-US" sz="1700" b="1" dirty="0">
-                <a:solidFill>
-                  <a:srgbClr val="1A1A1A"/>
+            <a:ext cx="8229600" cy="2286000"/>
+          </a:xfrm>
+          <a:prstGeom prst="rect">
+            <a:avLst/>
+          </a:prstGeom>
+          <a:noFill/>
+          <a:ln/>
+        </p:spPr>
+        <p:txBody>
+          <a:bodyPr wrap="square" lIns="0" tIns="0" rIns="0" bIns="0" rtlCol="0" anchor="ctr"/>
+          <a:lstStyle/>
+          <a:p>
+            <a:pPr indent="0" marL="0">
+              <a:buNone/>
+            </a:pPr>
+            <a:r>
+              <a:rPr lang="en-US" sz="1600" dirty="0">
+                <a:solidFill>
+                  <a:srgbClr val="2A2A2A"/>
                 </a:solidFill>
                 <a:latin typeface="Arial" pitchFamily="34" charset="0"/>
                 <a:ea typeface="Arial" pitchFamily="34" charset="-122"/>
@@ -2153,7 +2194,41 @@
               </a:rPr>
               <a:t>Select one existing value stream.</a:t>
             </a:r>
-            <a:endParaRPr lang="en-US" sz="1700" dirty="0"/>
+            <a:endParaRPr lang="en-US" sz="1600" dirty="0"/>
+          </a:p>
+          <a:p>
+            <a:pPr indent="0" marL="0">
+              <a:buNone/>
+            </a:pPr>
+            <a:r>
+              <a:rPr lang="en-US" sz="1600" dirty="0">
+                <a:solidFill>
+                  <a:srgbClr val="2A2A2A"/>
+                </a:solidFill>
+                <a:latin typeface="Arial" pitchFamily="34" charset="0"/>
+                <a:ea typeface="Arial" pitchFamily="34" charset="-122"/>
+                <a:cs typeface="Arial" pitchFamily="34" charset="-120"/>
+              </a:rPr>
+              <a:t>Identify two or three points where current improvement logic still optimizes for labor arbitrage or pure cost reduction.</a:t>
+            </a:r>
+            <a:endParaRPr lang="en-US" sz="1600" dirty="0"/>
+          </a:p>
+          <a:p>
+            <a:pPr indent="0" marL="0">
+              <a:buNone/>
+            </a:pPr>
+            <a:r>
+              <a:rPr lang="en-US" sz="1600" dirty="0">
+                <a:solidFill>
+                  <a:srgbClr val="2A2A2A"/>
+                </a:solidFill>
+                <a:latin typeface="Arial" pitchFamily="34" charset="0"/>
+                <a:ea typeface="Arial" pitchFamily="34" charset="-122"/>
+                <a:cs typeface="Arial" pitchFamily="34" charset="-120"/>
+              </a:rPr>
+              <a:t>Sketch how those points could be redesigned so the same Lean tools drive sovereign capability instead.</a:t>
+            </a:r>
+            <a:endParaRPr lang="en-US" sz="1600" dirty="0"/>
           </a:p>
         </p:txBody>
       </p:sp>
@@ -2165,34 +2240,34 @@
         </p:nvSpPr>
         <p:spPr>
           <a:xfrm>
-            <a:off x="731520" y="1965960"/>
-            <a:ext cx="7680960" cy="640080"/>
-          </a:xfrm>
-          <a:prstGeom prst="rect">
-            <a:avLst/>
-          </a:prstGeom>
-          <a:noFill/>
-          <a:ln/>
-        </p:spPr>
-        <p:txBody>
-          <a:bodyPr wrap="square" lIns="0" tIns="0" rIns="0" bIns="0" rtlCol="0" anchor="ctr"/>
-          <a:lstStyle/>
-          <a:p>
-            <a:pPr indent="0" marL="0">
-              <a:buNone/>
-            </a:pPr>
-            <a:r>
-              <a:rPr lang="en-US" sz="1500" dirty="0">
-                <a:solidFill>
-                  <a:srgbClr val="1A1A1A"/>
-                </a:solidFill>
-                <a:latin typeface="Arial" pitchFamily="34" charset="0"/>
-                <a:ea typeface="Arial" pitchFamily="34" charset="-122"/>
-                <a:cs typeface="Arial" pitchFamily="34" charset="-120"/>
-              </a:rPr>
-              <a:t>Identify two or three points where current improvement logic still optimizes for labor arbitrage or pure cost reduction.</a:t>
-            </a:r>
-            <a:endParaRPr lang="en-US" sz="1500" dirty="0"/>
+            <a:off x="457200" y="4800600"/>
+            <a:ext cx="5943600" cy="256032"/>
+          </a:xfrm>
+          <a:prstGeom prst="rect">
+            <a:avLst/>
+          </a:prstGeom>
+          <a:noFill/>
+          <a:ln/>
+        </p:spPr>
+        <p:txBody>
+          <a:bodyPr wrap="square" lIns="0" tIns="0" rIns="0" bIns="0" rtlCol="0" anchor="ctr"/>
+          <a:lstStyle/>
+          <a:p>
+            <a:pPr indent="0" marL="0">
+              <a:buNone/>
+            </a:pPr>
+            <a:r>
+              <a:rPr lang="en-US" sz="1100" dirty="0">
+                <a:solidFill>
+                  <a:srgbClr val="6A6A6A"/>
+                </a:solidFill>
+                <a:latin typeface="Arial" pitchFamily="34" charset="0"/>
+                <a:ea typeface="Arial" pitchFamily="34" charset="-122"/>
+                <a:cs typeface="Arial" pitchFamily="34" charset="-120"/>
+              </a:rPr>
+              <a:t>Joshua Konkle  |  Chief of Staff Strategist</a:t>
+            </a:r>
+            <a:endParaRPr lang="en-US" sz="1100" dirty="0"/>
           </a:p>
         </p:txBody>
       </p:sp>
@@ -2204,86 +2279,8 @@
         </p:nvSpPr>
         <p:spPr>
           <a:xfrm>
-            <a:off x="731520" y="2834640"/>
-            <a:ext cx="7680960" cy="640080"/>
-          </a:xfrm>
-          <a:prstGeom prst="rect">
-            <a:avLst/>
-          </a:prstGeom>
-          <a:noFill/>
-          <a:ln/>
-        </p:spPr>
-        <p:txBody>
-          <a:bodyPr wrap="square" lIns="0" tIns="0" rIns="0" bIns="0" rtlCol="0" anchor="ctr"/>
-          <a:lstStyle/>
-          <a:p>
-            <a:pPr indent="0" marL="0">
-              <a:buNone/>
-            </a:pPr>
-            <a:r>
-              <a:rPr lang="en-US" sz="1500" dirty="0">
-                <a:solidFill>
-                  <a:srgbClr val="1A1A1A"/>
-                </a:solidFill>
-                <a:latin typeface="Arial" pitchFamily="34" charset="0"/>
-                <a:ea typeface="Arial" pitchFamily="34" charset="-122"/>
-                <a:cs typeface="Arial" pitchFamily="34" charset="-120"/>
-              </a:rPr>
-              <a:t>Sketch how those points could be redesigned so the same Lean tools drive sovereign capability instead.</a:t>
-            </a:r>
-            <a:endParaRPr lang="en-US" sz="1500" dirty="0"/>
-          </a:p>
-        </p:txBody>
-      </p:sp>
-      <p:sp>
-        <p:nvSpPr>
-          <p:cNvPr id="7" name="Text 5"/>
-          <p:cNvSpPr/>
-          <p:nvPr/>
-        </p:nvSpPr>
-        <p:spPr>
-          <a:xfrm>
-            <a:off x="457200" y="4800600"/>
-            <a:ext cx="5943600" cy="228600"/>
-          </a:xfrm>
-          <a:prstGeom prst="rect">
-            <a:avLst/>
-          </a:prstGeom>
-          <a:noFill/>
-          <a:ln/>
-        </p:spPr>
-        <p:txBody>
-          <a:bodyPr wrap="square" lIns="0" tIns="0" rIns="0" bIns="0" rtlCol="0" anchor="ctr"/>
-          <a:lstStyle/>
-          <a:p>
-            <a:pPr indent="0" marL="0">
-              <a:buNone/>
-            </a:pPr>
-            <a:r>
-              <a:rPr lang="en-US" sz="1000" dirty="0">
-                <a:solidFill>
-                  <a:srgbClr val="555555"/>
-                </a:solidFill>
-                <a:latin typeface="Arial" pitchFamily="34" charset="0"/>
-                <a:ea typeface="Arial" pitchFamily="34" charset="-122"/>
-                <a:cs typeface="Arial" pitchFamily="34" charset="-120"/>
-              </a:rPr>
-              <a:t>Joshua Konkle  |  Chief of Staff Strategist</a:t>
-            </a:r>
-            <a:endParaRPr lang="en-US" sz="1000" dirty="0"/>
-          </a:p>
-        </p:txBody>
-      </p:sp>
-      <p:sp>
-        <p:nvSpPr>
-          <p:cNvPr id="8" name="Text 6"/>
-          <p:cNvSpPr/>
-          <p:nvPr/>
-        </p:nvSpPr>
-        <p:spPr>
-          <a:xfrm>
-            <a:off x="7772400" y="4800600"/>
-            <a:ext cx="914400" cy="228600"/>
+            <a:off x="7498080" y="4800600"/>
+            <a:ext cx="1188720" cy="256032"/>
           </a:xfrm>
           <a:prstGeom prst="rect">
             <a:avLst/>
@@ -2299,9 +2296,9 @@
               <a:buNone/>
             </a:pPr>
             <a:r>
-              <a:rPr lang="en-US" sz="1000" dirty="0">
-                <a:solidFill>
-                  <a:srgbClr val="555555"/>
+              <a:rPr lang="en-US" sz="1100" dirty="0">
+                <a:solidFill>
+                  <a:srgbClr val="6A6A6A"/>
                 </a:solidFill>
                 <a:latin typeface="Arial" pitchFamily="34" charset="0"/>
                 <a:ea typeface="Arial" pitchFamily="34" charset="-122"/>
@@ -2309,7 +2306,7 @@
               </a:rPr>
               <a:t>10 / 12</a:t>
             </a:r>
-            <a:endParaRPr lang="en-US" sz="1000" dirty="0"/>
+            <a:endParaRPr lang="en-US" sz="1100" dirty="0"/>
           </a:p>
         </p:txBody>
       </p:sp>
@@ -2324,13 +2321,6 @@
 <file path=ppt/slides/slide11.xml><?xml version="1.0" encoding="utf-8"?>
 <p:sld xmlns:a="http://schemas.openxmlformats.org/drawingml/2006/main" xmlns:r="http://schemas.openxmlformats.org/officeDocument/2006/relationships" xmlns:p="http://schemas.openxmlformats.org/presentationml/2006/main">
   <p:cSld name="Slide 11">
-    <p:bg>
-      <p:bgPr>
-        <a:solidFill>
-          <a:srgbClr val="FFFFFF"/>
-        </a:solidFill>
-      </p:bgPr>
-    </p:bg>
     <p:spTree>
       <p:nvGrpSpPr>
         <p:cNvPr id="1" name=""/>
@@ -2347,32 +2337,57 @@
       </p:grpSpPr>
       <p:sp>
         <p:nvSpPr>
-          <p:cNvPr id="2" name="Text 0"/>
-          <p:cNvSpPr/>
-          <p:nvPr/>
-        </p:nvSpPr>
-        <p:spPr>
-          <a:xfrm>
-            <a:off x="457200" y="320040"/>
-            <a:ext cx="8229600" cy="457200"/>
-          </a:xfrm>
-          <a:prstGeom prst="rect">
-            <a:avLst/>
-          </a:prstGeom>
-          <a:noFill/>
-          <a:ln/>
-        </p:spPr>
-        <p:txBody>
-          <a:bodyPr wrap="square" lIns="0" tIns="0" rIns="0" bIns="0" rtlCol="0" anchor="ctr"/>
-          <a:lstStyle/>
-          <a:p>
-            <a:pPr indent="0" marL="0">
-              <a:buNone/>
-            </a:pPr>
-            <a:r>
-              <a:rPr lang="en-US" sz="2600" b="1" dirty="0">
-                <a:solidFill>
-                  <a:srgbClr val="1A1A1A"/>
+          <p:cNvPr id="2" name="Shape 0"/>
+          <p:cNvSpPr/>
+          <p:nvPr/>
+        </p:nvSpPr>
+        <p:spPr>
+          <a:xfrm>
+            <a:off x="0" y="0"/>
+            <a:ext cx="9144000" cy="5143500"/>
+          </a:xfrm>
+          <a:prstGeom prst="rect">
+            <a:avLst/>
+          </a:prstGeom>
+          <a:solidFill>
+            <a:srgbClr val="FFFFFF"/>
+          </a:solidFill>
+          <a:ln w="12700">
+            <a:solidFill>
+              <a:srgbClr val="FFFFFF"/>
+            </a:solidFill>
+            <a:prstDash val="solid"/>
+          </a:ln>
+        </p:spPr>
+      </p:sp>
+      <p:sp>
+        <p:nvSpPr>
+          <p:cNvPr id="3" name="Text 1"/>
+          <p:cNvSpPr/>
+          <p:nvPr/>
+        </p:nvSpPr>
+        <p:spPr>
+          <a:xfrm>
+            <a:off x="457200" y="256032"/>
+            <a:ext cx="8229600" cy="365760"/>
+          </a:xfrm>
+          <a:prstGeom prst="rect">
+            <a:avLst/>
+          </a:prstGeom>
+          <a:noFill/>
+          <a:ln/>
+        </p:spPr>
+        <p:txBody>
+          <a:bodyPr wrap="square" lIns="0" tIns="0" rIns="0" bIns="0" rtlCol="0" anchor="ctr"/>
+          <a:lstStyle/>
+          <a:p>
+            <a:pPr indent="0" marL="0">
+              <a:buNone/>
+            </a:pPr>
+            <a:r>
+              <a:rPr lang="en-US" sz="2400" b="1" dirty="0">
+                <a:solidFill>
+                  <a:srgbClr val="1B2A4A"/>
                 </a:solidFill>
                 <a:latin typeface="Arial" pitchFamily="34" charset="0"/>
                 <a:ea typeface="Arial" pitchFamily="34" charset="-122"/>
@@ -2380,58 +2395,65 @@
               </a:rPr>
               <a:t>Three Highest-Leverage Moves</a:t>
             </a:r>
-            <a:endParaRPr lang="en-US" sz="2600" dirty="0"/>
-          </a:p>
-        </p:txBody>
-      </p:sp>
-      <p:sp>
-        <p:nvSpPr>
-          <p:cNvPr id="3" name="Shape 1"/>
-          <p:cNvSpPr/>
-          <p:nvPr/>
-        </p:nvSpPr>
-        <p:spPr>
-          <a:xfrm>
-            <a:off x="457200" y="1051560"/>
-            <a:ext cx="640080" cy="640080"/>
-          </a:xfrm>
-          <a:prstGeom prst="ellipse">
-            <a:avLst/>
+            <a:endParaRPr lang="en-US" sz="2400" dirty="0"/>
+          </a:p>
+        </p:txBody>
+      </p:sp>
+      <p:sp>
+        <p:nvSpPr>
+          <p:cNvPr id="4" name="Shape 2"/>
+          <p:cNvSpPr/>
+          <p:nvPr/>
+        </p:nvSpPr>
+        <p:spPr>
+          <a:xfrm>
+            <a:off x="457200" y="868680"/>
+            <a:ext cx="8229600" cy="960120"/>
+          </a:xfrm>
+          <a:prstGeom prst="roundRect">
+            <a:avLst>
+              <a:gd name="adj" fmla="val 7619"/>
+            </a:avLst>
           </a:prstGeom>
           <a:solidFill>
-            <a:srgbClr val="1A1A1A"/>
+            <a:srgbClr val="1B2A4A"/>
           </a:solidFill>
-          <a:ln/>
-        </p:spPr>
-      </p:sp>
-      <p:sp>
-        <p:nvSpPr>
-          <p:cNvPr id="4" name="Text 2"/>
-          <p:cNvSpPr/>
-          <p:nvPr/>
-        </p:nvSpPr>
-        <p:spPr>
-          <a:xfrm>
-            <a:off x="457200" y="1051560"/>
-            <a:ext cx="640080" cy="640080"/>
-          </a:xfrm>
-          <a:prstGeom prst="rect">
-            <a:avLst/>
-          </a:prstGeom>
-          <a:noFill/>
-          <a:ln/>
-        </p:spPr>
-        <p:txBody>
-          <a:bodyPr wrap="square" lIns="0" tIns="0" rIns="0" bIns="0" rtlCol="0" anchor="ctr"/>
-          <a:lstStyle/>
-          <a:p>
-            <a:pPr algn="ctr" indent="0" marL="0">
+          <a:ln w="12700">
+            <a:solidFill>
+              <a:srgbClr val="1B2A4A"/>
+            </a:solidFill>
+            <a:prstDash val="solid"/>
+          </a:ln>
+        </p:spPr>
+      </p:sp>
+      <p:sp>
+        <p:nvSpPr>
+          <p:cNvPr id="5" name="Text 3"/>
+          <p:cNvSpPr/>
+          <p:nvPr/>
+        </p:nvSpPr>
+        <p:spPr>
+          <a:xfrm>
+            <a:off x="640080" y="1124712"/>
+            <a:ext cx="457200" cy="411480"/>
+          </a:xfrm>
+          <a:prstGeom prst="rect">
+            <a:avLst/>
+          </a:prstGeom>
+          <a:noFill/>
+          <a:ln/>
+        </p:spPr>
+        <p:txBody>
+          <a:bodyPr wrap="square" lIns="0" tIns="0" rIns="0" bIns="0" rtlCol="0" anchor="ctr"/>
+          <a:lstStyle/>
+          <a:p>
+            <a:pPr indent="0" marL="0">
               <a:buNone/>
             </a:pPr>
             <a:r>
               <a:rPr lang="en-US" sz="2200" b="1" dirty="0">
                 <a:solidFill>
-                  <a:srgbClr val="F5F5F5"/>
+                  <a:srgbClr val="C9A227"/>
                 </a:solidFill>
                 <a:latin typeface="Arial" pitchFamily="34" charset="0"/>
                 <a:ea typeface="Arial" pitchFamily="34" charset="-122"/>
@@ -2445,32 +2467,32 @@
       </p:sp>
       <p:sp>
         <p:nvSpPr>
-          <p:cNvPr id="5" name="Text 3"/>
-          <p:cNvSpPr/>
-          <p:nvPr/>
-        </p:nvSpPr>
-        <p:spPr>
-          <a:xfrm>
-            <a:off x="1371600" y="1051560"/>
-            <a:ext cx="7132320" cy="822960"/>
-          </a:xfrm>
-          <a:prstGeom prst="rect">
-            <a:avLst/>
-          </a:prstGeom>
-          <a:noFill/>
-          <a:ln/>
-        </p:spPr>
-        <p:txBody>
-          <a:bodyPr wrap="square" lIns="0" tIns="0" rIns="0" bIns="0" rtlCol="0" anchor="ctr"/>
-          <a:lstStyle/>
-          <a:p>
-            <a:pPr indent="0" marL="0">
-              <a:buNone/>
-            </a:pPr>
-            <a:r>
-              <a:rPr lang="en-US" sz="1500" dirty="0">
-                <a:solidFill>
-                  <a:srgbClr val="1A1A1A"/>
+          <p:cNvPr id="6" name="Text 4"/>
+          <p:cNvSpPr/>
+          <p:nvPr/>
+        </p:nvSpPr>
+        <p:spPr>
+          <a:xfrm>
+            <a:off x="1280160" y="1051560"/>
+            <a:ext cx="7132320" cy="640080"/>
+          </a:xfrm>
+          <a:prstGeom prst="rect">
+            <a:avLst/>
+          </a:prstGeom>
+          <a:noFill/>
+          <a:ln/>
+        </p:spPr>
+        <p:txBody>
+          <a:bodyPr wrap="square" lIns="0" tIns="0" rIns="0" bIns="0" rtlCol="0" anchor="ctr"/>
+          <a:lstStyle/>
+          <a:p>
+            <a:pPr indent="0" marL="0">
+              <a:buNone/>
+            </a:pPr>
+            <a:r>
+              <a:rPr lang="en-US" sz="1400" dirty="0">
+                <a:solidFill>
+                  <a:srgbClr val="FFFFFF"/>
                 </a:solidFill>
                 <a:latin typeface="Arial" pitchFamily="34" charset="0"/>
                 <a:ea typeface="Arial" pitchFamily="34" charset="-122"/>
@@ -2478,58 +2500,65 @@
               </a:rPr>
               <a:t>Audit one major value stream for hidden dependence on short-cycle non-sovereign labor or pure cost-out logic.</a:t>
             </a:r>
-            <a:endParaRPr lang="en-US" sz="1500" dirty="0"/>
-          </a:p>
-        </p:txBody>
-      </p:sp>
-      <p:sp>
-        <p:nvSpPr>
-          <p:cNvPr id="6" name="Shape 4"/>
-          <p:cNvSpPr/>
-          <p:nvPr/>
-        </p:nvSpPr>
-        <p:spPr>
-          <a:xfrm>
-            <a:off x="457200" y="2103120"/>
-            <a:ext cx="640080" cy="640080"/>
-          </a:xfrm>
-          <a:prstGeom prst="ellipse">
-            <a:avLst/>
+            <a:endParaRPr lang="en-US" sz="1400" dirty="0"/>
+          </a:p>
+        </p:txBody>
+      </p:sp>
+      <p:sp>
+        <p:nvSpPr>
+          <p:cNvPr id="7" name="Shape 5"/>
+          <p:cNvSpPr/>
+          <p:nvPr/>
+        </p:nvSpPr>
+        <p:spPr>
+          <a:xfrm>
+            <a:off x="457200" y="1965960"/>
+            <a:ext cx="8229600" cy="960120"/>
+          </a:xfrm>
+          <a:prstGeom prst="roundRect">
+            <a:avLst>
+              <a:gd name="adj" fmla="val 7619"/>
+            </a:avLst>
           </a:prstGeom>
           <a:solidFill>
-            <a:srgbClr val="1A1A1A"/>
+            <a:srgbClr val="1B2A4A"/>
           </a:solidFill>
-          <a:ln/>
-        </p:spPr>
-      </p:sp>
-      <p:sp>
-        <p:nvSpPr>
-          <p:cNvPr id="7" name="Text 5"/>
-          <p:cNvSpPr/>
-          <p:nvPr/>
-        </p:nvSpPr>
-        <p:spPr>
-          <a:xfrm>
-            <a:off x="457200" y="2103120"/>
-            <a:ext cx="640080" cy="640080"/>
-          </a:xfrm>
-          <a:prstGeom prst="rect">
-            <a:avLst/>
-          </a:prstGeom>
-          <a:noFill/>
-          <a:ln/>
-        </p:spPr>
-        <p:txBody>
-          <a:bodyPr wrap="square" lIns="0" tIns="0" rIns="0" bIns="0" rtlCol="0" anchor="ctr"/>
-          <a:lstStyle/>
-          <a:p>
-            <a:pPr algn="ctr" indent="0" marL="0">
+          <a:ln w="12700">
+            <a:solidFill>
+              <a:srgbClr val="1B2A4A"/>
+            </a:solidFill>
+            <a:prstDash val="solid"/>
+          </a:ln>
+        </p:spPr>
+      </p:sp>
+      <p:sp>
+        <p:nvSpPr>
+          <p:cNvPr id="8" name="Text 6"/>
+          <p:cNvSpPr/>
+          <p:nvPr/>
+        </p:nvSpPr>
+        <p:spPr>
+          <a:xfrm>
+            <a:off x="640080" y="2221992"/>
+            <a:ext cx="457200" cy="411480"/>
+          </a:xfrm>
+          <a:prstGeom prst="rect">
+            <a:avLst/>
+          </a:prstGeom>
+          <a:noFill/>
+          <a:ln/>
+        </p:spPr>
+        <p:txBody>
+          <a:bodyPr wrap="square" lIns="0" tIns="0" rIns="0" bIns="0" rtlCol="0" anchor="ctr"/>
+          <a:lstStyle/>
+          <a:p>
+            <a:pPr indent="0" marL="0">
               <a:buNone/>
             </a:pPr>
             <a:r>
               <a:rPr lang="en-US" sz="2200" b="1" dirty="0">
                 <a:solidFill>
-                  <a:srgbClr val="F5F5F5"/>
+                  <a:srgbClr val="C9A227"/>
                 </a:solidFill>
                 <a:latin typeface="Arial" pitchFamily="34" charset="0"/>
                 <a:ea typeface="Arial" pitchFamily="34" charset="-122"/>
@@ -2543,32 +2572,32 @@
       </p:sp>
       <p:sp>
         <p:nvSpPr>
-          <p:cNvPr id="8" name="Text 6"/>
-          <p:cNvSpPr/>
-          <p:nvPr/>
-        </p:nvSpPr>
-        <p:spPr>
-          <a:xfrm>
-            <a:off x="1371600" y="2103120"/>
-            <a:ext cx="7132320" cy="822960"/>
-          </a:xfrm>
-          <a:prstGeom prst="rect">
-            <a:avLst/>
-          </a:prstGeom>
-          <a:noFill/>
-          <a:ln/>
-        </p:spPr>
-        <p:txBody>
-          <a:bodyPr wrap="square" lIns="0" tIns="0" rIns="0" bIns="0" rtlCol="0" anchor="ctr"/>
-          <a:lstStyle/>
-          <a:p>
-            <a:pPr indent="0" marL="0">
-              <a:buNone/>
-            </a:pPr>
-            <a:r>
-              <a:rPr lang="en-US" sz="1500" dirty="0">
-                <a:solidFill>
-                  <a:srgbClr val="1A1A1A"/>
+          <p:cNvPr id="9" name="Text 7"/>
+          <p:cNvSpPr/>
+          <p:nvPr/>
+        </p:nvSpPr>
+        <p:spPr>
+          <a:xfrm>
+            <a:off x="1280160" y="2148840"/>
+            <a:ext cx="7132320" cy="640080"/>
+          </a:xfrm>
+          <a:prstGeom prst="rect">
+            <a:avLst/>
+          </a:prstGeom>
+          <a:noFill/>
+          <a:ln/>
+        </p:spPr>
+        <p:txBody>
+          <a:bodyPr wrap="square" lIns="0" tIns="0" rIns="0" bIns="0" rtlCol="0" anchor="ctr"/>
+          <a:lstStyle/>
+          <a:p>
+            <a:pPr indent="0" marL="0">
+              <a:buNone/>
+            </a:pPr>
+            <a:r>
+              <a:rPr lang="en-US" sz="1400" dirty="0">
+                <a:solidFill>
+                  <a:srgbClr val="FFFFFF"/>
                 </a:solidFill>
                 <a:latin typeface="Arial" pitchFamily="34" charset="0"/>
                 <a:ea typeface="Arial" pitchFamily="34" charset="-122"/>
@@ -2576,58 +2605,65 @@
               </a:rPr>
               <a:t>Redefine value and waste for that stream so capability growth and domestic productive strength are explicit.</a:t>
             </a:r>
-            <a:endParaRPr lang="en-US" sz="1500" dirty="0"/>
-          </a:p>
-        </p:txBody>
-      </p:sp>
-      <p:sp>
-        <p:nvSpPr>
-          <p:cNvPr id="9" name="Shape 7"/>
-          <p:cNvSpPr/>
-          <p:nvPr/>
-        </p:nvSpPr>
-        <p:spPr>
-          <a:xfrm>
-            <a:off x="457200" y="3154680"/>
-            <a:ext cx="640080" cy="640080"/>
-          </a:xfrm>
-          <a:prstGeom prst="ellipse">
-            <a:avLst/>
+            <a:endParaRPr lang="en-US" sz="1400" dirty="0"/>
+          </a:p>
+        </p:txBody>
+      </p:sp>
+      <p:sp>
+        <p:nvSpPr>
+          <p:cNvPr id="10" name="Shape 8"/>
+          <p:cNvSpPr/>
+          <p:nvPr/>
+        </p:nvSpPr>
+        <p:spPr>
+          <a:xfrm>
+            <a:off x="457200" y="3063240"/>
+            <a:ext cx="8229600" cy="960120"/>
+          </a:xfrm>
+          <a:prstGeom prst="roundRect">
+            <a:avLst>
+              <a:gd name="adj" fmla="val 7619"/>
+            </a:avLst>
           </a:prstGeom>
           <a:solidFill>
-            <a:srgbClr val="1A1A1A"/>
+            <a:srgbClr val="1B2A4A"/>
           </a:solidFill>
-          <a:ln/>
-        </p:spPr>
-      </p:sp>
-      <p:sp>
-        <p:nvSpPr>
-          <p:cNvPr id="10" name="Text 8"/>
-          <p:cNvSpPr/>
-          <p:nvPr/>
-        </p:nvSpPr>
-        <p:spPr>
-          <a:xfrm>
-            <a:off x="457200" y="3154680"/>
-            <a:ext cx="640080" cy="640080"/>
-          </a:xfrm>
-          <a:prstGeom prst="rect">
-            <a:avLst/>
-          </a:prstGeom>
-          <a:noFill/>
-          <a:ln/>
-        </p:spPr>
-        <p:txBody>
-          <a:bodyPr wrap="square" lIns="0" tIns="0" rIns="0" bIns="0" rtlCol="0" anchor="ctr"/>
-          <a:lstStyle/>
-          <a:p>
-            <a:pPr algn="ctr" indent="0" marL="0">
+          <a:ln w="12700">
+            <a:solidFill>
+              <a:srgbClr val="1B2A4A"/>
+            </a:solidFill>
+            <a:prstDash val="solid"/>
+          </a:ln>
+        </p:spPr>
+      </p:sp>
+      <p:sp>
+        <p:nvSpPr>
+          <p:cNvPr id="11" name="Text 9"/>
+          <p:cNvSpPr/>
+          <p:nvPr/>
+        </p:nvSpPr>
+        <p:spPr>
+          <a:xfrm>
+            <a:off x="640080" y="3319272"/>
+            <a:ext cx="457200" cy="411480"/>
+          </a:xfrm>
+          <a:prstGeom prst="rect">
+            <a:avLst/>
+          </a:prstGeom>
+          <a:noFill/>
+          <a:ln/>
+        </p:spPr>
+        <p:txBody>
+          <a:bodyPr wrap="square" lIns="0" tIns="0" rIns="0" bIns="0" rtlCol="0" anchor="ctr"/>
+          <a:lstStyle/>
+          <a:p>
+            <a:pPr indent="0" marL="0">
               <a:buNone/>
             </a:pPr>
             <a:r>
               <a:rPr lang="en-US" sz="2200" b="1" dirty="0">
                 <a:solidFill>
-                  <a:srgbClr val="F5F5F5"/>
+                  <a:srgbClr val="C9A227"/>
                 </a:solidFill>
                 <a:latin typeface="Arial" pitchFamily="34" charset="0"/>
                 <a:ea typeface="Arial" pitchFamily="34" charset="-122"/>
@@ -2641,32 +2677,32 @@
       </p:sp>
       <p:sp>
         <p:nvSpPr>
-          <p:cNvPr id="11" name="Text 9"/>
-          <p:cNvSpPr/>
-          <p:nvPr/>
-        </p:nvSpPr>
-        <p:spPr>
-          <a:xfrm>
-            <a:off x="1371600" y="3154680"/>
-            <a:ext cx="7132320" cy="822960"/>
-          </a:xfrm>
-          <a:prstGeom prst="rect">
-            <a:avLst/>
-          </a:prstGeom>
-          <a:noFill/>
-          <a:ln/>
-        </p:spPr>
-        <p:txBody>
-          <a:bodyPr wrap="square" lIns="0" tIns="0" rIns="0" bIns="0" rtlCol="0" anchor="ctr"/>
-          <a:lstStyle/>
-          <a:p>
-            <a:pPr indent="0" marL="0">
-              <a:buNone/>
-            </a:pPr>
-            <a:r>
-              <a:rPr lang="en-US" sz="1500" dirty="0">
-                <a:solidFill>
-                  <a:srgbClr val="1A1A1A"/>
+          <p:cNvPr id="12" name="Text 10"/>
+          <p:cNvSpPr/>
+          <p:nvPr/>
+        </p:nvSpPr>
+        <p:spPr>
+          <a:xfrm>
+            <a:off x="1280160" y="3246120"/>
+            <a:ext cx="7132320" cy="640080"/>
+          </a:xfrm>
+          <a:prstGeom prst="rect">
+            <a:avLst/>
+          </a:prstGeom>
+          <a:noFill/>
+          <a:ln/>
+        </p:spPr>
+        <p:txBody>
+          <a:bodyPr wrap="square" lIns="0" tIns="0" rIns="0" bIns="0" rtlCol="0" anchor="ctr"/>
+          <a:lstStyle/>
+          <a:p>
+            <a:pPr indent="0" marL="0">
+              <a:buNone/>
+            </a:pPr>
+            <a:r>
+              <a:rPr lang="en-US" sz="1400" dirty="0">
+                <a:solidFill>
+                  <a:srgbClr val="FFFFFF"/>
                 </a:solidFill>
                 <a:latin typeface="Arial" pitchFamily="34" charset="0"/>
                 <a:ea typeface="Arial" pitchFamily="34" charset="-122"/>
@@ -2674,38 +2710,38 @@
               </a:rPr>
               <a:t>Align the redesigned value stream with the Business Model Canvas, OKR system, and Operating Model already covered.</a:t>
             </a:r>
-            <a:endParaRPr lang="en-US" sz="1500" dirty="0"/>
-          </a:p>
-        </p:txBody>
-      </p:sp>
-      <p:sp>
-        <p:nvSpPr>
-          <p:cNvPr id="12" name="Text 10"/>
+            <a:endParaRPr lang="en-US" sz="1400" dirty="0"/>
+          </a:p>
+        </p:txBody>
+      </p:sp>
+      <p:sp>
+        <p:nvSpPr>
+          <p:cNvPr id="13" name="Text 11"/>
           <p:cNvSpPr/>
           <p:nvPr/>
         </p:nvSpPr>
         <p:spPr>
           <a:xfrm>
             <a:off x="457200" y="4800600"/>
-            <a:ext cx="5943600" cy="228600"/>
-          </a:xfrm>
-          <a:prstGeom prst="rect">
-            <a:avLst/>
-          </a:prstGeom>
-          <a:noFill/>
-          <a:ln/>
-        </p:spPr>
-        <p:txBody>
-          <a:bodyPr wrap="square" lIns="0" tIns="0" rIns="0" bIns="0" rtlCol="0" anchor="ctr"/>
-          <a:lstStyle/>
-          <a:p>
-            <a:pPr indent="0" marL="0">
-              <a:buNone/>
-            </a:pPr>
-            <a:r>
-              <a:rPr lang="en-US" sz="1000" dirty="0">
-                <a:solidFill>
-                  <a:srgbClr val="555555"/>
+            <a:ext cx="5943600" cy="256032"/>
+          </a:xfrm>
+          <a:prstGeom prst="rect">
+            <a:avLst/>
+          </a:prstGeom>
+          <a:noFill/>
+          <a:ln/>
+        </p:spPr>
+        <p:txBody>
+          <a:bodyPr wrap="square" lIns="0" tIns="0" rIns="0" bIns="0" rtlCol="0" anchor="ctr"/>
+          <a:lstStyle/>
+          <a:p>
+            <a:pPr indent="0" marL="0">
+              <a:buNone/>
+            </a:pPr>
+            <a:r>
+              <a:rPr lang="en-US" sz="1100" dirty="0">
+                <a:solidFill>
+                  <a:srgbClr val="6A6A6A"/>
                 </a:solidFill>
                 <a:latin typeface="Arial" pitchFamily="34" charset="0"/>
                 <a:ea typeface="Arial" pitchFamily="34" charset="-122"/>
@@ -2713,20 +2749,20 @@
               </a:rPr>
               <a:t>Joshua Konkle  |  Chief of Staff Strategist</a:t>
             </a:r>
-            <a:endParaRPr lang="en-US" sz="1000" dirty="0"/>
-          </a:p>
-        </p:txBody>
-      </p:sp>
-      <p:sp>
-        <p:nvSpPr>
-          <p:cNvPr id="13" name="Text 11"/>
-          <p:cNvSpPr/>
-          <p:nvPr/>
-        </p:nvSpPr>
-        <p:spPr>
-          <a:xfrm>
-            <a:off x="7772400" y="4800600"/>
-            <a:ext cx="914400" cy="228600"/>
+            <a:endParaRPr lang="en-US" sz="1100" dirty="0"/>
+          </a:p>
+        </p:txBody>
+      </p:sp>
+      <p:sp>
+        <p:nvSpPr>
+          <p:cNvPr id="14" name="Text 12"/>
+          <p:cNvSpPr/>
+          <p:nvPr/>
+        </p:nvSpPr>
+        <p:spPr>
+          <a:xfrm>
+            <a:off x="7498080" y="4800600"/>
+            <a:ext cx="1188720" cy="256032"/>
           </a:xfrm>
           <a:prstGeom prst="rect">
             <a:avLst/>
@@ -2742,9 +2778,9 @@
               <a:buNone/>
             </a:pPr>
             <a:r>
-              <a:rPr lang="en-US" sz="1000" dirty="0">
-                <a:solidFill>
-                  <a:srgbClr val="555555"/>
+              <a:rPr lang="en-US" sz="1100" dirty="0">
+                <a:solidFill>
+                  <a:srgbClr val="6A6A6A"/>
                 </a:solidFill>
                 <a:latin typeface="Arial" pitchFamily="34" charset="0"/>
                 <a:ea typeface="Arial" pitchFamily="34" charset="-122"/>
@@ -2752,7 +2788,7 @@
               </a:rPr>
               <a:t>11 / 12</a:t>
             </a:r>
-            <a:endParaRPr lang="en-US" sz="1000" dirty="0"/>
+            <a:endParaRPr lang="en-US" sz="1100" dirty="0"/>
           </a:p>
         </p:txBody>
       </p:sp>
@@ -2767,13 +2803,6 @@
 <file path=ppt/slides/slide12.xml><?xml version="1.0" encoding="utf-8"?>
 <p:sld xmlns:a="http://schemas.openxmlformats.org/drawingml/2006/main" xmlns:r="http://schemas.openxmlformats.org/officeDocument/2006/relationships" xmlns:p="http://schemas.openxmlformats.org/presentationml/2006/main">
   <p:cSld name="Slide 12">
-    <p:bg>
-      <p:bgPr>
-        <a:solidFill>
-          <a:srgbClr val="111111"/>
-        </a:solidFill>
-      </p:bgPr>
-    </p:bg>
     <p:spTree>
       <p:nvGrpSpPr>
         <p:cNvPr id="1" name=""/>
@@ -2790,13 +2819,38 @@
       </p:grpSpPr>
       <p:sp>
         <p:nvSpPr>
-          <p:cNvPr id="2" name="Text 0"/>
-          <p:cNvSpPr/>
-          <p:nvPr/>
-        </p:nvSpPr>
-        <p:spPr>
-          <a:xfrm>
-            <a:off x="548640" y="731520"/>
+          <p:cNvPr id="2" name="Shape 0"/>
+          <p:cNvSpPr/>
+          <p:nvPr/>
+        </p:nvSpPr>
+        <p:spPr>
+          <a:xfrm>
+            <a:off x="0" y="0"/>
+            <a:ext cx="9144000" cy="5143500"/>
+          </a:xfrm>
+          <a:prstGeom prst="rect">
+            <a:avLst/>
+          </a:prstGeom>
+          <a:solidFill>
+            <a:srgbClr val="111111"/>
+          </a:solidFill>
+          <a:ln w="12700">
+            <a:solidFill>
+              <a:srgbClr val="111111"/>
+            </a:solidFill>
+            <a:prstDash val="solid"/>
+          </a:ln>
+        </p:spPr>
+      </p:sp>
+      <p:sp>
+        <p:nvSpPr>
+          <p:cNvPr id="3" name="Text 1"/>
+          <p:cNvSpPr/>
+          <p:nvPr/>
+        </p:nvSpPr>
+        <p:spPr>
+          <a:xfrm>
+            <a:off x="548640" y="822960"/>
             <a:ext cx="8046720" cy="365760"/>
           </a:xfrm>
           <a:prstGeom prst="rect">
@@ -2813,15 +2867,174 @@
               <a:buNone/>
             </a:pPr>
             <a:r>
-              <a:rPr lang="en-US" sz="1600" dirty="0">
-                <a:solidFill>
-                  <a:srgbClr val="AAAAAA"/>
-                </a:solidFill>
-                <a:latin typeface="Arial" pitchFamily="34" charset="0"/>
-                <a:ea typeface="Arial" pitchFamily="34" charset="-122"/>
-                <a:cs typeface="Arial" pitchFamily="34" charset="-120"/>
-              </a:rPr>
-              <a:t>The Series Arc</a:t>
+              <a:rPr lang="en-US" sz="2400" b="1" dirty="0">
+                <a:solidFill>
+                  <a:srgbClr val="FFFFFF"/>
+                </a:solidFill>
+                <a:latin typeface="Arial" pitchFamily="34" charset="0"/>
+                <a:ea typeface="Arial" pitchFamily="34" charset="-122"/>
+                <a:cs typeface="Arial" pitchFamily="34" charset="-120"/>
+              </a:rPr>
+              <a:t>Next Steps</a:t>
+            </a:r>
+            <a:endParaRPr lang="en-US" sz="2400" dirty="0"/>
+          </a:p>
+        </p:txBody>
+      </p:sp>
+      <p:sp>
+        <p:nvSpPr>
+          <p:cNvPr id="4" name="Shape 2"/>
+          <p:cNvSpPr/>
+          <p:nvPr/>
+        </p:nvSpPr>
+        <p:spPr>
+          <a:xfrm>
+            <a:off x="548640" y="1280160"/>
+            <a:ext cx="1371600" cy="54864"/>
+          </a:xfrm>
+          <a:prstGeom prst="rect">
+            <a:avLst/>
+          </a:prstGeom>
+          <a:solidFill>
+            <a:srgbClr val="C9A227"/>
+          </a:solidFill>
+          <a:ln w="12700">
+            <a:solidFill>
+              <a:srgbClr val="C9A227"/>
+            </a:solidFill>
+            <a:prstDash val="solid"/>
+          </a:ln>
+        </p:spPr>
+      </p:sp>
+      <p:sp>
+        <p:nvSpPr>
+          <p:cNvPr id="5" name="Text 3"/>
+          <p:cNvSpPr/>
+          <p:nvPr/>
+        </p:nvSpPr>
+        <p:spPr>
+          <a:xfrm>
+            <a:off x="548640" y="1508760"/>
+            <a:ext cx="8046720" cy="320040"/>
+          </a:xfrm>
+          <a:prstGeom prst="rect">
+            <a:avLst/>
+          </a:prstGeom>
+          <a:noFill/>
+          <a:ln/>
+        </p:spPr>
+        <p:txBody>
+          <a:bodyPr wrap="square" lIns="0" tIns="0" rIns="0" bIns="0" rtlCol="0" anchor="ctr"/>
+          <a:lstStyle/>
+          <a:p>
+            <a:pPr indent="0" marL="0">
+              <a:buNone/>
+            </a:pPr>
+            <a:r>
+              <a:rPr lang="en-US" sz="1300" dirty="0">
+                <a:solidFill>
+                  <a:srgbClr val="C9A227"/>
+                </a:solidFill>
+                <a:latin typeface="Arial" pitchFamily="34" charset="0"/>
+                <a:ea typeface="Arial" pitchFamily="34" charset="-122"/>
+                <a:cs typeface="Arial" pitchFamily="34" charset="-120"/>
+              </a:rPr>
+              <a:t>Canvas  →  OKRs  →  Operating Model  →  Value Streams  →  Workforce Strategy</a:t>
+            </a:r>
+            <a:endParaRPr lang="en-US" sz="1300" dirty="0"/>
+          </a:p>
+        </p:txBody>
+      </p:sp>
+      <p:sp>
+        <p:nvSpPr>
+          <p:cNvPr id="6" name="Text 4"/>
+          <p:cNvSpPr/>
+          <p:nvPr/>
+        </p:nvSpPr>
+        <p:spPr>
+          <a:xfrm>
+            <a:off x="548640" y="2011680"/>
+            <a:ext cx="8046720" cy="822960"/>
+          </a:xfrm>
+          <a:prstGeom prst="rect">
+            <a:avLst/>
+          </a:prstGeom>
+          <a:noFill/>
+          <a:ln/>
+        </p:spPr>
+        <p:txBody>
+          <a:bodyPr wrap="square" lIns="0" tIns="0" rIns="0" bIns="0" rtlCol="0" anchor="ctr"/>
+          <a:lstStyle/>
+          <a:p>
+            <a:pPr indent="0" marL="0">
+              <a:buNone/>
+            </a:pPr>
+            <a:r>
+              <a:rPr lang="en-US" sz="1500" dirty="0">
+                <a:solidFill>
+                  <a:srgbClr val="C8C8C8"/>
+                </a:solidFill>
+                <a:latin typeface="Arial" pitchFamily="34" charset="0"/>
+                <a:ea typeface="Arial" pitchFamily="34" charset="-122"/>
+                <a:cs typeface="Arial" pitchFamily="34" charset="-120"/>
+              </a:rPr>
+              <a:t>If you would like support turning these ideas into a concrete 90-day plan</a:t>
+            </a:r>
+            <a:endParaRPr lang="en-US" sz="1500" dirty="0"/>
+          </a:p>
+          <a:p>
+            <a:pPr indent="0" marL="0">
+              <a:buNone/>
+            </a:pPr>
+            <a:r>
+              <a:rPr lang="en-US" sz="1500" dirty="0">
+                <a:solidFill>
+                  <a:srgbClr val="C8C8C8"/>
+                </a:solidFill>
+                <a:latin typeface="Arial" pitchFamily="34" charset="0"/>
+                <a:ea typeface="Arial" pitchFamily="34" charset="-122"/>
+                <a:cs typeface="Arial" pitchFamily="34" charset="-120"/>
+              </a:rPr>
+              <a:t>or ongoing Chief of Staff-style implementation help, reach out directly.</a:t>
+            </a:r>
+            <a:endParaRPr lang="en-US" sz="1500" dirty="0"/>
+          </a:p>
+        </p:txBody>
+      </p:sp>
+      <p:sp>
+        <p:nvSpPr>
+          <p:cNvPr id="7" name="Text 5"/>
+          <p:cNvSpPr/>
+          <p:nvPr/>
+        </p:nvSpPr>
+        <p:spPr>
+          <a:xfrm>
+            <a:off x="548640" y="3108960"/>
+            <a:ext cx="8046720" cy="320040"/>
+          </a:xfrm>
+          <a:prstGeom prst="rect">
+            <a:avLst/>
+          </a:prstGeom>
+          <a:noFill/>
+          <a:ln/>
+        </p:spPr>
+        <p:txBody>
+          <a:bodyPr wrap="square" lIns="0" tIns="0" rIns="0" bIns="0" rtlCol="0" anchor="ctr"/>
+          <a:lstStyle/>
+          <a:p>
+            <a:pPr indent="0" marL="0">
+              <a:buNone/>
+            </a:pPr>
+            <a:r>
+              <a:rPr lang="en-US" sz="1600" b="1" dirty="0">
+                <a:solidFill>
+                  <a:srgbClr val="FFFFFF"/>
+                </a:solidFill>
+                <a:latin typeface="Arial" pitchFamily="34" charset="0"/>
+                <a:ea typeface="Arial" pitchFamily="34" charset="-122"/>
+                <a:cs typeface="Arial" pitchFamily="34" charset="-120"/>
+              </a:rPr>
+              <a:t>Joshua Konkle</a:t>
             </a:r>
             <a:endParaRPr lang="en-US" sz="1600" dirty="0"/>
           </a:p>
@@ -2829,183 +3042,32 @@
       </p:sp>
       <p:sp>
         <p:nvSpPr>
-          <p:cNvPr id="3" name="Text 1"/>
-          <p:cNvSpPr/>
-          <p:nvPr/>
-        </p:nvSpPr>
-        <p:spPr>
-          <a:xfrm>
-            <a:off x="548640" y="1188720"/>
-            <a:ext cx="8046720" cy="457200"/>
-          </a:xfrm>
-          <a:prstGeom prst="rect">
-            <a:avLst/>
-          </a:prstGeom>
-          <a:noFill/>
-          <a:ln/>
-        </p:spPr>
-        <p:txBody>
-          <a:bodyPr wrap="square" lIns="0" tIns="0" rIns="0" bIns="0" rtlCol="0" anchor="ctr"/>
-          <a:lstStyle/>
-          <a:p>
-            <a:pPr indent="0" marL="0">
-              <a:buNone/>
-            </a:pPr>
-            <a:r>
-              <a:rPr lang="en-US" sz="1500" b="1" dirty="0">
-                <a:solidFill>
-                  <a:srgbClr val="F5F5F5"/>
-                </a:solidFill>
-                <a:latin typeface="Arial" pitchFamily="34" charset="0"/>
-                <a:ea typeface="Arial" pitchFamily="34" charset="-122"/>
-                <a:cs typeface="Arial" pitchFamily="34" charset="-120"/>
-              </a:rPr>
-              <a:t>Canvas  →  OKRs  →  Operating Model  →  Value Streams  →  Workforce Strategy</a:t>
-            </a:r>
-            <a:endParaRPr lang="en-US" sz="1500" dirty="0"/>
-          </a:p>
-        </p:txBody>
-      </p:sp>
-      <p:sp>
-        <p:nvSpPr>
-          <p:cNvPr id="4" name="Text 2"/>
-          <p:cNvSpPr/>
-          <p:nvPr/>
-        </p:nvSpPr>
-        <p:spPr>
-          <a:xfrm>
-            <a:off x="548640" y="2011680"/>
-            <a:ext cx="8046720" cy="365760"/>
-          </a:xfrm>
-          <a:prstGeom prst="rect">
-            <a:avLst/>
-          </a:prstGeom>
-          <a:noFill/>
-          <a:ln/>
-        </p:spPr>
-        <p:txBody>
-          <a:bodyPr wrap="square" lIns="0" tIns="0" rIns="0" bIns="0" rtlCol="0" anchor="ctr"/>
-          <a:lstStyle/>
-          <a:p>
-            <a:pPr indent="0" marL="0">
-              <a:buNone/>
-            </a:pPr>
-            <a:r>
-              <a:rPr lang="en-US" sz="2200" b="1" dirty="0">
-                <a:solidFill>
-                  <a:srgbClr val="F5F5F5"/>
-                </a:solidFill>
-                <a:latin typeface="Arial" pitchFamily="34" charset="0"/>
-                <a:ea typeface="Arial" pitchFamily="34" charset="-122"/>
-                <a:cs typeface="Arial" pitchFamily="34" charset="-120"/>
-              </a:rPr>
-              <a:t>Next Steps</a:t>
-            </a:r>
-            <a:endParaRPr lang="en-US" sz="2200" dirty="0"/>
-          </a:p>
-        </p:txBody>
-      </p:sp>
-      <p:sp>
-        <p:nvSpPr>
-          <p:cNvPr id="5" name="Text 3"/>
-          <p:cNvSpPr/>
-          <p:nvPr/>
-        </p:nvSpPr>
-        <p:spPr>
-          <a:xfrm>
-            <a:off x="548640" y="2468880"/>
-            <a:ext cx="8046720" cy="731520"/>
-          </a:xfrm>
-          <a:prstGeom prst="rect">
-            <a:avLst/>
-          </a:prstGeom>
-          <a:noFill/>
-          <a:ln/>
-        </p:spPr>
-        <p:txBody>
-          <a:bodyPr wrap="square" lIns="0" tIns="0" rIns="0" bIns="0" rtlCol="0" anchor="ctr"/>
-          <a:lstStyle/>
-          <a:p>
-            <a:pPr indent="0" marL="0">
-              <a:buNone/>
-            </a:pPr>
-            <a:r>
-              <a:rPr lang="en-US" sz="1500" dirty="0">
-                <a:solidFill>
-                  <a:srgbClr val="CCCCCC"/>
-                </a:solidFill>
-                <a:latin typeface="Arial" pitchFamily="34" charset="0"/>
-                <a:ea typeface="Arial" pitchFamily="34" charset="-122"/>
-                <a:cs typeface="Arial" pitchFamily="34" charset="-120"/>
-              </a:rPr>
-              <a:t>If you would like support turning these ideas into a concrete 90-day execution plan</a:t>
-            </a:r>
-            <a:endParaRPr lang="en-US" sz="1500" dirty="0"/>
-          </a:p>
-          <a:p>
-            <a:pPr indent="0" marL="0">
-              <a:buNone/>
-            </a:pPr>
-            <a:r>
-              <a:rPr lang="en-US" sz="1500" dirty="0">
-                <a:solidFill>
-                  <a:srgbClr val="CCCCCC"/>
-                </a:solidFill>
-                <a:latin typeface="Arial" pitchFamily="34" charset="0"/>
-                <a:ea typeface="Arial" pitchFamily="34" charset="-122"/>
-                <a:cs typeface="Arial" pitchFamily="34" charset="-120"/>
-              </a:rPr>
-              <a:t>or ongoing Chief of Staff-style implementation help, reach out directly.</a:t>
-            </a:r>
-            <a:endParaRPr lang="en-US" sz="1500" dirty="0"/>
-          </a:p>
-        </p:txBody>
-      </p:sp>
-      <p:sp>
-        <p:nvSpPr>
-          <p:cNvPr id="6" name="Text 4"/>
+          <p:cNvPr id="8" name="Text 6"/>
           <p:cNvSpPr/>
           <p:nvPr/>
         </p:nvSpPr>
         <p:spPr>
           <a:xfrm>
             <a:off x="548640" y="3474720"/>
-            <a:ext cx="8046720" cy="731520"/>
-          </a:xfrm>
-          <a:prstGeom prst="rect">
-            <a:avLst/>
-          </a:prstGeom>
-          <a:noFill/>
-          <a:ln/>
-        </p:spPr>
-        <p:txBody>
-          <a:bodyPr wrap="square" lIns="0" tIns="0" rIns="0" bIns="0" rtlCol="0" anchor="ctr"/>
-          <a:lstStyle/>
-          <a:p>
-            <a:pPr indent="0" marL="0">
-              <a:buNone/>
-            </a:pPr>
-            <a:r>
-              <a:rPr lang="en-US" sz="1500" dirty="0">
-                <a:solidFill>
-                  <a:srgbClr val="F5F5F5"/>
-                </a:solidFill>
-                <a:latin typeface="Arial" pitchFamily="34" charset="0"/>
-                <a:ea typeface="Arial" pitchFamily="34" charset="-122"/>
-                <a:cs typeface="Arial" pitchFamily="34" charset="-120"/>
-              </a:rPr>
-              <a:t>Joshua Konkle</a:t>
-            </a:r>
-            <a:endParaRPr lang="en-US" sz="1500" dirty="0"/>
-          </a:p>
-          <a:p>
-            <a:pPr indent="0" marL="0">
-              <a:buNone/>
-            </a:pPr>
-            <a:r>
-              <a:rPr lang="en-US" sz="1500" dirty="0">
-                <a:solidFill>
-                  <a:srgbClr val="F5F5F5"/>
+            <a:ext cx="8046720" cy="274320"/>
+          </a:xfrm>
+          <a:prstGeom prst="rect">
+            <a:avLst/>
+          </a:prstGeom>
+          <a:noFill/>
+          <a:ln/>
+        </p:spPr>
+        <p:txBody>
+          <a:bodyPr wrap="square" lIns="0" tIns="0" rIns="0" bIns="0" rtlCol="0" anchor="ctr"/>
+          <a:lstStyle/>
+          <a:p>
+            <a:pPr indent="0" marL="0">
+              <a:buNone/>
+            </a:pPr>
+            <a:r>
+              <a:rPr lang="en-US" sz="1300" dirty="0">
+                <a:solidFill>
+                  <a:srgbClr val="C9A227"/>
                 </a:solidFill>
                 <a:latin typeface="Arial" pitchFamily="34" charset="0"/>
                 <a:ea typeface="Arial" pitchFamily="34" charset="-122"/>
@@ -3013,7 +3075,46 @@
               </a:rPr>
               <a:t>@7SwanSwimming  ·  512-423-5448  ·  joshua@digitalknowledge.net</a:t>
             </a:r>
-            <a:endParaRPr lang="en-US" sz="1500" dirty="0"/>
+            <a:endParaRPr lang="en-US" sz="1300" dirty="0"/>
+          </a:p>
+        </p:txBody>
+      </p:sp>
+      <p:sp>
+        <p:nvSpPr>
+          <p:cNvPr id="9" name="Text 7"/>
+          <p:cNvSpPr/>
+          <p:nvPr/>
+        </p:nvSpPr>
+        <p:spPr>
+          <a:xfrm>
+            <a:off x="548640" y="4663440"/>
+            <a:ext cx="8046720" cy="228600"/>
+          </a:xfrm>
+          <a:prstGeom prst="rect">
+            <a:avLst/>
+          </a:prstGeom>
+          <a:noFill/>
+          <a:ln/>
+        </p:spPr>
+        <p:txBody>
+          <a:bodyPr wrap="square" lIns="0" tIns="0" rIns="0" bIns="0" rtlCol="0" anchor="ctr"/>
+          <a:lstStyle/>
+          <a:p>
+            <a:pPr indent="0" marL="0">
+              <a:buNone/>
+            </a:pPr>
+            <a:r>
+              <a:rPr lang="en-US" sz="1100" dirty="0">
+                <a:solidFill>
+                  <a:srgbClr val="707070"/>
+                </a:solidFill>
+                <a:latin typeface="Arial" pitchFamily="34" charset="0"/>
+                <a:ea typeface="Arial" pitchFamily="34" charset="-122"/>
+                <a:cs typeface="Arial" pitchFamily="34" charset="-120"/>
+              </a:rPr>
+              <a:t>Copyright © 2026 Digital Knowledge / Patriots Locked In and In Control.</a:t>
+            </a:r>
+            <a:endParaRPr lang="en-US" sz="1100" dirty="0"/>
           </a:p>
         </p:txBody>
       </p:sp>
@@ -3028,13 +3129,6 @@
 <file path=ppt/slides/slide2.xml><?xml version="1.0" encoding="utf-8"?>
 <p:sld xmlns:a="http://schemas.openxmlformats.org/drawingml/2006/main" xmlns:r="http://schemas.openxmlformats.org/officeDocument/2006/relationships" xmlns:p="http://schemas.openxmlformats.org/presentationml/2006/main">
   <p:cSld name="Slide 2">
-    <p:bg>
-      <p:bgPr>
-        <a:solidFill>
-          <a:srgbClr val="FFFFFF"/>
-        </a:solidFill>
-      </p:bgPr>
-    </p:bg>
     <p:spTree>
       <p:nvGrpSpPr>
         <p:cNvPr id="1" name=""/>
@@ -3051,32 +3145,57 @@
       </p:grpSpPr>
       <p:sp>
         <p:nvSpPr>
-          <p:cNvPr id="2" name="Text 0"/>
-          <p:cNvSpPr/>
-          <p:nvPr/>
-        </p:nvSpPr>
-        <p:spPr>
-          <a:xfrm>
-            <a:off x="457200" y="320040"/>
-            <a:ext cx="8229600" cy="457200"/>
-          </a:xfrm>
-          <a:prstGeom prst="rect">
-            <a:avLst/>
-          </a:prstGeom>
-          <a:noFill/>
-          <a:ln/>
-        </p:spPr>
-        <p:txBody>
-          <a:bodyPr wrap="square" lIns="0" tIns="0" rIns="0" bIns="0" rtlCol="0" anchor="ctr"/>
-          <a:lstStyle/>
-          <a:p>
-            <a:pPr indent="0" marL="0">
-              <a:buNone/>
-            </a:pPr>
-            <a:r>
-              <a:rPr lang="en-US" sz="2800" b="1" dirty="0">
-                <a:solidFill>
-                  <a:srgbClr val="1A1A1A"/>
+          <p:cNvPr id="2" name="Shape 0"/>
+          <p:cNvSpPr/>
+          <p:nvPr/>
+        </p:nvSpPr>
+        <p:spPr>
+          <a:xfrm>
+            <a:off x="0" y="0"/>
+            <a:ext cx="9144000" cy="5143500"/>
+          </a:xfrm>
+          <a:prstGeom prst="rect">
+            <a:avLst/>
+          </a:prstGeom>
+          <a:solidFill>
+            <a:srgbClr val="FFFFFF"/>
+          </a:solidFill>
+          <a:ln w="12700">
+            <a:solidFill>
+              <a:srgbClr val="FFFFFF"/>
+            </a:solidFill>
+            <a:prstDash val="solid"/>
+          </a:ln>
+        </p:spPr>
+      </p:sp>
+      <p:sp>
+        <p:nvSpPr>
+          <p:cNvPr id="3" name="Text 1"/>
+          <p:cNvSpPr/>
+          <p:nvPr/>
+        </p:nvSpPr>
+        <p:spPr>
+          <a:xfrm>
+            <a:off x="457200" y="274320"/>
+            <a:ext cx="8229600" cy="365760"/>
+          </a:xfrm>
+          <a:prstGeom prst="rect">
+            <a:avLst/>
+          </a:prstGeom>
+          <a:noFill/>
+          <a:ln/>
+        </p:spPr>
+        <p:txBody>
+          <a:bodyPr wrap="square" lIns="0" tIns="0" rIns="0" bIns="0" rtlCol="0" anchor="ctr"/>
+          <a:lstStyle/>
+          <a:p>
+            <a:pPr indent="0" marL="0">
+              <a:buNone/>
+            </a:pPr>
+            <a:r>
+              <a:rPr lang="en-US" sz="2400" b="1" dirty="0">
+                <a:solidFill>
+                  <a:srgbClr val="1B2A4A"/>
                 </a:solidFill>
                 <a:latin typeface="Arial" pitchFamily="34" charset="0"/>
                 <a:ea typeface="Arial" pitchFamily="34" charset="-122"/>
@@ -3084,58 +3203,90 @@
               </a:rPr>
               <a:t>What You Will Leave With</a:t>
             </a:r>
-            <a:endParaRPr lang="en-US" sz="2800" dirty="0"/>
-          </a:p>
-        </p:txBody>
-      </p:sp>
-      <p:sp>
-        <p:nvSpPr>
-          <p:cNvPr id="3" name="Shape 1"/>
-          <p:cNvSpPr/>
-          <p:nvPr/>
-        </p:nvSpPr>
-        <p:spPr>
-          <a:xfrm>
-            <a:off x="457200" y="1051560"/>
-            <a:ext cx="73152" cy="548640"/>
-          </a:xfrm>
-          <a:prstGeom prst="rect">
-            <a:avLst/>
+            <a:endParaRPr lang="en-US" sz="2400" dirty="0"/>
+          </a:p>
+        </p:txBody>
+      </p:sp>
+      <p:sp>
+        <p:nvSpPr>
+          <p:cNvPr id="4" name="Shape 2"/>
+          <p:cNvSpPr/>
+          <p:nvPr/>
+        </p:nvSpPr>
+        <p:spPr>
+          <a:xfrm>
+            <a:off x="457200" y="868680"/>
+            <a:ext cx="8229600" cy="685800"/>
+          </a:xfrm>
+          <a:prstGeom prst="roundRect">
+            <a:avLst>
+              <a:gd name="adj" fmla="val 8000"/>
+            </a:avLst>
           </a:prstGeom>
           <a:solidFill>
-            <a:srgbClr val="1A1A1A"/>
+            <a:srgbClr val="F7F5F0"/>
           </a:solidFill>
-          <a:ln/>
-        </p:spPr>
-      </p:sp>
-      <p:sp>
-        <p:nvSpPr>
-          <p:cNvPr id="4" name="Text 2"/>
-          <p:cNvSpPr/>
-          <p:nvPr/>
-        </p:nvSpPr>
-        <p:spPr>
-          <a:xfrm>
-            <a:off x="777240" y="1051560"/>
-            <a:ext cx="7772400" cy="548640"/>
-          </a:xfrm>
-          <a:prstGeom prst="rect">
-            <a:avLst/>
-          </a:prstGeom>
-          <a:noFill/>
-          <a:ln/>
-        </p:spPr>
-        <p:txBody>
-          <a:bodyPr wrap="square" lIns="0" tIns="0" rIns="0" bIns="0" rtlCol="0" anchor="ctr"/>
-          <a:lstStyle/>
-          <a:p>
-            <a:pPr indent="0" marL="0">
-              <a:buNone/>
-            </a:pPr>
-            <a:r>
-              <a:rPr lang="en-US" sz="1600" dirty="0">
-                <a:solidFill>
-                  <a:srgbClr val="1A1A1A"/>
+          <a:ln w="12700">
+            <a:solidFill>
+              <a:srgbClr val="F7F5F0"/>
+            </a:solidFill>
+            <a:prstDash val="solid"/>
+          </a:ln>
+        </p:spPr>
+      </p:sp>
+      <p:sp>
+        <p:nvSpPr>
+          <p:cNvPr id="5" name="Shape 3"/>
+          <p:cNvSpPr/>
+          <p:nvPr/>
+        </p:nvSpPr>
+        <p:spPr>
+          <a:xfrm>
+            <a:off x="457200" y="868680"/>
+            <a:ext cx="73152" cy="685800"/>
+          </a:xfrm>
+          <a:prstGeom prst="rect">
+            <a:avLst/>
+          </a:prstGeom>
+          <a:solidFill>
+            <a:srgbClr val="C9A227"/>
+          </a:solidFill>
+          <a:ln w="12700">
+            <a:solidFill>
+              <a:srgbClr val="C9A227"/>
+            </a:solidFill>
+            <a:prstDash val="solid"/>
+          </a:ln>
+        </p:spPr>
+      </p:sp>
+      <p:sp>
+        <p:nvSpPr>
+          <p:cNvPr id="6" name="Text 4"/>
+          <p:cNvSpPr/>
+          <p:nvPr/>
+        </p:nvSpPr>
+        <p:spPr>
+          <a:xfrm>
+            <a:off x="731520" y="1033272"/>
+            <a:ext cx="7772400" cy="411480"/>
+          </a:xfrm>
+          <a:prstGeom prst="rect">
+            <a:avLst/>
+          </a:prstGeom>
+          <a:noFill/>
+          <a:ln/>
+        </p:spPr>
+        <p:txBody>
+          <a:bodyPr wrap="square" lIns="0" tIns="0" rIns="0" bIns="0" rtlCol="0" anchor="ctr"/>
+          <a:lstStyle/>
+          <a:p>
+            <a:pPr indent="0" marL="0">
+              <a:buNone/>
+            </a:pPr>
+            <a:r>
+              <a:rPr lang="en-US" sz="1400" dirty="0">
+                <a:solidFill>
+                  <a:srgbClr val="2A2A2A"/>
                 </a:solidFill>
                 <a:latin typeface="Arial" pitchFamily="34" charset="0"/>
                 <a:ea typeface="Arial" pitchFamily="34" charset="-122"/>
@@ -3143,58 +3294,90 @@
               </a:rPr>
               <a:t>Clarity on the original intent of Value Stream Mapping and Lean</a:t>
             </a:r>
-            <a:endParaRPr lang="en-US" sz="1600" dirty="0"/>
-          </a:p>
-        </p:txBody>
-      </p:sp>
-      <p:sp>
-        <p:nvSpPr>
-          <p:cNvPr id="5" name="Shape 3"/>
-          <p:cNvSpPr/>
-          <p:nvPr/>
-        </p:nvSpPr>
-        <p:spPr>
-          <a:xfrm>
-            <a:off x="457200" y="1828800"/>
-            <a:ext cx="73152" cy="548640"/>
-          </a:xfrm>
-          <a:prstGeom prst="rect">
-            <a:avLst/>
+            <a:endParaRPr lang="en-US" sz="1400" dirty="0"/>
+          </a:p>
+        </p:txBody>
+      </p:sp>
+      <p:sp>
+        <p:nvSpPr>
+          <p:cNvPr id="7" name="Shape 5"/>
+          <p:cNvSpPr/>
+          <p:nvPr/>
+        </p:nvSpPr>
+        <p:spPr>
+          <a:xfrm>
+            <a:off x="457200" y="1691640"/>
+            <a:ext cx="8229600" cy="685800"/>
+          </a:xfrm>
+          <a:prstGeom prst="roundRect">
+            <a:avLst>
+              <a:gd name="adj" fmla="val 8000"/>
+            </a:avLst>
           </a:prstGeom>
           <a:solidFill>
-            <a:srgbClr val="1A1A1A"/>
+            <a:srgbClr val="F7F5F0"/>
           </a:solidFill>
-          <a:ln/>
-        </p:spPr>
-      </p:sp>
-      <p:sp>
-        <p:nvSpPr>
-          <p:cNvPr id="6" name="Text 4"/>
-          <p:cNvSpPr/>
-          <p:nvPr/>
-        </p:nvSpPr>
-        <p:spPr>
-          <a:xfrm>
-            <a:off x="777240" y="1828800"/>
-            <a:ext cx="7772400" cy="548640"/>
-          </a:xfrm>
-          <a:prstGeom prst="rect">
-            <a:avLst/>
-          </a:prstGeom>
-          <a:noFill/>
-          <a:ln/>
-        </p:spPr>
-        <p:txBody>
-          <a:bodyPr wrap="square" lIns="0" tIns="0" rIns="0" bIns="0" rtlCol="0" anchor="ctr"/>
-          <a:lstStyle/>
-          <a:p>
-            <a:pPr indent="0" marL="0">
-              <a:buNone/>
-            </a:pPr>
-            <a:r>
-              <a:rPr lang="en-US" sz="1600" dirty="0">
-                <a:solidFill>
-                  <a:srgbClr val="1A1A1A"/>
+          <a:ln w="12700">
+            <a:solidFill>
+              <a:srgbClr val="F7F5F0"/>
+            </a:solidFill>
+            <a:prstDash val="solid"/>
+          </a:ln>
+        </p:spPr>
+      </p:sp>
+      <p:sp>
+        <p:nvSpPr>
+          <p:cNvPr id="8" name="Shape 6"/>
+          <p:cNvSpPr/>
+          <p:nvPr/>
+        </p:nvSpPr>
+        <p:spPr>
+          <a:xfrm>
+            <a:off x="457200" y="1691640"/>
+            <a:ext cx="73152" cy="685800"/>
+          </a:xfrm>
+          <a:prstGeom prst="rect">
+            <a:avLst/>
+          </a:prstGeom>
+          <a:solidFill>
+            <a:srgbClr val="C9A227"/>
+          </a:solidFill>
+          <a:ln w="12700">
+            <a:solidFill>
+              <a:srgbClr val="C9A227"/>
+            </a:solidFill>
+            <a:prstDash val="solid"/>
+          </a:ln>
+        </p:spPr>
+      </p:sp>
+      <p:sp>
+        <p:nvSpPr>
+          <p:cNvPr id="9" name="Text 7"/>
+          <p:cNvSpPr/>
+          <p:nvPr/>
+        </p:nvSpPr>
+        <p:spPr>
+          <a:xfrm>
+            <a:off x="731520" y="1856232"/>
+            <a:ext cx="7772400" cy="411480"/>
+          </a:xfrm>
+          <a:prstGeom prst="rect">
+            <a:avLst/>
+          </a:prstGeom>
+          <a:noFill/>
+          <a:ln/>
+        </p:spPr>
+        <p:txBody>
+          <a:bodyPr wrap="square" lIns="0" tIns="0" rIns="0" bIns="0" rtlCol="0" anchor="ctr"/>
+          <a:lstStyle/>
+          <a:p>
+            <a:pPr indent="0" marL="0">
+              <a:buNone/>
+            </a:pPr>
+            <a:r>
+              <a:rPr lang="en-US" sz="1400" dirty="0">
+                <a:solidFill>
+                  <a:srgbClr val="2A2A2A"/>
                 </a:solidFill>
                 <a:latin typeface="Arial" pitchFamily="34" charset="0"/>
                 <a:ea typeface="Arial" pitchFamily="34" charset="-122"/>
@@ -3202,58 +3385,90 @@
               </a:rPr>
               <a:t>A diagnosis of where modern practice has drifted into pure cost-out logic</a:t>
             </a:r>
-            <a:endParaRPr lang="en-US" sz="1600" dirty="0"/>
-          </a:p>
-        </p:txBody>
-      </p:sp>
-      <p:sp>
-        <p:nvSpPr>
-          <p:cNvPr id="7" name="Shape 5"/>
-          <p:cNvSpPr/>
-          <p:nvPr/>
-        </p:nvSpPr>
-        <p:spPr>
-          <a:xfrm>
-            <a:off x="457200" y="2606040"/>
-            <a:ext cx="73152" cy="548640"/>
-          </a:xfrm>
-          <a:prstGeom prst="rect">
-            <a:avLst/>
+            <a:endParaRPr lang="en-US" sz="1400" dirty="0"/>
+          </a:p>
+        </p:txBody>
+      </p:sp>
+      <p:sp>
+        <p:nvSpPr>
+          <p:cNvPr id="10" name="Shape 8"/>
+          <p:cNvSpPr/>
+          <p:nvPr/>
+        </p:nvSpPr>
+        <p:spPr>
+          <a:xfrm>
+            <a:off x="457200" y="2514600"/>
+            <a:ext cx="8229600" cy="685800"/>
+          </a:xfrm>
+          <a:prstGeom prst="roundRect">
+            <a:avLst>
+              <a:gd name="adj" fmla="val 8000"/>
+            </a:avLst>
           </a:prstGeom>
           <a:solidFill>
-            <a:srgbClr val="1A1A1A"/>
+            <a:srgbClr val="F7F5F0"/>
           </a:solidFill>
-          <a:ln/>
-        </p:spPr>
-      </p:sp>
-      <p:sp>
-        <p:nvSpPr>
-          <p:cNvPr id="8" name="Text 6"/>
-          <p:cNvSpPr/>
-          <p:nvPr/>
-        </p:nvSpPr>
-        <p:spPr>
-          <a:xfrm>
-            <a:off x="777240" y="2606040"/>
-            <a:ext cx="7772400" cy="548640"/>
-          </a:xfrm>
-          <a:prstGeom prst="rect">
-            <a:avLst/>
-          </a:prstGeom>
-          <a:noFill/>
-          <a:ln/>
-        </p:spPr>
-        <p:txBody>
-          <a:bodyPr wrap="square" lIns="0" tIns="0" rIns="0" bIns="0" rtlCol="0" anchor="ctr"/>
-          <a:lstStyle/>
-          <a:p>
-            <a:pPr indent="0" marL="0">
-              <a:buNone/>
-            </a:pPr>
-            <a:r>
-              <a:rPr lang="en-US" sz="1600" dirty="0">
-                <a:solidFill>
-                  <a:srgbClr val="1A1A1A"/>
+          <a:ln w="12700">
+            <a:solidFill>
+              <a:srgbClr val="F7F5F0"/>
+            </a:solidFill>
+            <a:prstDash val="solid"/>
+          </a:ln>
+        </p:spPr>
+      </p:sp>
+      <p:sp>
+        <p:nvSpPr>
+          <p:cNvPr id="11" name="Shape 9"/>
+          <p:cNvSpPr/>
+          <p:nvPr/>
+        </p:nvSpPr>
+        <p:spPr>
+          <a:xfrm>
+            <a:off x="457200" y="2514600"/>
+            <a:ext cx="73152" cy="685800"/>
+          </a:xfrm>
+          <a:prstGeom prst="rect">
+            <a:avLst/>
+          </a:prstGeom>
+          <a:solidFill>
+            <a:srgbClr val="C9A227"/>
+          </a:solidFill>
+          <a:ln w="12700">
+            <a:solidFill>
+              <a:srgbClr val="C9A227"/>
+            </a:solidFill>
+            <a:prstDash val="solid"/>
+          </a:ln>
+        </p:spPr>
+      </p:sp>
+      <p:sp>
+        <p:nvSpPr>
+          <p:cNvPr id="12" name="Text 10"/>
+          <p:cNvSpPr/>
+          <p:nvPr/>
+        </p:nvSpPr>
+        <p:spPr>
+          <a:xfrm>
+            <a:off x="731520" y="2679192"/>
+            <a:ext cx="7772400" cy="411480"/>
+          </a:xfrm>
+          <a:prstGeom prst="rect">
+            <a:avLst/>
+          </a:prstGeom>
+          <a:noFill/>
+          <a:ln/>
+        </p:spPr>
+        <p:txBody>
+          <a:bodyPr wrap="square" lIns="0" tIns="0" rIns="0" bIns="0" rtlCol="0" anchor="ctr"/>
+          <a:lstStyle/>
+          <a:p>
+            <a:pPr indent="0" marL="0">
+              <a:buNone/>
+            </a:pPr>
+            <a:r>
+              <a:rPr lang="en-US" sz="1400" dirty="0">
+                <a:solidFill>
+                  <a:srgbClr val="2A2A2A"/>
                 </a:solidFill>
                 <a:latin typeface="Arial" pitchFamily="34" charset="0"/>
                 <a:ea typeface="Arial" pitchFamily="34" charset="-122"/>
@@ -3261,58 +3476,90 @@
               </a:rPr>
               <a:t>Principles for redefining value and waste around productive sovereignty</a:t>
             </a:r>
-            <a:endParaRPr lang="en-US" sz="1600" dirty="0"/>
-          </a:p>
-        </p:txBody>
-      </p:sp>
-      <p:sp>
-        <p:nvSpPr>
-          <p:cNvPr id="9" name="Shape 7"/>
-          <p:cNvSpPr/>
-          <p:nvPr/>
-        </p:nvSpPr>
-        <p:spPr>
-          <a:xfrm>
-            <a:off x="457200" y="3383280"/>
-            <a:ext cx="73152" cy="548640"/>
-          </a:xfrm>
-          <a:prstGeom prst="rect">
-            <a:avLst/>
+            <a:endParaRPr lang="en-US" sz="1400" dirty="0"/>
+          </a:p>
+        </p:txBody>
+      </p:sp>
+      <p:sp>
+        <p:nvSpPr>
+          <p:cNvPr id="13" name="Shape 11"/>
+          <p:cNvSpPr/>
+          <p:nvPr/>
+        </p:nvSpPr>
+        <p:spPr>
+          <a:xfrm>
+            <a:off x="457200" y="3337560"/>
+            <a:ext cx="8229600" cy="685800"/>
+          </a:xfrm>
+          <a:prstGeom prst="roundRect">
+            <a:avLst>
+              <a:gd name="adj" fmla="val 8000"/>
+            </a:avLst>
           </a:prstGeom>
           <a:solidFill>
-            <a:srgbClr val="1A1A1A"/>
+            <a:srgbClr val="F7F5F0"/>
           </a:solidFill>
-          <a:ln/>
-        </p:spPr>
-      </p:sp>
-      <p:sp>
-        <p:nvSpPr>
-          <p:cNvPr id="10" name="Text 8"/>
-          <p:cNvSpPr/>
-          <p:nvPr/>
-        </p:nvSpPr>
-        <p:spPr>
-          <a:xfrm>
-            <a:off x="777240" y="3383280"/>
-            <a:ext cx="7772400" cy="548640"/>
-          </a:xfrm>
-          <a:prstGeom prst="rect">
-            <a:avLst/>
-          </a:prstGeom>
-          <a:noFill/>
-          <a:ln/>
-        </p:spPr>
-        <p:txBody>
-          <a:bodyPr wrap="square" lIns="0" tIns="0" rIns="0" bIns="0" rtlCol="0" anchor="ctr"/>
-          <a:lstStyle/>
-          <a:p>
-            <a:pPr indent="0" marL="0">
-              <a:buNone/>
-            </a:pPr>
-            <a:r>
-              <a:rPr lang="en-US" sz="1600" dirty="0">
-                <a:solidFill>
-                  <a:srgbClr val="1A1A1A"/>
+          <a:ln w="12700">
+            <a:solidFill>
+              <a:srgbClr val="F7F5F0"/>
+            </a:solidFill>
+            <a:prstDash val="solid"/>
+          </a:ln>
+        </p:spPr>
+      </p:sp>
+      <p:sp>
+        <p:nvSpPr>
+          <p:cNvPr id="14" name="Shape 12"/>
+          <p:cNvSpPr/>
+          <p:nvPr/>
+        </p:nvSpPr>
+        <p:spPr>
+          <a:xfrm>
+            <a:off x="457200" y="3337560"/>
+            <a:ext cx="73152" cy="685800"/>
+          </a:xfrm>
+          <a:prstGeom prst="rect">
+            <a:avLst/>
+          </a:prstGeom>
+          <a:solidFill>
+            <a:srgbClr val="C9A227"/>
+          </a:solidFill>
+          <a:ln w="12700">
+            <a:solidFill>
+              <a:srgbClr val="C9A227"/>
+            </a:solidFill>
+            <a:prstDash val="solid"/>
+          </a:ln>
+        </p:spPr>
+      </p:sp>
+      <p:sp>
+        <p:nvSpPr>
+          <p:cNvPr id="15" name="Text 13"/>
+          <p:cNvSpPr/>
+          <p:nvPr/>
+        </p:nvSpPr>
+        <p:spPr>
+          <a:xfrm>
+            <a:off x="731520" y="3502152"/>
+            <a:ext cx="7772400" cy="411480"/>
+          </a:xfrm>
+          <a:prstGeom prst="rect">
+            <a:avLst/>
+          </a:prstGeom>
+          <a:noFill/>
+          <a:ln/>
+        </p:spPr>
+        <p:txBody>
+          <a:bodyPr wrap="square" lIns="0" tIns="0" rIns="0" bIns="0" rtlCol="0" anchor="ctr"/>
+          <a:lstStyle/>
+          <a:p>
+            <a:pPr indent="0" marL="0">
+              <a:buNone/>
+            </a:pPr>
+            <a:r>
+              <a:rPr lang="en-US" sz="1400" dirty="0">
+                <a:solidFill>
+                  <a:srgbClr val="2A2A2A"/>
                 </a:solidFill>
                 <a:latin typeface="Arial" pitchFamily="34" charset="0"/>
                 <a:ea typeface="Arial" pitchFamily="34" charset="-122"/>
@@ -3320,38 +3567,38 @@
               </a:rPr>
               <a:t>A practical exercise you can apply to one real value stream</a:t>
             </a:r>
-            <a:endParaRPr lang="en-US" sz="1600" dirty="0"/>
-          </a:p>
-        </p:txBody>
-      </p:sp>
-      <p:sp>
-        <p:nvSpPr>
-          <p:cNvPr id="11" name="Text 9"/>
+            <a:endParaRPr lang="en-US" sz="1400" dirty="0"/>
+          </a:p>
+        </p:txBody>
+      </p:sp>
+      <p:sp>
+        <p:nvSpPr>
+          <p:cNvPr id="16" name="Text 14"/>
           <p:cNvSpPr/>
           <p:nvPr/>
         </p:nvSpPr>
         <p:spPr>
           <a:xfrm>
             <a:off x="457200" y="4800600"/>
-            <a:ext cx="5943600" cy="228600"/>
-          </a:xfrm>
-          <a:prstGeom prst="rect">
-            <a:avLst/>
-          </a:prstGeom>
-          <a:noFill/>
-          <a:ln/>
-        </p:spPr>
-        <p:txBody>
-          <a:bodyPr wrap="square" lIns="0" tIns="0" rIns="0" bIns="0" rtlCol="0" anchor="ctr"/>
-          <a:lstStyle/>
-          <a:p>
-            <a:pPr indent="0" marL="0">
-              <a:buNone/>
-            </a:pPr>
-            <a:r>
-              <a:rPr lang="en-US" sz="1000" dirty="0">
-                <a:solidFill>
-                  <a:srgbClr val="555555"/>
+            <a:ext cx="5943600" cy="256032"/>
+          </a:xfrm>
+          <a:prstGeom prst="rect">
+            <a:avLst/>
+          </a:prstGeom>
+          <a:noFill/>
+          <a:ln/>
+        </p:spPr>
+        <p:txBody>
+          <a:bodyPr wrap="square" lIns="0" tIns="0" rIns="0" bIns="0" rtlCol="0" anchor="ctr"/>
+          <a:lstStyle/>
+          <a:p>
+            <a:pPr indent="0" marL="0">
+              <a:buNone/>
+            </a:pPr>
+            <a:r>
+              <a:rPr lang="en-US" sz="1100" dirty="0">
+                <a:solidFill>
+                  <a:srgbClr val="6A6A6A"/>
                 </a:solidFill>
                 <a:latin typeface="Arial" pitchFamily="34" charset="0"/>
                 <a:ea typeface="Arial" pitchFamily="34" charset="-122"/>
@@ -3359,20 +3606,20 @@
               </a:rPr>
               <a:t>Joshua Konkle  |  Chief of Staff Strategist</a:t>
             </a:r>
-            <a:endParaRPr lang="en-US" sz="1000" dirty="0"/>
-          </a:p>
-        </p:txBody>
-      </p:sp>
-      <p:sp>
-        <p:nvSpPr>
-          <p:cNvPr id="12" name="Text 10"/>
-          <p:cNvSpPr/>
-          <p:nvPr/>
-        </p:nvSpPr>
-        <p:spPr>
-          <a:xfrm>
-            <a:off x="7772400" y="4800600"/>
-            <a:ext cx="914400" cy="228600"/>
+            <a:endParaRPr lang="en-US" sz="1100" dirty="0"/>
+          </a:p>
+        </p:txBody>
+      </p:sp>
+      <p:sp>
+        <p:nvSpPr>
+          <p:cNvPr id="17" name="Text 15"/>
+          <p:cNvSpPr/>
+          <p:nvPr/>
+        </p:nvSpPr>
+        <p:spPr>
+          <a:xfrm>
+            <a:off x="7498080" y="4800600"/>
+            <a:ext cx="1188720" cy="256032"/>
           </a:xfrm>
           <a:prstGeom prst="rect">
             <a:avLst/>
@@ -3388,9 +3635,9 @@
               <a:buNone/>
             </a:pPr>
             <a:r>
-              <a:rPr lang="en-US" sz="1000" dirty="0">
-                <a:solidFill>
-                  <a:srgbClr val="555555"/>
+              <a:rPr lang="en-US" sz="1100" dirty="0">
+                <a:solidFill>
+                  <a:srgbClr val="6A6A6A"/>
                 </a:solidFill>
                 <a:latin typeface="Arial" pitchFamily="34" charset="0"/>
                 <a:ea typeface="Arial" pitchFamily="34" charset="-122"/>
@@ -3398,7 +3645,7 @@
               </a:rPr>
               <a:t>2 / 12</a:t>
             </a:r>
-            <a:endParaRPr lang="en-US" sz="1000" dirty="0"/>
+            <a:endParaRPr lang="en-US" sz="1100" dirty="0"/>
           </a:p>
         </p:txBody>
       </p:sp>
@@ -3413,13 +3660,6 @@
 <file path=ppt/slides/slide3.xml><?xml version="1.0" encoding="utf-8"?>
 <p:sld xmlns:a="http://schemas.openxmlformats.org/drawingml/2006/main" xmlns:r="http://schemas.openxmlformats.org/officeDocument/2006/relationships" xmlns:p="http://schemas.openxmlformats.org/presentationml/2006/main">
   <p:cSld name="Slide 3">
-    <p:bg>
-      <p:bgPr>
-        <a:solidFill>
-          <a:srgbClr val="FFFFFF"/>
-        </a:solidFill>
-      </p:bgPr>
-    </p:bg>
     <p:spTree>
       <p:nvGrpSpPr>
         <p:cNvPr id="1" name=""/>
@@ -3436,63 +3676,24 @@
       </p:grpSpPr>
       <p:sp>
         <p:nvSpPr>
-          <p:cNvPr id="2" name="Text 0"/>
-          <p:cNvSpPr/>
-          <p:nvPr/>
-        </p:nvSpPr>
-        <p:spPr>
-          <a:xfrm>
-            <a:off x="457200" y="274320"/>
-            <a:ext cx="8229600" cy="411480"/>
-          </a:xfrm>
-          <a:prstGeom prst="rect">
-            <a:avLst/>
-          </a:prstGeom>
-          <a:noFill/>
-          <a:ln/>
-        </p:spPr>
-        <p:txBody>
-          <a:bodyPr wrap="square" lIns="0" tIns="0" rIns="0" bIns="0" rtlCol="0" anchor="ctr"/>
-          <a:lstStyle/>
-          <a:p>
-            <a:pPr indent="0" marL="0">
-              <a:buNone/>
-            </a:pPr>
-            <a:r>
-              <a:rPr lang="en-US" sz="2400" b="1" dirty="0">
-                <a:solidFill>
-                  <a:srgbClr val="1A1A1A"/>
-                </a:solidFill>
-                <a:latin typeface="Arial" pitchFamily="34" charset="0"/>
-                <a:ea typeface="Arial" pitchFamily="34" charset="-122"/>
-                <a:cs typeface="Arial" pitchFamily="34" charset="-120"/>
-              </a:rPr>
-              <a:t>Classic Intent vs. Modern Drift</a:t>
-            </a:r>
-            <a:endParaRPr lang="en-US" sz="2400" dirty="0"/>
-          </a:p>
-        </p:txBody>
-      </p:sp>
-      <p:sp>
-        <p:nvSpPr>
-          <p:cNvPr id="3" name="Shape 1"/>
-          <p:cNvSpPr/>
-          <p:nvPr/>
-        </p:nvSpPr>
-        <p:spPr>
-          <a:xfrm>
-            <a:off x="365760" y="914400"/>
-            <a:ext cx="4023360" cy="3200400"/>
+          <p:cNvPr id="2" name="Shape 0"/>
+          <p:cNvSpPr/>
+          <p:nvPr/>
+        </p:nvSpPr>
+        <p:spPr>
+          <a:xfrm>
+            <a:off x="0" y="0"/>
+            <a:ext cx="9144000" cy="5143500"/>
           </a:xfrm>
           <a:prstGeom prst="rect">
             <a:avLst/>
           </a:prstGeom>
           <a:solidFill>
-            <a:srgbClr val="F7F7F7"/>
+            <a:srgbClr val="FFFFFF"/>
           </a:solidFill>
           <a:ln w="12700">
             <a:solidFill>
-              <a:srgbClr val="CCCCCC"/>
+              <a:srgbClr val="FFFFFF"/>
             </a:solidFill>
             <a:prstDash val="solid"/>
           </a:ln>
@@ -3500,14 +3701,80 @@
       </p:sp>
       <p:sp>
         <p:nvSpPr>
-          <p:cNvPr id="4" name="Text 2"/>
-          <p:cNvSpPr/>
-          <p:nvPr/>
-        </p:nvSpPr>
-        <p:spPr>
-          <a:xfrm>
-            <a:off x="548640" y="1097280"/>
-            <a:ext cx="3657600" cy="320040"/>
+          <p:cNvPr id="3" name="Text 1"/>
+          <p:cNvSpPr/>
+          <p:nvPr/>
+        </p:nvSpPr>
+        <p:spPr>
+          <a:xfrm>
+            <a:off x="457200" y="274320"/>
+            <a:ext cx="8229600" cy="365760"/>
+          </a:xfrm>
+          <a:prstGeom prst="rect">
+            <a:avLst/>
+          </a:prstGeom>
+          <a:noFill/>
+          <a:ln/>
+        </p:spPr>
+        <p:txBody>
+          <a:bodyPr wrap="square" lIns="0" tIns="0" rIns="0" bIns="0" rtlCol="0" anchor="ctr"/>
+          <a:lstStyle/>
+          <a:p>
+            <a:pPr indent="0" marL="0">
+              <a:buNone/>
+            </a:pPr>
+            <a:r>
+              <a:rPr lang="en-US" sz="2200" b="1" dirty="0">
+                <a:solidFill>
+                  <a:srgbClr val="1B2A4A"/>
+                </a:solidFill>
+                <a:latin typeface="Arial" pitchFamily="34" charset="0"/>
+                <a:ea typeface="Arial" pitchFamily="34" charset="-122"/>
+                <a:cs typeface="Arial" pitchFamily="34" charset="-120"/>
+              </a:rPr>
+              <a:t>Classic Intent vs. Modern Drift</a:t>
+            </a:r>
+            <a:endParaRPr lang="en-US" sz="2200" dirty="0"/>
+          </a:p>
+        </p:txBody>
+      </p:sp>
+      <p:sp>
+        <p:nvSpPr>
+          <p:cNvPr id="4" name="Shape 2"/>
+          <p:cNvSpPr/>
+          <p:nvPr/>
+        </p:nvSpPr>
+        <p:spPr>
+          <a:xfrm>
+            <a:off x="457200" y="914400"/>
+            <a:ext cx="3931920" cy="3108960"/>
+          </a:xfrm>
+          <a:prstGeom prst="roundRect">
+            <a:avLst>
+              <a:gd name="adj" fmla="val 2353"/>
+            </a:avLst>
+          </a:prstGeom>
+          <a:solidFill>
+            <a:srgbClr val="1B2A4A"/>
+          </a:solidFill>
+          <a:ln w="12700">
+            <a:solidFill>
+              <a:srgbClr val="1B2A4A"/>
+            </a:solidFill>
+            <a:prstDash val="solid"/>
+          </a:ln>
+        </p:spPr>
+      </p:sp>
+      <p:sp>
+        <p:nvSpPr>
+          <p:cNvPr id="5" name="Text 3"/>
+          <p:cNvSpPr/>
+          <p:nvPr/>
+        </p:nvSpPr>
+        <p:spPr>
+          <a:xfrm>
+            <a:off x="685800" y="1143000"/>
+            <a:ext cx="3566160" cy="320040"/>
           </a:xfrm>
           <a:prstGeom prst="rect">
             <a:avLst/>
@@ -3525,7 +3792,7 @@
             <a:r>
               <a:rPr lang="en-US" sz="1300" b="1" dirty="0">
                 <a:solidFill>
-                  <a:srgbClr val="555555"/>
+                  <a:srgbClr val="C9A227"/>
                 </a:solidFill>
                 <a:latin typeface="Arial" pitchFamily="34" charset="0"/>
                 <a:ea typeface="Arial" pitchFamily="34" charset="-122"/>
@@ -3539,14 +3806,14 @@
       </p:sp>
       <p:sp>
         <p:nvSpPr>
-          <p:cNvPr id="5" name="Text 3"/>
-          <p:cNvSpPr/>
-          <p:nvPr/>
-        </p:nvSpPr>
-        <p:spPr>
-          <a:xfrm>
-            <a:off x="548640" y="1554480"/>
-            <a:ext cx="3657600" cy="2194560"/>
+          <p:cNvPr id="6" name="Text 4"/>
+          <p:cNvSpPr/>
+          <p:nvPr/>
+        </p:nvSpPr>
+        <p:spPr>
+          <a:xfrm>
+            <a:off x="685800" y="1645920"/>
+            <a:ext cx="3566160" cy="2011680"/>
           </a:xfrm>
           <a:prstGeom prst="rect">
             <a:avLst/>
@@ -3564,7 +3831,7 @@
             <a:r>
               <a:rPr lang="en-US" sz="1500" dirty="0">
                 <a:solidFill>
-                  <a:srgbClr val="1A1A1A"/>
+                  <a:srgbClr val="FFFFFF"/>
                 </a:solidFill>
                 <a:latin typeface="Arial" pitchFamily="34" charset="0"/>
                 <a:ea typeface="Arial" pitchFamily="34" charset="-122"/>
@@ -3581,7 +3848,7 @@
             <a:r>
               <a:rPr lang="en-US" sz="1500" dirty="0">
                 <a:solidFill>
-                  <a:srgbClr val="1A1A1A"/>
+                  <a:srgbClr val="FFFFFF"/>
                 </a:solidFill>
                 <a:latin typeface="Arial" pitchFamily="34" charset="0"/>
                 <a:ea typeface="Arial" pitchFamily="34" charset="-122"/>
@@ -3598,7 +3865,7 @@
             <a:r>
               <a:rPr lang="en-US" sz="1500" dirty="0">
                 <a:solidFill>
-                  <a:srgbClr val="1A1A1A"/>
+                  <a:srgbClr val="FFFFFF"/>
                 </a:solidFill>
                 <a:latin typeface="Arial" pitchFamily="34" charset="0"/>
                 <a:ea typeface="Arial" pitchFamily="34" charset="-122"/>
@@ -3612,34 +3879,41 @@
       </p:sp>
       <p:sp>
         <p:nvSpPr>
-          <p:cNvPr id="6" name="Shape 4"/>
+          <p:cNvPr id="7" name="Shape 5"/>
           <p:cNvSpPr/>
           <p:nvPr/>
         </p:nvSpPr>
         <p:spPr>
           <a:xfrm>
             <a:off x="4754880" y="914400"/>
-            <a:ext cx="4023360" cy="3200400"/>
-          </a:xfrm>
-          <a:prstGeom prst="rect">
-            <a:avLst/>
+            <a:ext cx="3931920" cy="3108960"/>
+          </a:xfrm>
+          <a:prstGeom prst="roundRect">
+            <a:avLst>
+              <a:gd name="adj" fmla="val 2353"/>
+            </a:avLst>
           </a:prstGeom>
           <a:solidFill>
-            <a:srgbClr val="111111"/>
+            <a:srgbClr val="3A3A3A"/>
           </a:solidFill>
-          <a:ln/>
-        </p:spPr>
-      </p:sp>
-      <p:sp>
-        <p:nvSpPr>
-          <p:cNvPr id="7" name="Text 5"/>
-          <p:cNvSpPr/>
-          <p:nvPr/>
-        </p:nvSpPr>
-        <p:spPr>
-          <a:xfrm>
-            <a:off x="4937760" y="1097280"/>
-            <a:ext cx="3657600" cy="320040"/>
+          <a:ln w="12700">
+            <a:solidFill>
+              <a:srgbClr val="3A3A3A"/>
+            </a:solidFill>
+            <a:prstDash val="solid"/>
+          </a:ln>
+        </p:spPr>
+      </p:sp>
+      <p:sp>
+        <p:nvSpPr>
+          <p:cNvPr id="8" name="Text 6"/>
+          <p:cNvSpPr/>
+          <p:nvPr/>
+        </p:nvSpPr>
+        <p:spPr>
+          <a:xfrm>
+            <a:off x="4983480" y="1143000"/>
+            <a:ext cx="3566160" cy="320040"/>
           </a:xfrm>
           <a:prstGeom prst="rect">
             <a:avLst/>
@@ -3657,7 +3931,7 @@
             <a:r>
               <a:rPr lang="en-US" sz="1300" b="1" dirty="0">
                 <a:solidFill>
-                  <a:srgbClr val="AAAAAA"/>
+                  <a:srgbClr val="C9A227"/>
                 </a:solidFill>
                 <a:latin typeface="Arial" pitchFamily="34" charset="0"/>
                 <a:ea typeface="Arial" pitchFamily="34" charset="-122"/>
@@ -3671,14 +3945,14 @@
       </p:sp>
       <p:sp>
         <p:nvSpPr>
-          <p:cNvPr id="8" name="Text 6"/>
-          <p:cNvSpPr/>
-          <p:nvPr/>
-        </p:nvSpPr>
-        <p:spPr>
-          <a:xfrm>
-            <a:off x="4937760" y="1554480"/>
-            <a:ext cx="3657600" cy="2194560"/>
+          <p:cNvPr id="9" name="Text 7"/>
+          <p:cNvSpPr/>
+          <p:nvPr/>
+        </p:nvSpPr>
+        <p:spPr>
+          <a:xfrm>
+            <a:off x="4983480" y="1645920"/>
+            <a:ext cx="3566160" cy="2011680"/>
           </a:xfrm>
           <a:prstGeom prst="rect">
             <a:avLst/>
@@ -3696,7 +3970,7 @@
             <a:r>
               <a:rPr lang="en-US" sz="1500" dirty="0">
                 <a:solidFill>
-                  <a:srgbClr val="F5F5F5"/>
+                  <a:srgbClr val="FFFFFF"/>
                 </a:solidFill>
                 <a:latin typeface="Arial" pitchFamily="34" charset="0"/>
                 <a:ea typeface="Arial" pitchFamily="34" charset="-122"/>
@@ -3710,32 +3984,32 @@
       </p:sp>
       <p:sp>
         <p:nvSpPr>
-          <p:cNvPr id="9" name="Text 7"/>
+          <p:cNvPr id="10" name="Text 8"/>
           <p:cNvSpPr/>
           <p:nvPr/>
         </p:nvSpPr>
         <p:spPr>
           <a:xfrm>
             <a:off x="457200" y="4800600"/>
-            <a:ext cx="5943600" cy="228600"/>
-          </a:xfrm>
-          <a:prstGeom prst="rect">
-            <a:avLst/>
-          </a:prstGeom>
-          <a:noFill/>
-          <a:ln/>
-        </p:spPr>
-        <p:txBody>
-          <a:bodyPr wrap="square" lIns="0" tIns="0" rIns="0" bIns="0" rtlCol="0" anchor="ctr"/>
-          <a:lstStyle/>
-          <a:p>
-            <a:pPr indent="0" marL="0">
-              <a:buNone/>
-            </a:pPr>
-            <a:r>
-              <a:rPr lang="en-US" sz="1000" dirty="0">
-                <a:solidFill>
-                  <a:srgbClr val="555555"/>
+            <a:ext cx="5943600" cy="256032"/>
+          </a:xfrm>
+          <a:prstGeom prst="rect">
+            <a:avLst/>
+          </a:prstGeom>
+          <a:noFill/>
+          <a:ln/>
+        </p:spPr>
+        <p:txBody>
+          <a:bodyPr wrap="square" lIns="0" tIns="0" rIns="0" bIns="0" rtlCol="0" anchor="ctr"/>
+          <a:lstStyle/>
+          <a:p>
+            <a:pPr indent="0" marL="0">
+              <a:buNone/>
+            </a:pPr>
+            <a:r>
+              <a:rPr lang="en-US" sz="1100" dirty="0">
+                <a:solidFill>
+                  <a:srgbClr val="6A6A6A"/>
                 </a:solidFill>
                 <a:latin typeface="Arial" pitchFamily="34" charset="0"/>
                 <a:ea typeface="Arial" pitchFamily="34" charset="-122"/>
@@ -3743,20 +4017,20 @@
               </a:rPr>
               <a:t>Joshua Konkle  |  Chief of Staff Strategist</a:t>
             </a:r>
-            <a:endParaRPr lang="en-US" sz="1000" dirty="0"/>
-          </a:p>
-        </p:txBody>
-      </p:sp>
-      <p:sp>
-        <p:nvSpPr>
-          <p:cNvPr id="10" name="Text 8"/>
-          <p:cNvSpPr/>
-          <p:nvPr/>
-        </p:nvSpPr>
-        <p:spPr>
-          <a:xfrm>
-            <a:off x="7772400" y="4800600"/>
-            <a:ext cx="914400" cy="228600"/>
+            <a:endParaRPr lang="en-US" sz="1100" dirty="0"/>
+          </a:p>
+        </p:txBody>
+      </p:sp>
+      <p:sp>
+        <p:nvSpPr>
+          <p:cNvPr id="11" name="Text 9"/>
+          <p:cNvSpPr/>
+          <p:nvPr/>
+        </p:nvSpPr>
+        <p:spPr>
+          <a:xfrm>
+            <a:off x="7498080" y="4800600"/>
+            <a:ext cx="1188720" cy="256032"/>
           </a:xfrm>
           <a:prstGeom prst="rect">
             <a:avLst/>
@@ -3772,9 +4046,9 @@
               <a:buNone/>
             </a:pPr>
             <a:r>
-              <a:rPr lang="en-US" sz="1000" dirty="0">
-                <a:solidFill>
-                  <a:srgbClr val="555555"/>
+              <a:rPr lang="en-US" sz="1100" dirty="0">
+                <a:solidFill>
+                  <a:srgbClr val="6A6A6A"/>
                 </a:solidFill>
                 <a:latin typeface="Arial" pitchFamily="34" charset="0"/>
                 <a:ea typeface="Arial" pitchFamily="34" charset="-122"/>
@@ -3782,7 +4056,7 @@
               </a:rPr>
               <a:t>3 / 12</a:t>
             </a:r>
-            <a:endParaRPr lang="en-US" sz="1000" dirty="0"/>
+            <a:endParaRPr lang="en-US" sz="1100" dirty="0"/>
           </a:p>
         </p:txBody>
       </p:sp>
@@ -3797,13 +4071,6 @@
 <file path=ppt/slides/slide4.xml><?xml version="1.0" encoding="utf-8"?>
 <p:sld xmlns:a="http://schemas.openxmlformats.org/drawingml/2006/main" xmlns:r="http://schemas.openxmlformats.org/officeDocument/2006/relationships" xmlns:p="http://schemas.openxmlformats.org/presentationml/2006/main">
   <p:cSld name="Slide 4">
-    <p:bg>
-      <p:bgPr>
-        <a:solidFill>
-          <a:srgbClr val="FFFFFF"/>
-        </a:solidFill>
-      </p:bgPr>
-    </p:bg>
     <p:spTree>
       <p:nvGrpSpPr>
         <p:cNvPr id="1" name=""/>
@@ -3820,32 +4087,57 @@
       </p:grpSpPr>
       <p:sp>
         <p:nvSpPr>
-          <p:cNvPr id="2" name="Text 0"/>
-          <p:cNvSpPr/>
-          <p:nvPr/>
-        </p:nvSpPr>
-        <p:spPr>
-          <a:xfrm>
-            <a:off x="457200" y="274320"/>
-            <a:ext cx="8229600" cy="411480"/>
-          </a:xfrm>
-          <a:prstGeom prst="rect">
-            <a:avLst/>
-          </a:prstGeom>
-          <a:noFill/>
-          <a:ln/>
-        </p:spPr>
-        <p:txBody>
-          <a:bodyPr wrap="square" lIns="0" tIns="0" rIns="0" bIns="0" rtlCol="0" anchor="ctr"/>
-          <a:lstStyle/>
-          <a:p>
-            <a:pPr indent="0" marL="0">
-              <a:buNone/>
-            </a:pPr>
-            <a:r>
-              <a:rPr lang="en-US" sz="2400" b="1" dirty="0">
-                <a:solidFill>
-                  <a:srgbClr val="1A1A1A"/>
+          <p:cNvPr id="2" name="Shape 0"/>
+          <p:cNvSpPr/>
+          <p:nvPr/>
+        </p:nvSpPr>
+        <p:spPr>
+          <a:xfrm>
+            <a:off x="0" y="0"/>
+            <a:ext cx="9144000" cy="5143500"/>
+          </a:xfrm>
+          <a:prstGeom prst="rect">
+            <a:avLst/>
+          </a:prstGeom>
+          <a:solidFill>
+            <a:srgbClr val="FFFFFF"/>
+          </a:solidFill>
+          <a:ln w="12700">
+            <a:solidFill>
+              <a:srgbClr val="FFFFFF"/>
+            </a:solidFill>
+            <a:prstDash val="solid"/>
+          </a:ln>
+        </p:spPr>
+      </p:sp>
+      <p:sp>
+        <p:nvSpPr>
+          <p:cNvPr id="3" name="Text 1"/>
+          <p:cNvSpPr/>
+          <p:nvPr/>
+        </p:nvSpPr>
+        <p:spPr>
+          <a:xfrm>
+            <a:off x="457200" y="201168"/>
+            <a:ext cx="8229600" cy="320040"/>
+          </a:xfrm>
+          <a:prstGeom prst="rect">
+            <a:avLst/>
+          </a:prstGeom>
+          <a:noFill/>
+          <a:ln/>
+        </p:spPr>
+        <p:txBody>
+          <a:bodyPr wrap="square" lIns="0" tIns="0" rIns="0" bIns="0" rtlCol="0" anchor="ctr"/>
+          <a:lstStyle/>
+          <a:p>
+            <a:pPr indent="0" marL="0">
+              <a:buNone/>
+            </a:pPr>
+            <a:r>
+              <a:rPr lang="en-US" sz="2200" b="1" dirty="0">
+                <a:solidFill>
+                  <a:srgbClr val="1B2A4A"/>
                 </a:solidFill>
                 <a:latin typeface="Arial" pitchFamily="34" charset="0"/>
                 <a:ea typeface="Arial" pitchFamily="34" charset="-122"/>
@@ -3853,19 +4145,19 @@
               </a:rPr>
               <a:t>The Productive Pragmatism Frame</a:t>
             </a:r>
-            <a:endParaRPr lang="en-US" sz="2400" dirty="0"/>
-          </a:p>
-        </p:txBody>
-      </p:sp>
-      <p:sp>
-        <p:nvSpPr>
-          <p:cNvPr id="3" name="Text 1"/>
-          <p:cNvSpPr/>
-          <p:nvPr/>
-        </p:nvSpPr>
-        <p:spPr>
-          <a:xfrm>
-            <a:off x="457200" y="777240"/>
+            <a:endParaRPr lang="en-US" sz="2200" dirty="0"/>
+          </a:p>
+        </p:txBody>
+      </p:sp>
+      <p:sp>
+        <p:nvSpPr>
+          <p:cNvPr id="4" name="Text 2"/>
+          <p:cNvSpPr/>
+          <p:nvPr/>
+        </p:nvSpPr>
+        <p:spPr>
+          <a:xfrm>
+            <a:off x="457200" y="530352"/>
             <a:ext cx="8229600" cy="320040"/>
           </a:xfrm>
           <a:prstGeom prst="rect">
@@ -3882,9 +4174,9 @@
               <a:buNone/>
             </a:pPr>
             <a:r>
-              <a:rPr lang="en-US" sz="1400" dirty="0">
-                <a:solidFill>
-                  <a:srgbClr val="555555"/>
+              <a:rPr lang="en-US" sz="1300" dirty="0">
+                <a:solidFill>
+                  <a:srgbClr val="5A5A5A"/>
                 </a:solidFill>
                 <a:latin typeface="Arial" pitchFamily="34" charset="0"/>
                 <a:ea typeface="Arial" pitchFamily="34" charset="-122"/>
@@ -3892,20 +4184,20 @@
               </a:rPr>
               <a:t>Any continuous-improvement system — including Lean — must be re-oriented to these principles</a:t>
             </a:r>
-            <a:endParaRPr lang="en-US" sz="1400" dirty="0"/>
-          </a:p>
-        </p:txBody>
-      </p:sp>
-      <p:sp>
-        <p:nvSpPr>
-          <p:cNvPr id="4" name="Text 2"/>
-          <p:cNvSpPr/>
-          <p:nvPr/>
-        </p:nvSpPr>
-        <p:spPr>
-          <a:xfrm>
-            <a:off x="457200" y="1280160"/>
-            <a:ext cx="640080" cy="594360"/>
+            <a:endParaRPr lang="en-US" sz="1300" dirty="0"/>
+          </a:p>
+        </p:txBody>
+      </p:sp>
+      <p:sp>
+        <p:nvSpPr>
+          <p:cNvPr id="5" name="Text 3"/>
+          <p:cNvSpPr/>
+          <p:nvPr/>
+        </p:nvSpPr>
+        <p:spPr>
+          <a:xfrm>
+            <a:off x="457200" y="1078992"/>
+            <a:ext cx="640080" cy="365760"/>
           </a:xfrm>
           <a:prstGeom prst="rect">
             <a:avLst/>
@@ -3923,7 +4215,7 @@
             <a:r>
               <a:rPr lang="en-US" sz="1800" b="1" dirty="0">
                 <a:solidFill>
-                  <a:srgbClr val="555555"/>
+                  <a:srgbClr val="C9A227"/>
                 </a:solidFill>
                 <a:latin typeface="Arial" pitchFamily="34" charset="0"/>
                 <a:ea typeface="Arial" pitchFamily="34" charset="-122"/>
@@ -3937,14 +4229,14 @@
       </p:sp>
       <p:sp>
         <p:nvSpPr>
-          <p:cNvPr id="5" name="Text 3"/>
-          <p:cNvSpPr/>
-          <p:nvPr/>
-        </p:nvSpPr>
-        <p:spPr>
-          <a:xfrm>
-            <a:off x="1280160" y="1280160"/>
-            <a:ext cx="7132320" cy="274320"/>
+          <p:cNvPr id="6" name="Text 4"/>
+          <p:cNvSpPr/>
+          <p:nvPr/>
+        </p:nvSpPr>
+        <p:spPr>
+          <a:xfrm>
+            <a:off x="1234440" y="1005840"/>
+            <a:ext cx="7132320" cy="256032"/>
           </a:xfrm>
           <a:prstGeom prst="rect">
             <a:avLst/>
@@ -3962,7 +4254,7 @@
             <a:r>
               <a:rPr lang="en-US" sz="1500" b="1" dirty="0">
                 <a:solidFill>
-                  <a:srgbClr val="1A1A1A"/>
+                  <a:srgbClr val="1B2A4A"/>
                 </a:solidFill>
                 <a:latin typeface="Arial" pitchFamily="34" charset="0"/>
                 <a:ea typeface="Arial" pitchFamily="34" charset="-122"/>
@@ -3976,14 +4268,14 @@
       </p:sp>
       <p:sp>
         <p:nvSpPr>
-          <p:cNvPr id="6" name="Text 4"/>
-          <p:cNvSpPr/>
-          <p:nvPr/>
-        </p:nvSpPr>
-        <p:spPr>
-          <a:xfrm>
-            <a:off x="1280160" y="1554480"/>
-            <a:ext cx="7132320" cy="274320"/>
+          <p:cNvPr id="7" name="Text 5"/>
+          <p:cNvSpPr/>
+          <p:nvPr/>
+        </p:nvSpPr>
+        <p:spPr>
+          <a:xfrm>
+            <a:off x="1234440" y="1280160"/>
+            <a:ext cx="7132320" cy="320040"/>
           </a:xfrm>
           <a:prstGeom prst="rect">
             <a:avLst/>
@@ -4001,7 +4293,7 @@
             <a:r>
               <a:rPr lang="en-US" sz="1300" dirty="0">
                 <a:solidFill>
-                  <a:srgbClr val="555555"/>
+                  <a:srgbClr val="2A2A2A"/>
                 </a:solidFill>
                 <a:latin typeface="Arial" pitchFamily="34" charset="0"/>
                 <a:ea typeface="Arial" pitchFamily="34" charset="-122"/>
@@ -4015,14 +4307,14 @@
       </p:sp>
       <p:sp>
         <p:nvSpPr>
-          <p:cNvPr id="7" name="Text 5"/>
-          <p:cNvSpPr/>
-          <p:nvPr/>
-        </p:nvSpPr>
-        <p:spPr>
-          <a:xfrm>
-            <a:off x="457200" y="2057400"/>
-            <a:ext cx="640080" cy="594360"/>
+          <p:cNvPr id="8" name="Text 6"/>
+          <p:cNvSpPr/>
+          <p:nvPr/>
+        </p:nvSpPr>
+        <p:spPr>
+          <a:xfrm>
+            <a:off x="457200" y="1901952"/>
+            <a:ext cx="640080" cy="365760"/>
           </a:xfrm>
           <a:prstGeom prst="rect">
             <a:avLst/>
@@ -4040,7 +4332,7 @@
             <a:r>
               <a:rPr lang="en-US" sz="1800" b="1" dirty="0">
                 <a:solidFill>
-                  <a:srgbClr val="555555"/>
+                  <a:srgbClr val="C9A227"/>
                 </a:solidFill>
                 <a:latin typeface="Arial" pitchFamily="34" charset="0"/>
                 <a:ea typeface="Arial" pitchFamily="34" charset="-122"/>
@@ -4054,14 +4346,14 @@
       </p:sp>
       <p:sp>
         <p:nvSpPr>
-          <p:cNvPr id="8" name="Text 6"/>
-          <p:cNvSpPr/>
-          <p:nvPr/>
-        </p:nvSpPr>
-        <p:spPr>
-          <a:xfrm>
-            <a:off x="1280160" y="2057400"/>
-            <a:ext cx="7132320" cy="274320"/>
+          <p:cNvPr id="9" name="Text 7"/>
+          <p:cNvSpPr/>
+          <p:nvPr/>
+        </p:nvSpPr>
+        <p:spPr>
+          <a:xfrm>
+            <a:off x="1234440" y="1828800"/>
+            <a:ext cx="7132320" cy="256032"/>
           </a:xfrm>
           <a:prstGeom prst="rect">
             <a:avLst/>
@@ -4079,7 +4371,7 @@
             <a:r>
               <a:rPr lang="en-US" sz="1500" b="1" dirty="0">
                 <a:solidFill>
-                  <a:srgbClr val="1A1A1A"/>
+                  <a:srgbClr val="1B2A4A"/>
                 </a:solidFill>
                 <a:latin typeface="Arial" pitchFamily="34" charset="0"/>
                 <a:ea typeface="Arial" pitchFamily="34" charset="-122"/>
@@ -4093,14 +4385,14 @@
       </p:sp>
       <p:sp>
         <p:nvSpPr>
-          <p:cNvPr id="9" name="Text 7"/>
-          <p:cNvSpPr/>
-          <p:nvPr/>
-        </p:nvSpPr>
-        <p:spPr>
-          <a:xfrm>
-            <a:off x="1280160" y="2331720"/>
-            <a:ext cx="7132320" cy="274320"/>
+          <p:cNvPr id="10" name="Text 8"/>
+          <p:cNvSpPr/>
+          <p:nvPr/>
+        </p:nvSpPr>
+        <p:spPr>
+          <a:xfrm>
+            <a:off x="1234440" y="2103120"/>
+            <a:ext cx="7132320" cy="320040"/>
           </a:xfrm>
           <a:prstGeom prst="rect">
             <a:avLst/>
@@ -4118,7 +4410,7 @@
             <a:r>
               <a:rPr lang="en-US" sz="1300" dirty="0">
                 <a:solidFill>
-                  <a:srgbClr val="555555"/>
+                  <a:srgbClr val="2A2A2A"/>
                 </a:solidFill>
                 <a:latin typeface="Arial" pitchFamily="34" charset="0"/>
                 <a:ea typeface="Arial" pitchFamily="34" charset="-122"/>
@@ -4132,14 +4424,14 @@
       </p:sp>
       <p:sp>
         <p:nvSpPr>
-          <p:cNvPr id="10" name="Text 8"/>
-          <p:cNvSpPr/>
-          <p:nvPr/>
-        </p:nvSpPr>
-        <p:spPr>
-          <a:xfrm>
-            <a:off x="457200" y="2834640"/>
-            <a:ext cx="640080" cy="594360"/>
+          <p:cNvPr id="11" name="Text 9"/>
+          <p:cNvSpPr/>
+          <p:nvPr/>
+        </p:nvSpPr>
+        <p:spPr>
+          <a:xfrm>
+            <a:off x="457200" y="2724912"/>
+            <a:ext cx="640080" cy="365760"/>
           </a:xfrm>
           <a:prstGeom prst="rect">
             <a:avLst/>
@@ -4157,7 +4449,7 @@
             <a:r>
               <a:rPr lang="en-US" sz="1800" b="1" dirty="0">
                 <a:solidFill>
-                  <a:srgbClr val="555555"/>
+                  <a:srgbClr val="C9A227"/>
                 </a:solidFill>
                 <a:latin typeface="Arial" pitchFamily="34" charset="0"/>
                 <a:ea typeface="Arial" pitchFamily="34" charset="-122"/>
@@ -4171,14 +4463,14 @@
       </p:sp>
       <p:sp>
         <p:nvSpPr>
-          <p:cNvPr id="11" name="Text 9"/>
-          <p:cNvSpPr/>
-          <p:nvPr/>
-        </p:nvSpPr>
-        <p:spPr>
-          <a:xfrm>
-            <a:off x="1280160" y="2834640"/>
-            <a:ext cx="7132320" cy="274320"/>
+          <p:cNvPr id="12" name="Text 10"/>
+          <p:cNvSpPr/>
+          <p:nvPr/>
+        </p:nvSpPr>
+        <p:spPr>
+          <a:xfrm>
+            <a:off x="1234440" y="2651760"/>
+            <a:ext cx="7132320" cy="256032"/>
           </a:xfrm>
           <a:prstGeom prst="rect">
             <a:avLst/>
@@ -4196,7 +4488,7 @@
             <a:r>
               <a:rPr lang="en-US" sz="1500" b="1" dirty="0">
                 <a:solidFill>
-                  <a:srgbClr val="1A1A1A"/>
+                  <a:srgbClr val="1B2A4A"/>
                 </a:solidFill>
                 <a:latin typeface="Arial" pitchFamily="34" charset="0"/>
                 <a:ea typeface="Arial" pitchFamily="34" charset="-122"/>
@@ -4210,14 +4502,14 @@
       </p:sp>
       <p:sp>
         <p:nvSpPr>
-          <p:cNvPr id="12" name="Text 10"/>
-          <p:cNvSpPr/>
-          <p:nvPr/>
-        </p:nvSpPr>
-        <p:spPr>
-          <a:xfrm>
-            <a:off x="1280160" y="3108960"/>
-            <a:ext cx="7132320" cy="274320"/>
+          <p:cNvPr id="13" name="Text 11"/>
+          <p:cNvSpPr/>
+          <p:nvPr/>
+        </p:nvSpPr>
+        <p:spPr>
+          <a:xfrm>
+            <a:off x="1234440" y="2926080"/>
+            <a:ext cx="7132320" cy="320040"/>
           </a:xfrm>
           <a:prstGeom prst="rect">
             <a:avLst/>
@@ -4235,13 +4527,13 @@
             <a:r>
               <a:rPr lang="en-US" sz="1300" dirty="0">
                 <a:solidFill>
-                  <a:srgbClr val="555555"/>
-                </a:solidFill>
-                <a:latin typeface="Arial" pitchFamily="34" charset="0"/>
-                <a:ea typeface="Arial" pitchFamily="34" charset="-122"/>
-                <a:cs typeface="Arial" pitchFamily="34" charset="-120"/>
-              </a:rPr>
-              <a:t>Process improvement points toward domestic capacity, not temporary labor extraction</a:t>
+                  <a:srgbClr val="2A2A2A"/>
+                </a:solidFill>
+                <a:latin typeface="Arial" pitchFamily="34" charset="0"/>
+                <a:ea typeface="Arial" pitchFamily="34" charset="-122"/>
+                <a:cs typeface="Arial" pitchFamily="34" charset="-120"/>
+              </a:rPr>
+              <a:t>Capital and effort flow toward domestic capacity, not temporary labor extraction</a:t>
             </a:r>
             <a:endParaRPr lang="en-US" sz="1300" dirty="0"/>
           </a:p>
@@ -4249,14 +4541,14 @@
       </p:sp>
       <p:sp>
         <p:nvSpPr>
-          <p:cNvPr id="13" name="Text 11"/>
-          <p:cNvSpPr/>
-          <p:nvPr/>
-        </p:nvSpPr>
-        <p:spPr>
-          <a:xfrm>
-            <a:off x="457200" y="3611880"/>
-            <a:ext cx="640080" cy="594360"/>
+          <p:cNvPr id="14" name="Text 12"/>
+          <p:cNvSpPr/>
+          <p:nvPr/>
+        </p:nvSpPr>
+        <p:spPr>
+          <a:xfrm>
+            <a:off x="457200" y="3547872"/>
+            <a:ext cx="640080" cy="365760"/>
           </a:xfrm>
           <a:prstGeom prst="rect">
             <a:avLst/>
@@ -4274,7 +4566,7 @@
             <a:r>
               <a:rPr lang="en-US" sz="1800" b="1" dirty="0">
                 <a:solidFill>
-                  <a:srgbClr val="555555"/>
+                  <a:srgbClr val="C9A227"/>
                 </a:solidFill>
                 <a:latin typeface="Arial" pitchFamily="34" charset="0"/>
                 <a:ea typeface="Arial" pitchFamily="34" charset="-122"/>
@@ -4288,14 +4580,14 @@
       </p:sp>
       <p:sp>
         <p:nvSpPr>
-          <p:cNvPr id="14" name="Text 12"/>
-          <p:cNvSpPr/>
-          <p:nvPr/>
-        </p:nvSpPr>
-        <p:spPr>
-          <a:xfrm>
-            <a:off x="1280160" y="3611880"/>
-            <a:ext cx="7132320" cy="274320"/>
+          <p:cNvPr id="15" name="Text 13"/>
+          <p:cNvSpPr/>
+          <p:nvPr/>
+        </p:nvSpPr>
+        <p:spPr>
+          <a:xfrm>
+            <a:off x="1234440" y="3474720"/>
+            <a:ext cx="7132320" cy="256032"/>
           </a:xfrm>
           <a:prstGeom prst="rect">
             <a:avLst/>
@@ -4313,7 +4605,7 @@
             <a:r>
               <a:rPr lang="en-US" sz="1500" b="1" dirty="0">
                 <a:solidFill>
-                  <a:srgbClr val="1A1A1A"/>
+                  <a:srgbClr val="1B2A4A"/>
                 </a:solidFill>
                 <a:latin typeface="Arial" pitchFamily="34" charset="0"/>
                 <a:ea typeface="Arial" pitchFamily="34" charset="-122"/>
@@ -4327,14 +4619,14 @@
       </p:sp>
       <p:sp>
         <p:nvSpPr>
-          <p:cNvPr id="15" name="Text 13"/>
-          <p:cNvSpPr/>
-          <p:nvPr/>
-        </p:nvSpPr>
-        <p:spPr>
-          <a:xfrm>
-            <a:off x="1280160" y="3886200"/>
-            <a:ext cx="7132320" cy="274320"/>
+          <p:cNvPr id="16" name="Text 14"/>
+          <p:cNvSpPr/>
+          <p:nvPr/>
+        </p:nvSpPr>
+        <p:spPr>
+          <a:xfrm>
+            <a:off x="1234440" y="3749040"/>
+            <a:ext cx="7132320" cy="320040"/>
           </a:xfrm>
           <a:prstGeom prst="rect">
             <a:avLst/>
@@ -4352,7 +4644,7 @@
             <a:r>
               <a:rPr lang="en-US" sz="1300" dirty="0">
                 <a:solidFill>
-                  <a:srgbClr val="555555"/>
+                  <a:srgbClr val="2A2A2A"/>
                 </a:solidFill>
                 <a:latin typeface="Arial" pitchFamily="34" charset="0"/>
                 <a:ea typeface="Arial" pitchFamily="34" charset="-122"/>
@@ -4366,32 +4658,32 @@
       </p:sp>
       <p:sp>
         <p:nvSpPr>
-          <p:cNvPr id="16" name="Text 14"/>
+          <p:cNvPr id="17" name="Text 15"/>
           <p:cNvSpPr/>
           <p:nvPr/>
         </p:nvSpPr>
         <p:spPr>
           <a:xfrm>
             <a:off x="457200" y="4800600"/>
-            <a:ext cx="5943600" cy="228600"/>
-          </a:xfrm>
-          <a:prstGeom prst="rect">
-            <a:avLst/>
-          </a:prstGeom>
-          <a:noFill/>
-          <a:ln/>
-        </p:spPr>
-        <p:txBody>
-          <a:bodyPr wrap="square" lIns="0" tIns="0" rIns="0" bIns="0" rtlCol="0" anchor="ctr"/>
-          <a:lstStyle/>
-          <a:p>
-            <a:pPr indent="0" marL="0">
-              <a:buNone/>
-            </a:pPr>
-            <a:r>
-              <a:rPr lang="en-US" sz="1000" dirty="0">
-                <a:solidFill>
-                  <a:srgbClr val="555555"/>
+            <a:ext cx="5943600" cy="256032"/>
+          </a:xfrm>
+          <a:prstGeom prst="rect">
+            <a:avLst/>
+          </a:prstGeom>
+          <a:noFill/>
+          <a:ln/>
+        </p:spPr>
+        <p:txBody>
+          <a:bodyPr wrap="square" lIns="0" tIns="0" rIns="0" bIns="0" rtlCol="0" anchor="ctr"/>
+          <a:lstStyle/>
+          <a:p>
+            <a:pPr indent="0" marL="0">
+              <a:buNone/>
+            </a:pPr>
+            <a:r>
+              <a:rPr lang="en-US" sz="1100" dirty="0">
+                <a:solidFill>
+                  <a:srgbClr val="6A6A6A"/>
                 </a:solidFill>
                 <a:latin typeface="Arial" pitchFamily="34" charset="0"/>
                 <a:ea typeface="Arial" pitchFamily="34" charset="-122"/>
@@ -4399,20 +4691,20 @@
               </a:rPr>
               <a:t>Joshua Konkle  |  Chief of Staff Strategist</a:t>
             </a:r>
-            <a:endParaRPr lang="en-US" sz="1000" dirty="0"/>
-          </a:p>
-        </p:txBody>
-      </p:sp>
-      <p:sp>
-        <p:nvSpPr>
-          <p:cNvPr id="17" name="Text 15"/>
-          <p:cNvSpPr/>
-          <p:nvPr/>
-        </p:nvSpPr>
-        <p:spPr>
-          <a:xfrm>
-            <a:off x="7772400" y="4800600"/>
-            <a:ext cx="914400" cy="228600"/>
+            <a:endParaRPr lang="en-US" sz="1100" dirty="0"/>
+          </a:p>
+        </p:txBody>
+      </p:sp>
+      <p:sp>
+        <p:nvSpPr>
+          <p:cNvPr id="18" name="Text 16"/>
+          <p:cNvSpPr/>
+          <p:nvPr/>
+        </p:nvSpPr>
+        <p:spPr>
+          <a:xfrm>
+            <a:off x="7498080" y="4800600"/>
+            <a:ext cx="1188720" cy="256032"/>
           </a:xfrm>
           <a:prstGeom prst="rect">
             <a:avLst/>
@@ -4428,9 +4720,9 @@
               <a:buNone/>
             </a:pPr>
             <a:r>
-              <a:rPr lang="en-US" sz="1000" dirty="0">
-                <a:solidFill>
-                  <a:srgbClr val="555555"/>
+              <a:rPr lang="en-US" sz="1100" dirty="0">
+                <a:solidFill>
+                  <a:srgbClr val="6A6A6A"/>
                 </a:solidFill>
                 <a:latin typeface="Arial" pitchFamily="34" charset="0"/>
                 <a:ea typeface="Arial" pitchFamily="34" charset="-122"/>
@@ -4438,7 +4730,7 @@
               </a:rPr>
               <a:t>4 / 12</a:t>
             </a:r>
-            <a:endParaRPr lang="en-US" sz="1000" dirty="0"/>
+            <a:endParaRPr lang="en-US" sz="1100" dirty="0"/>
           </a:p>
         </p:txBody>
       </p:sp>
@@ -4453,13 +4745,6 @@
 <file path=ppt/slides/slide5.xml><?xml version="1.0" encoding="utf-8"?>
 <p:sld xmlns:a="http://schemas.openxmlformats.org/drawingml/2006/main" xmlns:r="http://schemas.openxmlformats.org/officeDocument/2006/relationships" xmlns:p="http://schemas.openxmlformats.org/presentationml/2006/main">
   <p:cSld name="Slide 5">
-    <p:bg>
-      <p:bgPr>
-        <a:solidFill>
-          <a:srgbClr val="FFFFFF"/>
-        </a:solidFill>
-      </p:bgPr>
-    </p:bg>
     <p:spTree>
       <p:nvGrpSpPr>
         <p:cNvPr id="1" name=""/>
@@ -4476,32 +4761,57 @@
       </p:grpSpPr>
       <p:sp>
         <p:nvSpPr>
-          <p:cNvPr id="2" name="Text 0"/>
-          <p:cNvSpPr/>
-          <p:nvPr/>
-        </p:nvSpPr>
-        <p:spPr>
-          <a:xfrm>
-            <a:off x="457200" y="274320"/>
-            <a:ext cx="8229600" cy="411480"/>
-          </a:xfrm>
-          <a:prstGeom prst="rect">
-            <a:avLst/>
-          </a:prstGeom>
-          <a:noFill/>
-          <a:ln/>
-        </p:spPr>
-        <p:txBody>
-          <a:bodyPr wrap="square" lIns="0" tIns="0" rIns="0" bIns="0" rtlCol="0" anchor="ctr"/>
-          <a:lstStyle/>
-          <a:p>
-            <a:pPr indent="0" marL="0">
-              <a:buNone/>
-            </a:pPr>
-            <a:r>
-              <a:rPr lang="en-US" sz="2200" b="1" dirty="0">
-                <a:solidFill>
-                  <a:srgbClr val="1A1A1A"/>
+          <p:cNvPr id="2" name="Shape 0"/>
+          <p:cNvSpPr/>
+          <p:nvPr/>
+        </p:nvSpPr>
+        <p:spPr>
+          <a:xfrm>
+            <a:off x="0" y="0"/>
+            <a:ext cx="9144000" cy="5143500"/>
+          </a:xfrm>
+          <a:prstGeom prst="rect">
+            <a:avLst/>
+          </a:prstGeom>
+          <a:solidFill>
+            <a:srgbClr val="FFFFFF"/>
+          </a:solidFill>
+          <a:ln w="12700">
+            <a:solidFill>
+              <a:srgbClr val="FFFFFF"/>
+            </a:solidFill>
+            <a:prstDash val="solid"/>
+          </a:ln>
+        </p:spPr>
+      </p:sp>
+      <p:sp>
+        <p:nvSpPr>
+          <p:cNvPr id="3" name="Text 1"/>
+          <p:cNvSpPr/>
+          <p:nvPr/>
+        </p:nvSpPr>
+        <p:spPr>
+          <a:xfrm>
+            <a:off x="457200" y="228600"/>
+            <a:ext cx="8229600" cy="320040"/>
+          </a:xfrm>
+          <a:prstGeom prst="rect">
+            <a:avLst/>
+          </a:prstGeom>
+          <a:noFill/>
+          <a:ln/>
+        </p:spPr>
+        <p:txBody>
+          <a:bodyPr wrap="square" lIns="0" tIns="0" rIns="0" bIns="0" rtlCol="0" anchor="ctr"/>
+          <a:lstStyle/>
+          <a:p>
+            <a:pPr indent="0" marL="0">
+              <a:buNone/>
+            </a:pPr>
+            <a:r>
+              <a:rPr lang="en-US" sz="2000" b="1" dirty="0">
+                <a:solidFill>
+                  <a:srgbClr val="1B2A4A"/>
                 </a:solidFill>
                 <a:latin typeface="Arial" pitchFamily="34" charset="0"/>
                 <a:ea typeface="Arial" pitchFamily="34" charset="-122"/>
@@ -4509,20 +4819,47 @@
               </a:rPr>
               <a:t>Workforce Reality for Lean Practitioners</a:t>
             </a:r>
-            <a:endParaRPr lang="en-US" sz="2200" dirty="0"/>
-          </a:p>
-        </p:txBody>
-      </p:sp>
-      <p:sp>
-        <p:nvSpPr>
-          <p:cNvPr id="3" name="Text 1"/>
-          <p:cNvSpPr/>
-          <p:nvPr/>
-        </p:nvSpPr>
-        <p:spPr>
-          <a:xfrm>
-            <a:off x="457200" y="822960"/>
-            <a:ext cx="8229600" cy="502920"/>
+            <a:endParaRPr lang="en-US" sz="2000" dirty="0"/>
+          </a:p>
+        </p:txBody>
+      </p:sp>
+      <p:sp>
+        <p:nvSpPr>
+          <p:cNvPr id="4" name="Shape 2"/>
+          <p:cNvSpPr/>
+          <p:nvPr/>
+        </p:nvSpPr>
+        <p:spPr>
+          <a:xfrm>
+            <a:off x="457200" y="685800"/>
+            <a:ext cx="8229600" cy="868680"/>
+          </a:xfrm>
+          <a:prstGeom prst="roundRect">
+            <a:avLst>
+              <a:gd name="adj" fmla="val 6316"/>
+            </a:avLst>
+          </a:prstGeom>
+          <a:solidFill>
+            <a:srgbClr val="1B2A4A"/>
+          </a:solidFill>
+          <a:ln w="12700">
+            <a:solidFill>
+              <a:srgbClr val="1B2A4A"/>
+            </a:solidFill>
+            <a:prstDash val="solid"/>
+          </a:ln>
+        </p:spPr>
+      </p:sp>
+      <p:sp>
+        <p:nvSpPr>
+          <p:cNvPr id="5" name="Text 3"/>
+          <p:cNvSpPr/>
+          <p:nvPr/>
+        </p:nvSpPr>
+        <p:spPr>
+          <a:xfrm>
+            <a:off x="640080" y="822960"/>
+            <a:ext cx="7863840" cy="640080"/>
           </a:xfrm>
           <a:prstGeom prst="rect">
             <a:avLst/>
@@ -4540,7 +4877,7 @@
             <a:r>
               <a:rPr lang="en-US" sz="1400" dirty="0">
                 <a:solidFill>
-                  <a:srgbClr val="555555"/>
+                  <a:srgbClr val="FFFFFF"/>
                 </a:solidFill>
                 <a:latin typeface="Arial" pitchFamily="34" charset="0"/>
                 <a:ea typeface="Arial" pitchFamily="34" charset="-122"/>
@@ -4554,32 +4891,32 @@
       </p:sp>
       <p:sp>
         <p:nvSpPr>
-          <p:cNvPr id="4" name="Text 2"/>
-          <p:cNvSpPr/>
-          <p:nvPr/>
-        </p:nvSpPr>
-        <p:spPr>
-          <a:xfrm>
-            <a:off x="457200" y="1508760"/>
-            <a:ext cx="8229600" cy="320040"/>
-          </a:xfrm>
-          <a:prstGeom prst="rect">
-            <a:avLst/>
-          </a:prstGeom>
-          <a:noFill/>
-          <a:ln/>
-        </p:spPr>
-        <p:txBody>
-          <a:bodyPr wrap="square" lIns="0" tIns="0" rIns="0" bIns="0" rtlCol="0" anchor="ctr"/>
-          <a:lstStyle/>
-          <a:p>
-            <a:pPr indent="0" marL="0">
-              <a:buNone/>
-            </a:pPr>
-            <a:r>
-              <a:rPr lang="en-US" sz="1600" b="1" dirty="0">
-                <a:solidFill>
-                  <a:srgbClr val="1A1A1A"/>
+          <p:cNvPr id="6" name="Text 4"/>
+          <p:cNvSpPr/>
+          <p:nvPr/>
+        </p:nvSpPr>
+        <p:spPr>
+          <a:xfrm>
+            <a:off x="457200" y="1783080"/>
+            <a:ext cx="8229600" cy="274320"/>
+          </a:xfrm>
+          <a:prstGeom prst="rect">
+            <a:avLst/>
+          </a:prstGeom>
+          <a:noFill/>
+          <a:ln/>
+        </p:spPr>
+        <p:txBody>
+          <a:bodyPr wrap="square" lIns="0" tIns="0" rIns="0" bIns="0" rtlCol="0" anchor="ctr"/>
+          <a:lstStyle/>
+          <a:p>
+            <a:pPr indent="0" marL="0">
+              <a:buNone/>
+            </a:pPr>
+            <a:r>
+              <a:rPr lang="en-US" sz="1400" b="1" dirty="0">
+                <a:solidFill>
+                  <a:srgbClr val="C9A227"/>
                 </a:solidFill>
                 <a:latin typeface="Arial" pitchFamily="34" charset="0"/>
                 <a:ea typeface="Arial" pitchFamily="34" charset="-122"/>
@@ -4587,20 +4924,20 @@
               </a:rPr>
               <a:t>Diagnostic Questions</a:t>
             </a:r>
-            <a:endParaRPr lang="en-US" sz="1600" dirty="0"/>
-          </a:p>
-        </p:txBody>
-      </p:sp>
-      <p:sp>
-        <p:nvSpPr>
-          <p:cNvPr id="5" name="Text 3"/>
-          <p:cNvSpPr/>
-          <p:nvPr/>
-        </p:nvSpPr>
-        <p:spPr>
-          <a:xfrm>
-            <a:off x="457200" y="1965960"/>
-            <a:ext cx="8229600" cy="502920"/>
+            <a:endParaRPr lang="en-US" sz="1400" dirty="0"/>
+          </a:p>
+        </p:txBody>
+      </p:sp>
+      <p:sp>
+        <p:nvSpPr>
+          <p:cNvPr id="7" name="Text 5"/>
+          <p:cNvSpPr/>
+          <p:nvPr/>
+        </p:nvSpPr>
+        <p:spPr>
+          <a:xfrm>
+            <a:off x="457200" y="2194560"/>
+            <a:ext cx="8229600" cy="457200"/>
           </a:xfrm>
           <a:prstGeom prst="rect">
             <a:avLst/>
@@ -4618,7 +4955,7 @@
             <a:r>
               <a:rPr lang="en-US" sz="1400" dirty="0">
                 <a:solidFill>
-                  <a:srgbClr val="1A1A1A"/>
+                  <a:srgbClr val="2A2A2A"/>
                 </a:solidFill>
                 <a:latin typeface="Arial" pitchFamily="34" charset="0"/>
                 <a:ea typeface="Arial" pitchFamily="34" charset="-122"/>
@@ -4632,14 +4969,14 @@
       </p:sp>
       <p:sp>
         <p:nvSpPr>
-          <p:cNvPr id="6" name="Text 4"/>
-          <p:cNvSpPr/>
-          <p:nvPr/>
-        </p:nvSpPr>
-        <p:spPr>
-          <a:xfrm>
-            <a:off x="457200" y="2514600"/>
-            <a:ext cx="8229600" cy="502920"/>
+          <p:cNvPr id="8" name="Text 6"/>
+          <p:cNvSpPr/>
+          <p:nvPr/>
+        </p:nvSpPr>
+        <p:spPr>
+          <a:xfrm>
+            <a:off x="457200" y="2697480"/>
+            <a:ext cx="8229600" cy="457200"/>
           </a:xfrm>
           <a:prstGeom prst="rect">
             <a:avLst/>
@@ -4657,7 +4994,7 @@
             <a:r>
               <a:rPr lang="en-US" sz="1400" dirty="0">
                 <a:solidFill>
-                  <a:srgbClr val="1A1A1A"/>
+                  <a:srgbClr val="2A2A2A"/>
                 </a:solidFill>
                 <a:latin typeface="Arial" pitchFamily="34" charset="0"/>
                 <a:ea typeface="Arial" pitchFamily="34" charset="-122"/>
@@ -4671,14 +5008,14 @@
       </p:sp>
       <p:sp>
         <p:nvSpPr>
-          <p:cNvPr id="7" name="Text 5"/>
-          <p:cNvSpPr/>
-          <p:nvPr/>
-        </p:nvSpPr>
-        <p:spPr>
-          <a:xfrm>
-            <a:off x="457200" y="3063240"/>
-            <a:ext cx="8229600" cy="502920"/>
+          <p:cNvPr id="9" name="Text 7"/>
+          <p:cNvSpPr/>
+          <p:nvPr/>
+        </p:nvSpPr>
+        <p:spPr>
+          <a:xfrm>
+            <a:off x="457200" y="3200400"/>
+            <a:ext cx="8229600" cy="457200"/>
           </a:xfrm>
           <a:prstGeom prst="rect">
             <a:avLst/>
@@ -4696,7 +5033,7 @@
             <a:r>
               <a:rPr lang="en-US" sz="1400" dirty="0">
                 <a:solidFill>
-                  <a:srgbClr val="1A1A1A"/>
+                  <a:srgbClr val="2A2A2A"/>
                 </a:solidFill>
                 <a:latin typeface="Arial" pitchFamily="34" charset="0"/>
                 <a:ea typeface="Arial" pitchFamily="34" charset="-122"/>
@@ -4710,14 +5047,14 @@
       </p:sp>
       <p:sp>
         <p:nvSpPr>
-          <p:cNvPr id="8" name="Text 6"/>
-          <p:cNvSpPr/>
-          <p:nvPr/>
-        </p:nvSpPr>
-        <p:spPr>
-          <a:xfrm>
-            <a:off x="457200" y="3611880"/>
-            <a:ext cx="8229600" cy="502920"/>
+          <p:cNvPr id="10" name="Text 8"/>
+          <p:cNvSpPr/>
+          <p:nvPr/>
+        </p:nvSpPr>
+        <p:spPr>
+          <a:xfrm>
+            <a:off x="457200" y="3703320"/>
+            <a:ext cx="8229600" cy="457200"/>
           </a:xfrm>
           <a:prstGeom prst="rect">
             <a:avLst/>
@@ -4735,7 +5072,7 @@
             <a:r>
               <a:rPr lang="en-US" sz="1400" dirty="0">
                 <a:solidFill>
-                  <a:srgbClr val="1A1A1A"/>
+                  <a:srgbClr val="2A2A2A"/>
                 </a:solidFill>
                 <a:latin typeface="Arial" pitchFamily="34" charset="0"/>
                 <a:ea typeface="Arial" pitchFamily="34" charset="-122"/>
@@ -4749,32 +5086,32 @@
       </p:sp>
       <p:sp>
         <p:nvSpPr>
-          <p:cNvPr id="9" name="Text 7"/>
+          <p:cNvPr id="11" name="Text 9"/>
           <p:cNvSpPr/>
           <p:nvPr/>
         </p:nvSpPr>
         <p:spPr>
           <a:xfrm>
             <a:off x="457200" y="4800600"/>
-            <a:ext cx="5943600" cy="228600"/>
-          </a:xfrm>
-          <a:prstGeom prst="rect">
-            <a:avLst/>
-          </a:prstGeom>
-          <a:noFill/>
-          <a:ln/>
-        </p:spPr>
-        <p:txBody>
-          <a:bodyPr wrap="square" lIns="0" tIns="0" rIns="0" bIns="0" rtlCol="0" anchor="ctr"/>
-          <a:lstStyle/>
-          <a:p>
-            <a:pPr indent="0" marL="0">
-              <a:buNone/>
-            </a:pPr>
-            <a:r>
-              <a:rPr lang="en-US" sz="1000" dirty="0">
-                <a:solidFill>
-                  <a:srgbClr val="555555"/>
+            <a:ext cx="5943600" cy="256032"/>
+          </a:xfrm>
+          <a:prstGeom prst="rect">
+            <a:avLst/>
+          </a:prstGeom>
+          <a:noFill/>
+          <a:ln/>
+        </p:spPr>
+        <p:txBody>
+          <a:bodyPr wrap="square" lIns="0" tIns="0" rIns="0" bIns="0" rtlCol="0" anchor="ctr"/>
+          <a:lstStyle/>
+          <a:p>
+            <a:pPr indent="0" marL="0">
+              <a:buNone/>
+            </a:pPr>
+            <a:r>
+              <a:rPr lang="en-US" sz="1100" dirty="0">
+                <a:solidFill>
+                  <a:srgbClr val="6A6A6A"/>
                 </a:solidFill>
                 <a:latin typeface="Arial" pitchFamily="34" charset="0"/>
                 <a:ea typeface="Arial" pitchFamily="34" charset="-122"/>
@@ -4782,20 +5119,20 @@
               </a:rPr>
               <a:t>Joshua Konkle  |  Chief of Staff Strategist</a:t>
             </a:r>
-            <a:endParaRPr lang="en-US" sz="1000" dirty="0"/>
-          </a:p>
-        </p:txBody>
-      </p:sp>
-      <p:sp>
-        <p:nvSpPr>
-          <p:cNvPr id="10" name="Text 8"/>
-          <p:cNvSpPr/>
-          <p:nvPr/>
-        </p:nvSpPr>
-        <p:spPr>
-          <a:xfrm>
-            <a:off x="7772400" y="4800600"/>
-            <a:ext cx="914400" cy="228600"/>
+            <a:endParaRPr lang="en-US" sz="1100" dirty="0"/>
+          </a:p>
+        </p:txBody>
+      </p:sp>
+      <p:sp>
+        <p:nvSpPr>
+          <p:cNvPr id="12" name="Text 10"/>
+          <p:cNvSpPr/>
+          <p:nvPr/>
+        </p:nvSpPr>
+        <p:spPr>
+          <a:xfrm>
+            <a:off x="7498080" y="4800600"/>
+            <a:ext cx="1188720" cy="256032"/>
           </a:xfrm>
           <a:prstGeom prst="rect">
             <a:avLst/>
@@ -4811,9 +5148,9 @@
               <a:buNone/>
             </a:pPr>
             <a:r>
-              <a:rPr lang="en-US" sz="1000" dirty="0">
-                <a:solidFill>
-                  <a:srgbClr val="555555"/>
+              <a:rPr lang="en-US" sz="1100" dirty="0">
+                <a:solidFill>
+                  <a:srgbClr val="6A6A6A"/>
                 </a:solidFill>
                 <a:latin typeface="Arial" pitchFamily="34" charset="0"/>
                 <a:ea typeface="Arial" pitchFamily="34" charset="-122"/>
@@ -4821,7 +5158,7 @@
               </a:rPr>
               <a:t>5 / 12</a:t>
             </a:r>
-            <a:endParaRPr lang="en-US" sz="1000" dirty="0"/>
+            <a:endParaRPr lang="en-US" sz="1100" dirty="0"/>
           </a:p>
         </p:txBody>
       </p:sp>
@@ -4836,13 +5173,6 @@
 <file path=ppt/slides/slide6.xml><?xml version="1.0" encoding="utf-8"?>
 <p:sld xmlns:a="http://schemas.openxmlformats.org/drawingml/2006/main" xmlns:r="http://schemas.openxmlformats.org/officeDocument/2006/relationships" xmlns:p="http://schemas.openxmlformats.org/presentationml/2006/main">
   <p:cSld name="Slide 6">
-    <p:bg>
-      <p:bgPr>
-        <a:solidFill>
-          <a:srgbClr val="FFFFFF"/>
-        </a:solidFill>
-      </p:bgPr>
-    </p:bg>
     <p:spTree>
       <p:nvGrpSpPr>
         <p:cNvPr id="1" name=""/>
@@ -4859,63 +5189,24 @@
       </p:grpSpPr>
       <p:sp>
         <p:nvSpPr>
-          <p:cNvPr id="2" name="Text 0"/>
-          <p:cNvSpPr/>
-          <p:nvPr/>
-        </p:nvSpPr>
-        <p:spPr>
-          <a:xfrm>
-            <a:off x="457200" y="274320"/>
-            <a:ext cx="8229600" cy="411480"/>
-          </a:xfrm>
-          <a:prstGeom prst="rect">
-            <a:avLst/>
-          </a:prstGeom>
-          <a:noFill/>
-          <a:ln/>
-        </p:spPr>
-        <p:txBody>
-          <a:bodyPr wrap="square" lIns="0" tIns="0" rIns="0" bIns="0" rtlCol="0" anchor="ctr"/>
-          <a:lstStyle/>
-          <a:p>
-            <a:pPr indent="0" marL="0">
-              <a:buNone/>
-            </a:pPr>
-            <a:r>
-              <a:rPr lang="en-US" sz="2600" b="1" dirty="0">
-                <a:solidFill>
-                  <a:srgbClr val="1A1A1A"/>
-                </a:solidFill>
-                <a:latin typeface="Arial" pitchFamily="34" charset="0"/>
-                <a:ea typeface="Arial" pitchFamily="34" charset="-122"/>
-                <a:cs typeface="Arial" pitchFamily="34" charset="-120"/>
-              </a:rPr>
-              <a:t>Redefining Value &amp; Waste</a:t>
-            </a:r>
-            <a:endParaRPr lang="en-US" sz="2600" dirty="0"/>
-          </a:p>
-        </p:txBody>
-      </p:sp>
-      <p:sp>
-        <p:nvSpPr>
-          <p:cNvPr id="3" name="Shape 1"/>
-          <p:cNvSpPr/>
-          <p:nvPr/>
-        </p:nvSpPr>
-        <p:spPr>
-          <a:xfrm>
-            <a:off x="365760" y="914400"/>
-            <a:ext cx="4023360" cy="3200400"/>
+          <p:cNvPr id="2" name="Shape 0"/>
+          <p:cNvSpPr/>
+          <p:nvPr/>
+        </p:nvSpPr>
+        <p:spPr>
+          <a:xfrm>
+            <a:off x="0" y="0"/>
+            <a:ext cx="9144000" cy="5143500"/>
           </a:xfrm>
           <a:prstGeom prst="rect">
             <a:avLst/>
           </a:prstGeom>
           <a:solidFill>
-            <a:srgbClr val="F7F7F7"/>
+            <a:srgbClr val="FFFFFF"/>
           </a:solidFill>
           <a:ln w="12700">
             <a:solidFill>
-              <a:srgbClr val="CCCCCC"/>
+              <a:srgbClr val="FFFFFF"/>
             </a:solidFill>
             <a:prstDash val="solid"/>
           </a:ln>
@@ -4923,14 +5214,80 @@
       </p:sp>
       <p:sp>
         <p:nvSpPr>
-          <p:cNvPr id="4" name="Text 2"/>
-          <p:cNvSpPr/>
-          <p:nvPr/>
-        </p:nvSpPr>
-        <p:spPr>
-          <a:xfrm>
-            <a:off x="548640" y="1097280"/>
-            <a:ext cx="3657600" cy="320040"/>
+          <p:cNvPr id="3" name="Text 1"/>
+          <p:cNvSpPr/>
+          <p:nvPr/>
+        </p:nvSpPr>
+        <p:spPr>
+          <a:xfrm>
+            <a:off x="457200" y="274320"/>
+            <a:ext cx="8229600" cy="365760"/>
+          </a:xfrm>
+          <a:prstGeom prst="rect">
+            <a:avLst/>
+          </a:prstGeom>
+          <a:noFill/>
+          <a:ln/>
+        </p:spPr>
+        <p:txBody>
+          <a:bodyPr wrap="square" lIns="0" tIns="0" rIns="0" bIns="0" rtlCol="0" anchor="ctr"/>
+          <a:lstStyle/>
+          <a:p>
+            <a:pPr indent="0" marL="0">
+              <a:buNone/>
+            </a:pPr>
+            <a:r>
+              <a:rPr lang="en-US" sz="2200" b="1" dirty="0">
+                <a:solidFill>
+                  <a:srgbClr val="1B2A4A"/>
+                </a:solidFill>
+                <a:latin typeface="Arial" pitchFamily="34" charset="0"/>
+                <a:ea typeface="Arial" pitchFamily="34" charset="-122"/>
+                <a:cs typeface="Arial" pitchFamily="34" charset="-120"/>
+              </a:rPr>
+              <a:t>Redefining Value &amp; Waste</a:t>
+            </a:r>
+            <a:endParaRPr lang="en-US" sz="2200" dirty="0"/>
+          </a:p>
+        </p:txBody>
+      </p:sp>
+      <p:sp>
+        <p:nvSpPr>
+          <p:cNvPr id="4" name="Shape 2"/>
+          <p:cNvSpPr/>
+          <p:nvPr/>
+        </p:nvSpPr>
+        <p:spPr>
+          <a:xfrm>
+            <a:off x="457200" y="914400"/>
+            <a:ext cx="3931920" cy="3200400"/>
+          </a:xfrm>
+          <a:prstGeom prst="roundRect">
+            <a:avLst>
+              <a:gd name="adj" fmla="val 2286"/>
+            </a:avLst>
+          </a:prstGeom>
+          <a:solidFill>
+            <a:srgbClr val="1B2A4A"/>
+          </a:solidFill>
+          <a:ln w="12700">
+            <a:solidFill>
+              <a:srgbClr val="1B2A4A"/>
+            </a:solidFill>
+            <a:prstDash val="solid"/>
+          </a:ln>
+        </p:spPr>
+      </p:sp>
+      <p:sp>
+        <p:nvSpPr>
+          <p:cNvPr id="5" name="Text 3"/>
+          <p:cNvSpPr/>
+          <p:nvPr/>
+        </p:nvSpPr>
+        <p:spPr>
+          <a:xfrm>
+            <a:off x="685800" y="1143000"/>
+            <a:ext cx="3566160" cy="320040"/>
           </a:xfrm>
           <a:prstGeom prst="rect">
             <a:avLst/>
@@ -4948,7 +5305,7 @@
             <a:r>
               <a:rPr lang="en-US" sz="1300" b="1" dirty="0">
                 <a:solidFill>
-                  <a:srgbClr val="555555"/>
+                  <a:srgbClr val="C9A227"/>
                 </a:solidFill>
                 <a:latin typeface="Arial" pitchFamily="34" charset="0"/>
                 <a:ea typeface="Arial" pitchFamily="34" charset="-122"/>
@@ -4962,32 +5319,32 @@
       </p:sp>
       <p:sp>
         <p:nvSpPr>
-          <p:cNvPr id="5" name="Text 3"/>
-          <p:cNvSpPr/>
-          <p:nvPr/>
-        </p:nvSpPr>
-        <p:spPr>
-          <a:xfrm>
-            <a:off x="548640" y="1554480"/>
-            <a:ext cx="3657600" cy="2286000"/>
-          </a:xfrm>
-          <a:prstGeom prst="rect">
-            <a:avLst/>
-          </a:prstGeom>
-          <a:noFill/>
-          <a:ln/>
-        </p:spPr>
-        <p:txBody>
-          <a:bodyPr wrap="square" lIns="0" tIns="0" rIns="0" bIns="0" rtlCol="0" anchor="ctr"/>
-          <a:lstStyle/>
-          <a:p>
-            <a:pPr indent="0" marL="0">
-              <a:buNone/>
-            </a:pPr>
-            <a:r>
-              <a:rPr lang="en-US" sz="1500" dirty="0">
-                <a:solidFill>
-                  <a:srgbClr val="1A1A1A"/>
+          <p:cNvPr id="6" name="Text 4"/>
+          <p:cNvSpPr/>
+          <p:nvPr/>
+        </p:nvSpPr>
+        <p:spPr>
+          <a:xfrm>
+            <a:off x="685800" y="1645920"/>
+            <a:ext cx="3566160" cy="2194560"/>
+          </a:xfrm>
+          <a:prstGeom prst="rect">
+            <a:avLst/>
+          </a:prstGeom>
+          <a:noFill/>
+          <a:ln/>
+        </p:spPr>
+        <p:txBody>
+          <a:bodyPr wrap="square" lIns="0" tIns="0" rIns="0" bIns="0" rtlCol="0" anchor="ctr"/>
+          <a:lstStyle/>
+          <a:p>
+            <a:pPr indent="0" marL="0">
+              <a:buNone/>
+            </a:pPr>
+            <a:r>
+              <a:rPr lang="en-US" sz="1400" dirty="0">
+                <a:solidFill>
+                  <a:srgbClr val="FFFFFF"/>
                 </a:solidFill>
                 <a:latin typeface="Arial" pitchFamily="34" charset="0"/>
                 <a:ea typeface="Arial" pitchFamily="34" charset="-122"/>
@@ -4995,16 +5352,16 @@
               </a:rPr>
               <a:t>• Building domestic productive capacity</a:t>
             </a:r>
-            <a:endParaRPr lang="en-US" sz="1500" dirty="0"/>
-          </a:p>
-          <a:p>
-            <a:pPr indent="0" marL="0">
-              <a:buNone/>
-            </a:pPr>
-            <a:r>
-              <a:rPr lang="en-US" sz="1500" dirty="0">
-                <a:solidFill>
-                  <a:srgbClr val="1A1A1A"/>
+            <a:endParaRPr lang="en-US" sz="1400" dirty="0"/>
+          </a:p>
+          <a:p>
+            <a:pPr indent="0" marL="0">
+              <a:buNone/>
+            </a:pPr>
+            <a:r>
+              <a:rPr lang="en-US" sz="1400" dirty="0">
+                <a:solidFill>
+                  <a:srgbClr val="FFFFFF"/>
                 </a:solidFill>
                 <a:latin typeface="Arial" pitchFamily="34" charset="0"/>
                 <a:ea typeface="Arial" pitchFamily="34" charset="-122"/>
@@ -5012,16 +5369,16 @@
               </a:rPr>
               <a:t>• High-skill American roles</a:t>
             </a:r>
-            <a:endParaRPr lang="en-US" sz="1500" dirty="0"/>
-          </a:p>
-          <a:p>
-            <a:pPr indent="0" marL="0">
-              <a:buNone/>
-            </a:pPr>
-            <a:r>
-              <a:rPr lang="en-US" sz="1500" dirty="0">
-                <a:solidFill>
-                  <a:srgbClr val="1A1A1A"/>
+            <a:endParaRPr lang="en-US" sz="1400" dirty="0"/>
+          </a:p>
+          <a:p>
+            <a:pPr indent="0" marL="0">
+              <a:buNone/>
+            </a:pPr>
+            <a:r>
+              <a:rPr lang="en-US" sz="1400" dirty="0">
+                <a:solidFill>
+                  <a:srgbClr val="FFFFFF"/>
                 </a:solidFill>
                 <a:latin typeface="Arial" pitchFamily="34" charset="0"/>
                 <a:ea typeface="Arial" pitchFamily="34" charset="-122"/>
@@ -5029,16 +5386,16 @@
               </a:rPr>
               <a:t>• Knowledge retention</a:t>
             </a:r>
-            <a:endParaRPr lang="en-US" sz="1500" dirty="0"/>
-          </a:p>
-          <a:p>
-            <a:pPr indent="0" marL="0">
-              <a:buNone/>
-            </a:pPr>
-            <a:r>
-              <a:rPr lang="en-US" sz="1500" dirty="0">
-                <a:solidFill>
-                  <a:srgbClr val="1A1A1A"/>
+            <a:endParaRPr lang="en-US" sz="1400" dirty="0"/>
+          </a:p>
+          <a:p>
+            <a:pPr indent="0" marL="0">
+              <a:buNone/>
+            </a:pPr>
+            <a:r>
+              <a:rPr lang="en-US" sz="1400" dirty="0">
+                <a:solidFill>
+                  <a:srgbClr val="FFFFFF"/>
                 </a:solidFill>
                 <a:latin typeface="Arial" pitchFamily="34" charset="0"/>
                 <a:ea typeface="Arial" pitchFamily="34" charset="-122"/>
@@ -5046,16 +5403,16 @@
               </a:rPr>
               <a:t>• Innovation capacity</a:t>
             </a:r>
-            <a:endParaRPr lang="en-US" sz="1500" dirty="0"/>
-          </a:p>
-          <a:p>
-            <a:pPr indent="0" marL="0">
-              <a:buNone/>
-            </a:pPr>
-            <a:r>
-              <a:rPr lang="en-US" sz="1500" dirty="0">
-                <a:solidFill>
-                  <a:srgbClr val="1A1A1A"/>
+            <a:endParaRPr lang="en-US" sz="1400" dirty="0"/>
+          </a:p>
+          <a:p>
+            <a:pPr indent="0" marL="0">
+              <a:buNone/>
+            </a:pPr>
+            <a:r>
+              <a:rPr lang="en-US" sz="1400" dirty="0">
+                <a:solidFill>
+                  <a:srgbClr val="FFFFFF"/>
                 </a:solidFill>
                 <a:latin typeface="Arial" pitchFamily="34" charset="0"/>
                 <a:ea typeface="Arial" pitchFamily="34" charset="-122"/>
@@ -5063,40 +5420,47 @@
               </a:rPr>
               <a:t>• Workforce stability</a:t>
             </a:r>
-            <a:endParaRPr lang="en-US" sz="1500" dirty="0"/>
-          </a:p>
-        </p:txBody>
-      </p:sp>
-      <p:sp>
-        <p:nvSpPr>
-          <p:cNvPr id="6" name="Shape 4"/>
+            <a:endParaRPr lang="en-US" sz="1400" dirty="0"/>
+          </a:p>
+        </p:txBody>
+      </p:sp>
+      <p:sp>
+        <p:nvSpPr>
+          <p:cNvPr id="7" name="Shape 5"/>
           <p:cNvSpPr/>
           <p:nvPr/>
         </p:nvSpPr>
         <p:spPr>
           <a:xfrm>
             <a:off x="4754880" y="914400"/>
-            <a:ext cx="4023360" cy="3200400"/>
-          </a:xfrm>
-          <a:prstGeom prst="rect">
-            <a:avLst/>
+            <a:ext cx="3931920" cy="3200400"/>
+          </a:xfrm>
+          <a:prstGeom prst="roundRect">
+            <a:avLst>
+              <a:gd name="adj" fmla="val 2286"/>
+            </a:avLst>
           </a:prstGeom>
           <a:solidFill>
-            <a:srgbClr val="111111"/>
+            <a:srgbClr val="3A3A3A"/>
           </a:solidFill>
-          <a:ln/>
-        </p:spPr>
-      </p:sp>
-      <p:sp>
-        <p:nvSpPr>
-          <p:cNvPr id="7" name="Text 5"/>
-          <p:cNvSpPr/>
-          <p:nvPr/>
-        </p:nvSpPr>
-        <p:spPr>
-          <a:xfrm>
-            <a:off x="4937760" y="1097280"/>
-            <a:ext cx="3657600" cy="320040"/>
+          <a:ln w="12700">
+            <a:solidFill>
+              <a:srgbClr val="3A3A3A"/>
+            </a:solidFill>
+            <a:prstDash val="solid"/>
+          </a:ln>
+        </p:spPr>
+      </p:sp>
+      <p:sp>
+        <p:nvSpPr>
+          <p:cNvPr id="8" name="Text 6"/>
+          <p:cNvSpPr/>
+          <p:nvPr/>
+        </p:nvSpPr>
+        <p:spPr>
+          <a:xfrm>
+            <a:off x="4983480" y="1143000"/>
+            <a:ext cx="3566160" cy="320040"/>
           </a:xfrm>
           <a:prstGeom prst="rect">
             <a:avLst/>
@@ -5114,7 +5478,7 @@
             <a:r>
               <a:rPr lang="en-US" sz="1300" b="1" dirty="0">
                 <a:solidFill>
-                  <a:srgbClr val="AAAAAA"/>
+                  <a:srgbClr val="C9A227"/>
                 </a:solidFill>
                 <a:latin typeface="Arial" pitchFamily="34" charset="0"/>
                 <a:ea typeface="Arial" pitchFamily="34" charset="-122"/>
@@ -5128,32 +5492,32 @@
       </p:sp>
       <p:sp>
         <p:nvSpPr>
-          <p:cNvPr id="8" name="Text 6"/>
-          <p:cNvSpPr/>
-          <p:nvPr/>
-        </p:nvSpPr>
-        <p:spPr>
-          <a:xfrm>
-            <a:off x="4937760" y="1554480"/>
-            <a:ext cx="3657600" cy="2286000"/>
-          </a:xfrm>
-          <a:prstGeom prst="rect">
-            <a:avLst/>
-          </a:prstGeom>
-          <a:noFill/>
-          <a:ln/>
-        </p:spPr>
-        <p:txBody>
-          <a:bodyPr wrap="square" lIns="0" tIns="0" rIns="0" bIns="0" rtlCol="0" anchor="ctr"/>
-          <a:lstStyle/>
-          <a:p>
-            <a:pPr indent="0" marL="0">
-              <a:buNone/>
-            </a:pPr>
-            <a:r>
-              <a:rPr lang="en-US" sz="1500" dirty="0">
-                <a:solidFill>
-                  <a:srgbClr val="F5F5F5"/>
+          <p:cNvPr id="9" name="Text 7"/>
+          <p:cNvSpPr/>
+          <p:nvPr/>
+        </p:nvSpPr>
+        <p:spPr>
+          <a:xfrm>
+            <a:off x="4983480" y="1645920"/>
+            <a:ext cx="3566160" cy="2194560"/>
+          </a:xfrm>
+          <a:prstGeom prst="rect">
+            <a:avLst/>
+          </a:prstGeom>
+          <a:noFill/>
+          <a:ln/>
+        </p:spPr>
+        <p:txBody>
+          <a:bodyPr wrap="square" lIns="0" tIns="0" rIns="0" bIns="0" rtlCol="0" anchor="ctr"/>
+          <a:lstStyle/>
+          <a:p>
+            <a:pPr indent="0" marL="0">
+              <a:buNone/>
+            </a:pPr>
+            <a:r>
+              <a:rPr lang="en-US" sz="1400" dirty="0">
+                <a:solidFill>
+                  <a:srgbClr val="FFFFFF"/>
                 </a:solidFill>
                 <a:latin typeface="Arial" pitchFamily="34" charset="0"/>
                 <a:ea typeface="Arial" pitchFamily="34" charset="-122"/>
@@ -5161,72 +5525,72 @@
               </a:rPr>
               <a:t>• Knowledge that walks out with every temporary rotation</a:t>
             </a:r>
-            <a:endParaRPr lang="en-US" sz="1500" dirty="0"/>
-          </a:p>
-          <a:p>
-            <a:pPr indent="0" marL="0">
-              <a:buNone/>
-            </a:pPr>
-            <a:r>
-              <a:rPr lang="en-US" sz="1500" dirty="0">
-                <a:solidFill>
-                  <a:srgbClr val="F5F5F5"/>
-                </a:solidFill>
-                <a:latin typeface="Arial" pitchFamily="34" charset="0"/>
-                <a:ea typeface="Arial" pitchFamily="34" charset="-122"/>
-                <a:cs typeface="Arial" pitchFamily="34" charset="-120"/>
-              </a:rPr>
-              <a:t>• Processes that only run with constant low-skill churn</a:t>
-            </a:r>
-            <a:endParaRPr lang="en-US" sz="1500" dirty="0"/>
-          </a:p>
-          <a:p>
-            <a:pPr indent="0" marL="0">
-              <a:buNone/>
-            </a:pPr>
-            <a:r>
-              <a:rPr lang="en-US" sz="1500" dirty="0">
-                <a:solidFill>
-                  <a:srgbClr val="F5F5F5"/>
-                </a:solidFill>
-                <a:latin typeface="Arial" pitchFamily="34" charset="0"/>
-                <a:ea typeface="Arial" pitchFamily="34" charset="-122"/>
-                <a:cs typeface="Arial" pitchFamily="34" charset="-120"/>
-              </a:rPr>
-              <a:t>• Improvements that increase strategic fragility</a:t>
-            </a:r>
-            <a:endParaRPr lang="en-US" sz="1500" dirty="0"/>
-          </a:p>
-        </p:txBody>
-      </p:sp>
-      <p:sp>
-        <p:nvSpPr>
-          <p:cNvPr id="9" name="Text 7"/>
+            <a:endParaRPr lang="en-US" sz="1400" dirty="0"/>
+          </a:p>
+          <a:p>
+            <a:pPr indent="0" marL="0">
+              <a:buNone/>
+            </a:pPr>
+            <a:r>
+              <a:rPr lang="en-US" sz="1400" dirty="0">
+                <a:solidFill>
+                  <a:srgbClr val="FFFFFF"/>
+                </a:solidFill>
+                <a:latin typeface="Arial" pitchFamily="34" charset="0"/>
+                <a:ea typeface="Arial" pitchFamily="34" charset="-122"/>
+                <a:cs typeface="Arial" pitchFamily="34" charset="-120"/>
+              </a:rPr>
+              <a:t>• Permanent design for short-cycle non-sovereign labor on critical seats</a:t>
+            </a:r>
+            <a:endParaRPr lang="en-US" sz="1400" dirty="0"/>
+          </a:p>
+          <a:p>
+            <a:pPr indent="0" marL="0">
+              <a:buNone/>
+            </a:pPr>
+            <a:r>
+              <a:rPr lang="en-US" sz="1400" dirty="0">
+                <a:solidFill>
+                  <a:srgbClr val="FFFFFF"/>
+                </a:solidFill>
+                <a:latin typeface="Arial" pitchFamily="34" charset="0"/>
+                <a:ea typeface="Arial" pitchFamily="34" charset="-122"/>
+                <a:cs typeface="Arial" pitchFamily="34" charset="-120"/>
+              </a:rPr>
+              <a:t>• Improvement that only banks labor-cost cuts</a:t>
+            </a:r>
+            <a:endParaRPr lang="en-US" sz="1400" dirty="0"/>
+          </a:p>
+        </p:txBody>
+      </p:sp>
+      <p:sp>
+        <p:nvSpPr>
+          <p:cNvPr id="10" name="Text 8"/>
           <p:cNvSpPr/>
           <p:nvPr/>
         </p:nvSpPr>
         <p:spPr>
           <a:xfrm>
             <a:off x="457200" y="4800600"/>
-            <a:ext cx="5943600" cy="228600"/>
-          </a:xfrm>
-          <a:prstGeom prst="rect">
-            <a:avLst/>
-          </a:prstGeom>
-          <a:noFill/>
-          <a:ln/>
-        </p:spPr>
-        <p:txBody>
-          <a:bodyPr wrap="square" lIns="0" tIns="0" rIns="0" bIns="0" rtlCol="0" anchor="ctr"/>
-          <a:lstStyle/>
-          <a:p>
-            <a:pPr indent="0" marL="0">
-              <a:buNone/>
-            </a:pPr>
-            <a:r>
-              <a:rPr lang="en-US" sz="1000" dirty="0">
-                <a:solidFill>
-                  <a:srgbClr val="555555"/>
+            <a:ext cx="5943600" cy="256032"/>
+          </a:xfrm>
+          <a:prstGeom prst="rect">
+            <a:avLst/>
+          </a:prstGeom>
+          <a:noFill/>
+          <a:ln/>
+        </p:spPr>
+        <p:txBody>
+          <a:bodyPr wrap="square" lIns="0" tIns="0" rIns="0" bIns="0" rtlCol="0" anchor="ctr"/>
+          <a:lstStyle/>
+          <a:p>
+            <a:pPr indent="0" marL="0">
+              <a:buNone/>
+            </a:pPr>
+            <a:r>
+              <a:rPr lang="en-US" sz="1100" dirty="0">
+                <a:solidFill>
+                  <a:srgbClr val="6A6A6A"/>
                 </a:solidFill>
                 <a:latin typeface="Arial" pitchFamily="34" charset="0"/>
                 <a:ea typeface="Arial" pitchFamily="34" charset="-122"/>
@@ -5234,20 +5598,20 @@
               </a:rPr>
               <a:t>Joshua Konkle  |  Chief of Staff Strategist</a:t>
             </a:r>
-            <a:endParaRPr lang="en-US" sz="1000" dirty="0"/>
-          </a:p>
-        </p:txBody>
-      </p:sp>
-      <p:sp>
-        <p:nvSpPr>
-          <p:cNvPr id="10" name="Text 8"/>
-          <p:cNvSpPr/>
-          <p:nvPr/>
-        </p:nvSpPr>
-        <p:spPr>
-          <a:xfrm>
-            <a:off x="7772400" y="4800600"/>
-            <a:ext cx="914400" cy="228600"/>
+            <a:endParaRPr lang="en-US" sz="1100" dirty="0"/>
+          </a:p>
+        </p:txBody>
+      </p:sp>
+      <p:sp>
+        <p:nvSpPr>
+          <p:cNvPr id="11" name="Text 9"/>
+          <p:cNvSpPr/>
+          <p:nvPr/>
+        </p:nvSpPr>
+        <p:spPr>
+          <a:xfrm>
+            <a:off x="7498080" y="4800600"/>
+            <a:ext cx="1188720" cy="256032"/>
           </a:xfrm>
           <a:prstGeom prst="rect">
             <a:avLst/>
@@ -5263,9 +5627,9 @@
               <a:buNone/>
             </a:pPr>
             <a:r>
-              <a:rPr lang="en-US" sz="1000" dirty="0">
-                <a:solidFill>
-                  <a:srgbClr val="555555"/>
+              <a:rPr lang="en-US" sz="1100" dirty="0">
+                <a:solidFill>
+                  <a:srgbClr val="6A6A6A"/>
                 </a:solidFill>
                 <a:latin typeface="Arial" pitchFamily="34" charset="0"/>
                 <a:ea typeface="Arial" pitchFamily="34" charset="-122"/>
@@ -5273,7 +5637,7 @@
               </a:rPr>
               <a:t>6 / 12</a:t>
             </a:r>
-            <a:endParaRPr lang="en-US" sz="1000" dirty="0"/>
+            <a:endParaRPr lang="en-US" sz="1100" dirty="0"/>
           </a:p>
         </p:txBody>
       </p:sp>
@@ -5288,13 +5652,6 @@
 <file path=ppt/slides/slide7.xml><?xml version="1.0" encoding="utf-8"?>
 <p:sld xmlns:a="http://schemas.openxmlformats.org/drawingml/2006/main" xmlns:r="http://schemas.openxmlformats.org/officeDocument/2006/relationships" xmlns:p="http://schemas.openxmlformats.org/presentationml/2006/main">
   <p:cSld name="Slide 7">
-    <p:bg>
-      <p:bgPr>
-        <a:solidFill>
-          <a:srgbClr val="FFFFFF"/>
-        </a:solidFill>
-      </p:bgPr>
-    </p:bg>
     <p:spTree>
       <p:nvGrpSpPr>
         <p:cNvPr id="1" name=""/>
@@ -5311,32 +5668,57 @@
       </p:grpSpPr>
       <p:sp>
         <p:nvSpPr>
-          <p:cNvPr id="2" name="Text 0"/>
+          <p:cNvPr id="2" name="Shape 0"/>
+          <p:cNvSpPr/>
+          <p:nvPr/>
+        </p:nvSpPr>
+        <p:spPr>
+          <a:xfrm>
+            <a:off x="0" y="0"/>
+            <a:ext cx="9144000" cy="5143500"/>
+          </a:xfrm>
+          <a:prstGeom prst="rect">
+            <a:avLst/>
+          </a:prstGeom>
+          <a:solidFill>
+            <a:srgbClr val="FFFFFF"/>
+          </a:solidFill>
+          <a:ln w="12700">
+            <a:solidFill>
+              <a:srgbClr val="FFFFFF"/>
+            </a:solidFill>
+            <a:prstDash val="solid"/>
+          </a:ln>
+        </p:spPr>
+      </p:sp>
+      <p:sp>
+        <p:nvSpPr>
+          <p:cNvPr id="3" name="Text 1"/>
           <p:cNvSpPr/>
           <p:nvPr/>
         </p:nvSpPr>
         <p:spPr>
           <a:xfrm>
             <a:off x="457200" y="274320"/>
-            <a:ext cx="8229600" cy="411480"/>
-          </a:xfrm>
-          <a:prstGeom prst="rect">
-            <a:avLst/>
-          </a:prstGeom>
-          <a:noFill/>
-          <a:ln/>
-        </p:spPr>
-        <p:txBody>
-          <a:bodyPr wrap="square" lIns="0" tIns="0" rIns="0" bIns="0" rtlCol="0" anchor="ctr"/>
-          <a:lstStyle/>
-          <a:p>
-            <a:pPr indent="0" marL="0">
-              <a:buNone/>
-            </a:pPr>
-            <a:r>
-              <a:rPr lang="en-US" sz="2600" b="1" dirty="0">
-                <a:solidFill>
-                  <a:srgbClr val="1A1A1A"/>
+            <a:ext cx="8229600" cy="365760"/>
+          </a:xfrm>
+          <a:prstGeom prst="rect">
+            <a:avLst/>
+          </a:prstGeom>
+          <a:noFill/>
+          <a:ln/>
+        </p:spPr>
+        <p:txBody>
+          <a:bodyPr wrap="square" lIns="0" tIns="0" rIns="0" bIns="0" rtlCol="0" anchor="ctr"/>
+          <a:lstStyle/>
+          <a:p>
+            <a:pPr indent="0" marL="0">
+              <a:buNone/>
+            </a:pPr>
+            <a:r>
+              <a:rPr lang="en-US" sz="2200" b="1" dirty="0">
+                <a:solidFill>
+                  <a:srgbClr val="1B2A4A"/>
                 </a:solidFill>
                 <a:latin typeface="Arial" pitchFamily="34" charset="0"/>
                 <a:ea typeface="Arial" pitchFamily="34" charset="-122"/>
@@ -5344,39 +5726,46 @@
               </a:rPr>
               <a:t>Practical Contrast</a:t>
             </a:r>
-            <a:endParaRPr lang="en-US" sz="2600" dirty="0"/>
-          </a:p>
-        </p:txBody>
-      </p:sp>
-      <p:sp>
-        <p:nvSpPr>
-          <p:cNvPr id="3" name="Shape 1"/>
-          <p:cNvSpPr/>
-          <p:nvPr/>
-        </p:nvSpPr>
-        <p:spPr>
-          <a:xfrm>
-            <a:off x="457200" y="1005840"/>
+            <a:endParaRPr lang="en-US" sz="2200" dirty="0"/>
+          </a:p>
+        </p:txBody>
+      </p:sp>
+      <p:sp>
+        <p:nvSpPr>
+          <p:cNvPr id="4" name="Shape 2"/>
+          <p:cNvSpPr/>
+          <p:nvPr/>
+        </p:nvSpPr>
+        <p:spPr>
+          <a:xfrm>
+            <a:off x="457200" y="914400"/>
             <a:ext cx="8229600" cy="1371600"/>
           </a:xfrm>
-          <a:prstGeom prst="rect">
-            <a:avLst/>
+          <a:prstGeom prst="roundRect">
+            <a:avLst>
+              <a:gd name="adj" fmla="val 5333"/>
+            </a:avLst>
           </a:prstGeom>
           <a:solidFill>
-            <a:srgbClr val="F7F7F7"/>
+            <a:srgbClr val="3A3A3A"/>
           </a:solidFill>
-          <a:ln/>
-        </p:spPr>
-      </p:sp>
-      <p:sp>
-        <p:nvSpPr>
-          <p:cNvPr id="4" name="Text 2"/>
-          <p:cNvSpPr/>
-          <p:nvPr/>
-        </p:nvSpPr>
-        <p:spPr>
-          <a:xfrm>
-            <a:off x="731520" y="1143000"/>
+          <a:ln w="12700">
+            <a:solidFill>
+              <a:srgbClr val="3A3A3A"/>
+            </a:solidFill>
+            <a:prstDash val="solid"/>
+          </a:ln>
+        </p:spPr>
+      </p:sp>
+      <p:sp>
+        <p:nvSpPr>
+          <p:cNvPr id="5" name="Text 3"/>
+          <p:cNvSpPr/>
+          <p:nvPr/>
+        </p:nvSpPr>
+        <p:spPr>
+          <a:xfrm>
+            <a:off x="731520" y="1097280"/>
             <a:ext cx="7680960" cy="320040"/>
           </a:xfrm>
           <a:prstGeom prst="rect">
@@ -5393,9 +5782,9 @@
               <a:buNone/>
             </a:pPr>
             <a:r>
-              <a:rPr lang="en-US" sz="1400" dirty="0">
-                <a:solidFill>
-                  <a:srgbClr val="555555"/>
+              <a:rPr lang="en-US" sz="1400" b="1" dirty="0">
+                <a:solidFill>
+                  <a:srgbClr val="C9A227"/>
                 </a:solidFill>
                 <a:latin typeface="Arial" pitchFamily="34" charset="0"/>
                 <a:ea typeface="Arial" pitchFamily="34" charset="-122"/>
@@ -5409,32 +5798,32 @@
       </p:sp>
       <p:sp>
         <p:nvSpPr>
-          <p:cNvPr id="5" name="Text 3"/>
+          <p:cNvPr id="6" name="Text 4"/>
           <p:cNvSpPr/>
           <p:nvPr/>
         </p:nvSpPr>
         <p:spPr>
           <a:xfrm>
             <a:off x="731520" y="1554480"/>
-            <a:ext cx="7680960" cy="502920"/>
-          </a:xfrm>
-          <a:prstGeom prst="rect">
-            <a:avLst/>
-          </a:prstGeom>
-          <a:noFill/>
-          <a:ln/>
-        </p:spPr>
-        <p:txBody>
-          <a:bodyPr wrap="square" lIns="0" tIns="0" rIns="0" bIns="0" rtlCol="0" anchor="ctr"/>
-          <a:lstStyle/>
-          <a:p>
-            <a:pPr indent="0" marL="0">
-              <a:buNone/>
-            </a:pPr>
-            <a:r>
-              <a:rPr lang="en-US" sz="1800" b="1" dirty="0">
-                <a:solidFill>
-                  <a:srgbClr val="1A1A1A"/>
+            <a:ext cx="7680960" cy="457200"/>
+          </a:xfrm>
+          <a:prstGeom prst="rect">
+            <a:avLst/>
+          </a:prstGeom>
+          <a:noFill/>
+          <a:ln/>
+        </p:spPr>
+        <p:txBody>
+          <a:bodyPr wrap="square" lIns="0" tIns="0" rIns="0" bIns="0" rtlCol="0" anchor="ctr"/>
+          <a:lstStyle/>
+          <a:p>
+            <a:pPr indent="0" marL="0">
+              <a:buNone/>
+            </a:pPr>
+            <a:r>
+              <a:rPr lang="en-US" sz="1800" dirty="0">
+                <a:solidFill>
+                  <a:srgbClr val="FFFFFF"/>
                 </a:solidFill>
                 <a:latin typeface="Arial" pitchFamily="34" charset="0"/>
                 <a:ea typeface="Arial" pitchFamily="34" charset="-122"/>
@@ -5448,27 +5837,34 @@
       </p:sp>
       <p:sp>
         <p:nvSpPr>
-          <p:cNvPr id="6" name="Shape 4"/>
-          <p:cNvSpPr/>
-          <p:nvPr/>
-        </p:nvSpPr>
-        <p:spPr>
-          <a:xfrm>
-            <a:off x="457200" y="2651760"/>
-            <a:ext cx="8229600" cy="1371600"/>
-          </a:xfrm>
-          <a:prstGeom prst="rect">
-            <a:avLst/>
+          <p:cNvPr id="7" name="Shape 5"/>
+          <p:cNvSpPr/>
+          <p:nvPr/>
+        </p:nvSpPr>
+        <p:spPr>
+          <a:xfrm>
+            <a:off x="457200" y="2560320"/>
+            <a:ext cx="8229600" cy="1554480"/>
+          </a:xfrm>
+          <a:prstGeom prst="roundRect">
+            <a:avLst>
+              <a:gd name="adj" fmla="val 4706"/>
+            </a:avLst>
           </a:prstGeom>
           <a:solidFill>
-            <a:srgbClr val="111111"/>
+            <a:srgbClr val="1B2A4A"/>
           </a:solidFill>
-          <a:ln/>
-        </p:spPr>
-      </p:sp>
-      <p:sp>
-        <p:nvSpPr>
-          <p:cNvPr id="7" name="Text 5"/>
+          <a:ln w="12700">
+            <a:solidFill>
+              <a:srgbClr val="1B2A4A"/>
+            </a:solidFill>
+            <a:prstDash val="solid"/>
+          </a:ln>
+        </p:spPr>
+      </p:sp>
+      <p:sp>
+        <p:nvSpPr>
+          <p:cNvPr id="8" name="Text 6"/>
           <p:cNvSpPr/>
           <p:nvPr/>
         </p:nvSpPr>
@@ -5491,9 +5887,9 @@
               <a:buNone/>
             </a:pPr>
             <a:r>
-              <a:rPr lang="en-US" sz="1400" dirty="0">
-                <a:solidFill>
-                  <a:srgbClr val="AAAAAA"/>
+              <a:rPr lang="en-US" sz="1400" b="1" dirty="0">
+                <a:solidFill>
+                  <a:srgbClr val="C9A227"/>
                 </a:solidFill>
                 <a:latin typeface="Arial" pitchFamily="34" charset="0"/>
                 <a:ea typeface="Arial" pitchFamily="34" charset="-122"/>
@@ -5507,32 +5903,32 @@
       </p:sp>
       <p:sp>
         <p:nvSpPr>
-          <p:cNvPr id="8" name="Text 6"/>
+          <p:cNvPr id="9" name="Text 7"/>
           <p:cNvSpPr/>
           <p:nvPr/>
         </p:nvSpPr>
         <p:spPr>
           <a:xfrm>
             <a:off x="731520" y="3200400"/>
-            <a:ext cx="7680960" cy="640080"/>
-          </a:xfrm>
-          <a:prstGeom prst="rect">
-            <a:avLst/>
-          </a:prstGeom>
-          <a:noFill/>
-          <a:ln/>
-        </p:spPr>
-        <p:txBody>
-          <a:bodyPr wrap="square" lIns="0" tIns="0" rIns="0" bIns="0" rtlCol="0" anchor="ctr"/>
-          <a:lstStyle/>
-          <a:p>
-            <a:pPr indent="0" marL="0">
-              <a:buNone/>
-            </a:pPr>
-            <a:r>
-              <a:rPr lang="en-US" sz="1600" b="1" dirty="0">
-                <a:solidFill>
-                  <a:srgbClr val="F5F5F5"/>
+            <a:ext cx="7680960" cy="685800"/>
+          </a:xfrm>
+          <a:prstGeom prst="rect">
+            <a:avLst/>
+          </a:prstGeom>
+          <a:noFill/>
+          <a:ln/>
+        </p:spPr>
+        <p:txBody>
+          <a:bodyPr wrap="square" lIns="0" tIns="0" rIns="0" bIns="0" rtlCol="0" anchor="ctr"/>
+          <a:lstStyle/>
+          <a:p>
+            <a:pPr indent="0" marL="0">
+              <a:buNone/>
+            </a:pPr>
+            <a:r>
+              <a:rPr lang="en-US" sz="1600" dirty="0">
+                <a:solidFill>
+                  <a:srgbClr val="FFFFFF"/>
                 </a:solidFill>
                 <a:latin typeface="Arial" pitchFamily="34" charset="0"/>
                 <a:ea typeface="Arial" pitchFamily="34" charset="-122"/>
@@ -5546,32 +5942,32 @@
       </p:sp>
       <p:sp>
         <p:nvSpPr>
-          <p:cNvPr id="9" name="Text 7"/>
+          <p:cNvPr id="10" name="Text 8"/>
           <p:cNvSpPr/>
           <p:nvPr/>
         </p:nvSpPr>
         <p:spPr>
           <a:xfrm>
             <a:off x="457200" y="4800600"/>
-            <a:ext cx="5943600" cy="228600"/>
-          </a:xfrm>
-          <a:prstGeom prst="rect">
-            <a:avLst/>
-          </a:prstGeom>
-          <a:noFill/>
-          <a:ln/>
-        </p:spPr>
-        <p:txBody>
-          <a:bodyPr wrap="square" lIns="0" tIns="0" rIns="0" bIns="0" rtlCol="0" anchor="ctr"/>
-          <a:lstStyle/>
-          <a:p>
-            <a:pPr indent="0" marL="0">
-              <a:buNone/>
-            </a:pPr>
-            <a:r>
-              <a:rPr lang="en-US" sz="1000" dirty="0">
-                <a:solidFill>
-                  <a:srgbClr val="555555"/>
+            <a:ext cx="5943600" cy="256032"/>
+          </a:xfrm>
+          <a:prstGeom prst="rect">
+            <a:avLst/>
+          </a:prstGeom>
+          <a:noFill/>
+          <a:ln/>
+        </p:spPr>
+        <p:txBody>
+          <a:bodyPr wrap="square" lIns="0" tIns="0" rIns="0" bIns="0" rtlCol="0" anchor="ctr"/>
+          <a:lstStyle/>
+          <a:p>
+            <a:pPr indent="0" marL="0">
+              <a:buNone/>
+            </a:pPr>
+            <a:r>
+              <a:rPr lang="en-US" sz="1100" dirty="0">
+                <a:solidFill>
+                  <a:srgbClr val="6A6A6A"/>
                 </a:solidFill>
                 <a:latin typeface="Arial" pitchFamily="34" charset="0"/>
                 <a:ea typeface="Arial" pitchFamily="34" charset="-122"/>
@@ -5579,20 +5975,20 @@
               </a:rPr>
               <a:t>Joshua Konkle  |  Chief of Staff Strategist</a:t>
             </a:r>
-            <a:endParaRPr lang="en-US" sz="1000" dirty="0"/>
-          </a:p>
-        </p:txBody>
-      </p:sp>
-      <p:sp>
-        <p:nvSpPr>
-          <p:cNvPr id="10" name="Text 8"/>
-          <p:cNvSpPr/>
-          <p:nvPr/>
-        </p:nvSpPr>
-        <p:spPr>
-          <a:xfrm>
-            <a:off x="7772400" y="4800600"/>
-            <a:ext cx="914400" cy="228600"/>
+            <a:endParaRPr lang="en-US" sz="1100" dirty="0"/>
+          </a:p>
+        </p:txBody>
+      </p:sp>
+      <p:sp>
+        <p:nvSpPr>
+          <p:cNvPr id="11" name="Text 9"/>
+          <p:cNvSpPr/>
+          <p:nvPr/>
+        </p:nvSpPr>
+        <p:spPr>
+          <a:xfrm>
+            <a:off x="7498080" y="4800600"/>
+            <a:ext cx="1188720" cy="256032"/>
           </a:xfrm>
           <a:prstGeom prst="rect">
             <a:avLst/>
@@ -5608,9 +6004,9 @@
               <a:buNone/>
             </a:pPr>
             <a:r>
-              <a:rPr lang="en-US" sz="1000" dirty="0">
-                <a:solidFill>
-                  <a:srgbClr val="555555"/>
+              <a:rPr lang="en-US" sz="1100" dirty="0">
+                <a:solidFill>
+                  <a:srgbClr val="6A6A6A"/>
                 </a:solidFill>
                 <a:latin typeface="Arial" pitchFamily="34" charset="0"/>
                 <a:ea typeface="Arial" pitchFamily="34" charset="-122"/>
@@ -5618,7 +6014,7 @@
               </a:rPr>
               <a:t>7 / 12</a:t>
             </a:r>
-            <a:endParaRPr lang="en-US" sz="1000" dirty="0"/>
+            <a:endParaRPr lang="en-US" sz="1100" dirty="0"/>
           </a:p>
         </p:txBody>
       </p:sp>
@@ -5633,13 +6029,6 @@
 <file path=ppt/slides/slide8.xml><?xml version="1.0" encoding="utf-8"?>
 <p:sld xmlns:a="http://schemas.openxmlformats.org/drawingml/2006/main" xmlns:r="http://schemas.openxmlformats.org/officeDocument/2006/relationships" xmlns:p="http://schemas.openxmlformats.org/presentationml/2006/main">
   <p:cSld name="Slide 8">
-    <p:bg>
-      <p:bgPr>
-        <a:solidFill>
-          <a:srgbClr val="FFFFFF"/>
-        </a:solidFill>
-      </p:bgPr>
-    </p:bg>
     <p:spTree>
       <p:nvGrpSpPr>
         <p:cNvPr id="1" name=""/>
@@ -5656,32 +6045,57 @@
       </p:grpSpPr>
       <p:sp>
         <p:nvSpPr>
-          <p:cNvPr id="2" name="Text 0"/>
+          <p:cNvPr id="2" name="Shape 0"/>
+          <p:cNvSpPr/>
+          <p:nvPr/>
+        </p:nvSpPr>
+        <p:spPr>
+          <a:xfrm>
+            <a:off x="0" y="0"/>
+            <a:ext cx="9144000" cy="5143500"/>
+          </a:xfrm>
+          <a:prstGeom prst="rect">
+            <a:avLst/>
+          </a:prstGeom>
+          <a:solidFill>
+            <a:srgbClr val="FFFFFF"/>
+          </a:solidFill>
+          <a:ln w="12700">
+            <a:solidFill>
+              <a:srgbClr val="FFFFFF"/>
+            </a:solidFill>
+            <a:prstDash val="solid"/>
+          </a:ln>
+        </p:spPr>
+      </p:sp>
+      <p:sp>
+        <p:nvSpPr>
+          <p:cNvPr id="3" name="Text 1"/>
           <p:cNvSpPr/>
           <p:nvPr/>
         </p:nvSpPr>
         <p:spPr>
           <a:xfrm>
             <a:off x="457200" y="274320"/>
-            <a:ext cx="8229600" cy="411480"/>
-          </a:xfrm>
-          <a:prstGeom prst="rect">
-            <a:avLst/>
-          </a:prstGeom>
-          <a:noFill/>
-          <a:ln/>
-        </p:spPr>
-        <p:txBody>
-          <a:bodyPr wrap="square" lIns="0" tIns="0" rIns="0" bIns="0" rtlCol="0" anchor="ctr"/>
-          <a:lstStyle/>
-          <a:p>
-            <a:pPr indent="0" marL="0">
-              <a:buNone/>
-            </a:pPr>
-            <a:r>
-              <a:rPr lang="en-US" sz="2600" b="1" dirty="0">
-                <a:solidFill>
-                  <a:srgbClr val="1A1A1A"/>
+            <a:ext cx="8229600" cy="365760"/>
+          </a:xfrm>
+          <a:prstGeom prst="rect">
+            <a:avLst/>
+          </a:prstGeom>
+          <a:noFill/>
+          <a:ln/>
+        </p:spPr>
+        <p:txBody>
+          <a:bodyPr wrap="square" lIns="0" tIns="0" rIns="0" bIns="0" rtlCol="0" anchor="ctr"/>
+          <a:lstStyle/>
+          <a:p>
+            <a:pPr indent="0" marL="0">
+              <a:buNone/>
+            </a:pPr>
+            <a:r>
+              <a:rPr lang="en-US" sz="2200" b="1" dirty="0">
+                <a:solidFill>
+                  <a:srgbClr val="1B2A4A"/>
                 </a:solidFill>
                 <a:latin typeface="Arial" pitchFamily="34" charset="0"/>
                 <a:ea typeface="Arial" pitchFamily="34" charset="-122"/>
@@ -5689,29 +6103,9 @@
               </a:rPr>
               <a:t>Innovation Example</a:t>
             </a:r>
-            <a:endParaRPr lang="en-US" sz="2600" dirty="0"/>
-          </a:p>
-        </p:txBody>
-      </p:sp>
-      <p:sp>
-        <p:nvSpPr>
-          <p:cNvPr id="3" name="Shape 1"/>
-          <p:cNvSpPr/>
-          <p:nvPr/>
-        </p:nvSpPr>
-        <p:spPr>
-          <a:xfrm>
-            <a:off x="457200" y="914400"/>
-            <a:ext cx="8229600" cy="3200400"/>
-          </a:xfrm>
-          <a:prstGeom prst="rect">
-            <a:avLst/>
-          </a:prstGeom>
-          <a:solidFill>
-            <a:srgbClr val="F7F7F7"/>
-          </a:solidFill>
-          <a:ln/>
-        </p:spPr>
+            <a:endParaRPr lang="en-US" sz="2200" dirty="0"/>
+          </a:p>
+        </p:txBody>
       </p:sp>
       <p:sp>
         <p:nvSpPr>
@@ -5721,8 +6115,8 @@
         </p:nvSpPr>
         <p:spPr>
           <a:xfrm>
-            <a:off x="731520" y="1143000"/>
-            <a:ext cx="7680960" cy="822960"/>
+            <a:off x="457200" y="822960"/>
+            <a:ext cx="8229600" cy="731520"/>
           </a:xfrm>
           <a:prstGeom prst="rect">
             <a:avLst/>
@@ -5740,7 +6134,7 @@
             <a:r>
               <a:rPr lang="en-US" sz="1500" dirty="0">
                 <a:solidFill>
-                  <a:srgbClr val="1A1A1A"/>
+                  <a:srgbClr val="2A2A2A"/>
                 </a:solidFill>
                 <a:latin typeface="Arial" pitchFamily="34" charset="0"/>
                 <a:ea typeface="Arial" pitchFamily="34" charset="-122"/>
@@ -5760,8 +6154,125 @@
         </p:nvSpPr>
         <p:spPr>
           <a:xfrm>
-            <a:off x="731520" y="2103120"/>
-            <a:ext cx="7680960" cy="365760"/>
+            <a:off x="640080" y="1737360"/>
+            <a:ext cx="7772400" cy="411480"/>
+          </a:xfrm>
+          <a:prstGeom prst="rect">
+            <a:avLst/>
+          </a:prstGeom>
+          <a:noFill/>
+          <a:ln/>
+        </p:spPr>
+        <p:txBody>
+          <a:bodyPr wrap="square" lIns="0" tIns="0" rIns="0" bIns="0" rtlCol="0" anchor="ctr"/>
+          <a:lstStyle/>
+          <a:p>
+            <a:pPr indent="0" marL="0">
+              <a:buNone/>
+            </a:pPr>
+            <a:r>
+              <a:rPr lang="en-US" sz="1500" b="1" dirty="0">
+                <a:solidFill>
+                  <a:srgbClr val="1B2A4A"/>
+                </a:solidFill>
+                <a:latin typeface="Arial" pitchFamily="34" charset="0"/>
+                <a:ea typeface="Arial" pitchFamily="34" charset="-122"/>
+                <a:cs typeface="Arial" pitchFamily="34" charset="-120"/>
+              </a:rPr>
+              <a:t>→  Robotics engineering &amp; systems integration</a:t>
+            </a:r>
+            <a:endParaRPr lang="en-US" sz="1500" dirty="0"/>
+          </a:p>
+        </p:txBody>
+      </p:sp>
+      <p:sp>
+        <p:nvSpPr>
+          <p:cNvPr id="6" name="Text 4"/>
+          <p:cNvSpPr/>
+          <p:nvPr/>
+        </p:nvSpPr>
+        <p:spPr>
+          <a:xfrm>
+            <a:off x="640080" y="2194560"/>
+            <a:ext cx="7772400" cy="411480"/>
+          </a:xfrm>
+          <a:prstGeom prst="rect">
+            <a:avLst/>
+          </a:prstGeom>
+          <a:noFill/>
+          <a:ln/>
+        </p:spPr>
+        <p:txBody>
+          <a:bodyPr wrap="square" lIns="0" tIns="0" rIns="0" bIns="0" rtlCol="0" anchor="ctr"/>
+          <a:lstStyle/>
+          <a:p>
+            <a:pPr indent="0" marL="0">
+              <a:buNone/>
+            </a:pPr>
+            <a:r>
+              <a:rPr lang="en-US" sz="1500" b="1" dirty="0">
+                <a:solidFill>
+                  <a:srgbClr val="1B2A4A"/>
+                </a:solidFill>
+                <a:latin typeface="Arial" pitchFamily="34" charset="0"/>
+                <a:ea typeface="Arial" pitchFamily="34" charset="-122"/>
+                <a:cs typeface="Arial" pitchFamily="34" charset="-120"/>
+              </a:rPr>
+              <a:t>→  Deployment and process control</a:t>
+            </a:r>
+            <a:endParaRPr lang="en-US" sz="1500" dirty="0"/>
+          </a:p>
+        </p:txBody>
+      </p:sp>
+      <p:sp>
+        <p:nvSpPr>
+          <p:cNvPr id="7" name="Text 5"/>
+          <p:cNvSpPr/>
+          <p:nvPr/>
+        </p:nvSpPr>
+        <p:spPr>
+          <a:xfrm>
+            <a:off x="640080" y="2651760"/>
+            <a:ext cx="7772400" cy="411480"/>
+          </a:xfrm>
+          <a:prstGeom prst="rect">
+            <a:avLst/>
+          </a:prstGeom>
+          <a:noFill/>
+          <a:ln/>
+        </p:spPr>
+        <p:txBody>
+          <a:bodyPr wrap="square" lIns="0" tIns="0" rIns="0" bIns="0" rtlCol="0" anchor="ctr"/>
+          <a:lstStyle/>
+          <a:p>
+            <a:pPr indent="0" marL="0">
+              <a:buNone/>
+            </a:pPr>
+            <a:r>
+              <a:rPr lang="en-US" sz="1500" b="1" dirty="0">
+                <a:solidFill>
+                  <a:srgbClr val="1B2A4A"/>
+                </a:solidFill>
+                <a:latin typeface="Arial" pitchFamily="34" charset="0"/>
+                <a:ea typeface="Arial" pitchFamily="34" charset="-122"/>
+                <a:cs typeface="Arial" pitchFamily="34" charset="-120"/>
+              </a:rPr>
+              <a:t>→  Maintenance and continuous improvement</a:t>
+            </a:r>
+            <a:endParaRPr lang="en-US" sz="1500" dirty="0"/>
+          </a:p>
+        </p:txBody>
+      </p:sp>
+      <p:sp>
+        <p:nvSpPr>
+          <p:cNvPr id="8" name="Text 6"/>
+          <p:cNvSpPr/>
+          <p:nvPr/>
+        </p:nvSpPr>
+        <p:spPr>
+          <a:xfrm>
+            <a:off x="457200" y="3291840"/>
+            <a:ext cx="8229600" cy="457200"/>
           </a:xfrm>
           <a:prstGeom prst="rect">
             <a:avLst/>
@@ -5779,13 +6290,13 @@
             <a:r>
               <a:rPr lang="en-US" sz="1500" dirty="0">
                 <a:solidFill>
-                  <a:srgbClr val="1A1A1A"/>
-                </a:solidFill>
-                <a:latin typeface="Arial" pitchFamily="34" charset="0"/>
-                <a:ea typeface="Arial" pitchFamily="34" charset="-122"/>
-                <a:cs typeface="Arial" pitchFamily="34" charset="-120"/>
-              </a:rPr>
-              <a:t>→  Robotics engineering &amp; systems integration</a:t>
+                  <a:srgbClr val="2A2A2A"/>
+                </a:solidFill>
+                <a:latin typeface="Arial" pitchFamily="34" charset="0"/>
+                <a:ea typeface="Arial" pitchFamily="34" charset="-122"/>
+                <a:cs typeface="Arial" pitchFamily="34" charset="-120"/>
+              </a:rPr>
+              <a:t>The value-stream design should deliberately capture that higher-skill work.</a:t>
             </a:r>
             <a:endParaRPr lang="en-US" sz="1500" dirty="0"/>
           </a:p>
@@ -5793,123 +6304,6 @@
       </p:sp>
       <p:sp>
         <p:nvSpPr>
-          <p:cNvPr id="6" name="Text 4"/>
-          <p:cNvSpPr/>
-          <p:nvPr/>
-        </p:nvSpPr>
-        <p:spPr>
-          <a:xfrm>
-            <a:off x="731520" y="2514600"/>
-            <a:ext cx="7680960" cy="365760"/>
-          </a:xfrm>
-          <a:prstGeom prst="rect">
-            <a:avLst/>
-          </a:prstGeom>
-          <a:noFill/>
-          <a:ln/>
-        </p:spPr>
-        <p:txBody>
-          <a:bodyPr wrap="square" lIns="0" tIns="0" rIns="0" bIns="0" rtlCol="0" anchor="ctr"/>
-          <a:lstStyle/>
-          <a:p>
-            <a:pPr indent="0" marL="0">
-              <a:buNone/>
-            </a:pPr>
-            <a:r>
-              <a:rPr lang="en-US" sz="1500" dirty="0">
-                <a:solidFill>
-                  <a:srgbClr val="1A1A1A"/>
-                </a:solidFill>
-                <a:latin typeface="Arial" pitchFamily="34" charset="0"/>
-                <a:ea typeface="Arial" pitchFamily="34" charset="-122"/>
-                <a:cs typeface="Arial" pitchFamily="34" charset="-120"/>
-              </a:rPr>
-              <a:t>→  Deployment and process control</a:t>
-            </a:r>
-            <a:endParaRPr lang="en-US" sz="1500" dirty="0"/>
-          </a:p>
-        </p:txBody>
-      </p:sp>
-      <p:sp>
-        <p:nvSpPr>
-          <p:cNvPr id="7" name="Text 5"/>
-          <p:cNvSpPr/>
-          <p:nvPr/>
-        </p:nvSpPr>
-        <p:spPr>
-          <a:xfrm>
-            <a:off x="731520" y="2926080"/>
-            <a:ext cx="7680960" cy="365760"/>
-          </a:xfrm>
-          <a:prstGeom prst="rect">
-            <a:avLst/>
-          </a:prstGeom>
-          <a:noFill/>
-          <a:ln/>
-        </p:spPr>
-        <p:txBody>
-          <a:bodyPr wrap="square" lIns="0" tIns="0" rIns="0" bIns="0" rtlCol="0" anchor="ctr"/>
-          <a:lstStyle/>
-          <a:p>
-            <a:pPr indent="0" marL="0">
-              <a:buNone/>
-            </a:pPr>
-            <a:r>
-              <a:rPr lang="en-US" sz="1500" dirty="0">
-                <a:solidFill>
-                  <a:srgbClr val="1A1A1A"/>
-                </a:solidFill>
-                <a:latin typeface="Arial" pitchFamily="34" charset="0"/>
-                <a:ea typeface="Arial" pitchFamily="34" charset="-122"/>
-                <a:cs typeface="Arial" pitchFamily="34" charset="-120"/>
-              </a:rPr>
-              <a:t>→  Maintenance and continuous improvement</a:t>
-            </a:r>
-            <a:endParaRPr lang="en-US" sz="1500" dirty="0"/>
-          </a:p>
-        </p:txBody>
-      </p:sp>
-      <p:sp>
-        <p:nvSpPr>
-          <p:cNvPr id="8" name="Text 6"/>
-          <p:cNvSpPr/>
-          <p:nvPr/>
-        </p:nvSpPr>
-        <p:spPr>
-          <a:xfrm>
-            <a:off x="731520" y="3474720"/>
-            <a:ext cx="7680960" cy="365760"/>
-          </a:xfrm>
-          <a:prstGeom prst="rect">
-            <a:avLst/>
-          </a:prstGeom>
-          <a:noFill/>
-          <a:ln/>
-        </p:spPr>
-        <p:txBody>
-          <a:bodyPr wrap="square" lIns="0" tIns="0" rIns="0" bIns="0" rtlCol="0" anchor="ctr"/>
-          <a:lstStyle/>
-          <a:p>
-            <a:pPr indent="0" marL="0">
-              <a:buNone/>
-            </a:pPr>
-            <a:r>
-              <a:rPr lang="en-US" sz="1400" dirty="0">
-                <a:solidFill>
-                  <a:srgbClr val="555555"/>
-                </a:solidFill>
-                <a:latin typeface="Arial" pitchFamily="34" charset="0"/>
-                <a:ea typeface="Arial" pitchFamily="34" charset="-122"/>
-                <a:cs typeface="Arial" pitchFamily="34" charset="-120"/>
-              </a:rPr>
-              <a:t>The value-stream design should deliberately capture that higher-skill work.</a:t>
-            </a:r>
-            <a:endParaRPr lang="en-US" sz="1400" dirty="0"/>
-          </a:p>
-        </p:txBody>
-      </p:sp>
-      <p:sp>
-        <p:nvSpPr>
           <p:cNvPr id="9" name="Text 7"/>
           <p:cNvSpPr/>
           <p:nvPr/>
@@ -5917,25 +6311,25 @@
         <p:spPr>
           <a:xfrm>
             <a:off x="457200" y="4800600"/>
-            <a:ext cx="5943600" cy="228600"/>
-          </a:xfrm>
-          <a:prstGeom prst="rect">
-            <a:avLst/>
-          </a:prstGeom>
-          <a:noFill/>
-          <a:ln/>
-        </p:spPr>
-        <p:txBody>
-          <a:bodyPr wrap="square" lIns="0" tIns="0" rIns="0" bIns="0" rtlCol="0" anchor="ctr"/>
-          <a:lstStyle/>
-          <a:p>
-            <a:pPr indent="0" marL="0">
-              <a:buNone/>
-            </a:pPr>
-            <a:r>
-              <a:rPr lang="en-US" sz="1000" dirty="0">
-                <a:solidFill>
-                  <a:srgbClr val="555555"/>
+            <a:ext cx="5943600" cy="256032"/>
+          </a:xfrm>
+          <a:prstGeom prst="rect">
+            <a:avLst/>
+          </a:prstGeom>
+          <a:noFill/>
+          <a:ln/>
+        </p:spPr>
+        <p:txBody>
+          <a:bodyPr wrap="square" lIns="0" tIns="0" rIns="0" bIns="0" rtlCol="0" anchor="ctr"/>
+          <a:lstStyle/>
+          <a:p>
+            <a:pPr indent="0" marL="0">
+              <a:buNone/>
+            </a:pPr>
+            <a:r>
+              <a:rPr lang="en-US" sz="1100" dirty="0">
+                <a:solidFill>
+                  <a:srgbClr val="6A6A6A"/>
                 </a:solidFill>
                 <a:latin typeface="Arial" pitchFamily="34" charset="0"/>
                 <a:ea typeface="Arial" pitchFamily="34" charset="-122"/>
@@ -5943,7 +6337,7 @@
               </a:rPr>
               <a:t>Joshua Konkle  |  Chief of Staff Strategist</a:t>
             </a:r>
-            <a:endParaRPr lang="en-US" sz="1000" dirty="0"/>
+            <a:endParaRPr lang="en-US" sz="1100" dirty="0"/>
           </a:p>
         </p:txBody>
       </p:sp>
@@ -5955,8 +6349,8 @@
         </p:nvSpPr>
         <p:spPr>
           <a:xfrm>
-            <a:off x="7772400" y="4800600"/>
-            <a:ext cx="914400" cy="228600"/>
+            <a:off x="7498080" y="4800600"/>
+            <a:ext cx="1188720" cy="256032"/>
           </a:xfrm>
           <a:prstGeom prst="rect">
             <a:avLst/>
@@ -5972,9 +6366,9 @@
               <a:buNone/>
             </a:pPr>
             <a:r>
-              <a:rPr lang="en-US" sz="1000" dirty="0">
-                <a:solidFill>
-                  <a:srgbClr val="555555"/>
+              <a:rPr lang="en-US" sz="1100" dirty="0">
+                <a:solidFill>
+                  <a:srgbClr val="6A6A6A"/>
                 </a:solidFill>
                 <a:latin typeface="Arial" pitchFamily="34" charset="0"/>
                 <a:ea typeface="Arial" pitchFamily="34" charset="-122"/>
@@ -5982,7 +6376,7 @@
               </a:rPr>
               <a:t>8 / 12</a:t>
             </a:r>
-            <a:endParaRPr lang="en-US" sz="1000" dirty="0"/>
+            <a:endParaRPr lang="en-US" sz="1100" dirty="0"/>
           </a:p>
         </p:txBody>
       </p:sp>
@@ -5997,13 +6391,6 @@
 <file path=ppt/slides/slide9.xml><?xml version="1.0" encoding="utf-8"?>
 <p:sld xmlns:a="http://schemas.openxmlformats.org/drawingml/2006/main" xmlns:r="http://schemas.openxmlformats.org/officeDocument/2006/relationships" xmlns:p="http://schemas.openxmlformats.org/presentationml/2006/main">
   <p:cSld name="Slide 9">
-    <p:bg>
-      <p:bgPr>
-        <a:solidFill>
-          <a:srgbClr val="FFFFFF"/>
-        </a:solidFill>
-      </p:bgPr>
-    </p:bg>
     <p:spTree>
       <p:nvGrpSpPr>
         <p:cNvPr id="1" name=""/>
@@ -6020,32 +6407,57 @@
       </p:grpSpPr>
       <p:sp>
         <p:nvSpPr>
-          <p:cNvPr id="2" name="Text 0"/>
-          <p:cNvSpPr/>
-          <p:nvPr/>
-        </p:nvSpPr>
-        <p:spPr>
-          <a:xfrm>
-            <a:off x="457200" y="320040"/>
-            <a:ext cx="8229600" cy="457200"/>
-          </a:xfrm>
-          <a:prstGeom prst="rect">
-            <a:avLst/>
-          </a:prstGeom>
-          <a:noFill/>
-          <a:ln/>
-        </p:spPr>
-        <p:txBody>
-          <a:bodyPr wrap="square" lIns="0" tIns="0" rIns="0" bIns="0" rtlCol="0" anchor="ctr"/>
-          <a:lstStyle/>
-          <a:p>
-            <a:pPr indent="0" marL="0">
-              <a:buNone/>
-            </a:pPr>
-            <a:r>
-              <a:rPr lang="en-US" sz="2400" b="1" dirty="0">
-                <a:solidFill>
-                  <a:srgbClr val="1A1A1A"/>
+          <p:cNvPr id="2" name="Shape 0"/>
+          <p:cNvSpPr/>
+          <p:nvPr/>
+        </p:nvSpPr>
+        <p:spPr>
+          <a:xfrm>
+            <a:off x="0" y="0"/>
+            <a:ext cx="9144000" cy="5143500"/>
+          </a:xfrm>
+          <a:prstGeom prst="rect">
+            <a:avLst/>
+          </a:prstGeom>
+          <a:solidFill>
+            <a:srgbClr val="FFFFFF"/>
+          </a:solidFill>
+          <a:ln w="12700">
+            <a:solidFill>
+              <a:srgbClr val="FFFFFF"/>
+            </a:solidFill>
+            <a:prstDash val="solid"/>
+          </a:ln>
+        </p:spPr>
+      </p:sp>
+      <p:sp>
+        <p:nvSpPr>
+          <p:cNvPr id="3" name="Text 1"/>
+          <p:cNvSpPr/>
+          <p:nvPr/>
+        </p:nvSpPr>
+        <p:spPr>
+          <a:xfrm>
+            <a:off x="457200" y="274320"/>
+            <a:ext cx="8229600" cy="365760"/>
+          </a:xfrm>
+          <a:prstGeom prst="rect">
+            <a:avLst/>
+          </a:prstGeom>
+          <a:noFill/>
+          <a:ln/>
+        </p:spPr>
+        <p:txBody>
+          <a:bodyPr wrap="square" lIns="0" tIns="0" rIns="0" bIns="0" rtlCol="0" anchor="ctr"/>
+          <a:lstStyle/>
+          <a:p>
+            <a:pPr indent="0" marL="0">
+              <a:buNone/>
+            </a:pPr>
+            <a:r>
+              <a:rPr lang="en-US" sz="2200" b="1" dirty="0">
+                <a:solidFill>
+                  <a:srgbClr val="1B2A4A"/>
                 </a:solidFill>
                 <a:latin typeface="Arial" pitchFamily="34" charset="0"/>
                 <a:ea typeface="Arial" pitchFamily="34" charset="-122"/>
@@ -6053,20 +6465,20 @@
               </a:rPr>
               <a:t>Simple Test You Can Run This Week</a:t>
             </a:r>
-            <a:endParaRPr lang="en-US" sz="2400" dirty="0"/>
-          </a:p>
-        </p:txBody>
-      </p:sp>
-      <p:sp>
-        <p:nvSpPr>
-          <p:cNvPr id="3" name="Text 1"/>
-          <p:cNvSpPr/>
-          <p:nvPr/>
-        </p:nvSpPr>
-        <p:spPr>
-          <a:xfrm>
-            <a:off x="457200" y="1005840"/>
-            <a:ext cx="8229600" cy="548640"/>
+            <a:endParaRPr lang="en-US" sz="2200" dirty="0"/>
+          </a:p>
+        </p:txBody>
+      </p:sp>
+      <p:sp>
+        <p:nvSpPr>
+          <p:cNvPr id="4" name="Text 2"/>
+          <p:cNvSpPr/>
+          <p:nvPr/>
+        </p:nvSpPr>
+        <p:spPr>
+          <a:xfrm>
+            <a:off x="457200" y="868680"/>
+            <a:ext cx="8229600" cy="502920"/>
           </a:xfrm>
           <a:prstGeom prst="rect">
             <a:avLst/>
@@ -6084,7 +6496,7 @@
             <a:r>
               <a:rPr lang="en-US" sz="1500" dirty="0">
                 <a:solidFill>
-                  <a:srgbClr val="555555"/>
+                  <a:srgbClr val="2A2A2A"/>
                 </a:solidFill>
                 <a:latin typeface="Arial" pitchFamily="34" charset="0"/>
                 <a:ea typeface="Arial" pitchFamily="34" charset="-122"/>
@@ -6098,52 +6510,59 @@
       </p:sp>
       <p:sp>
         <p:nvSpPr>
-          <p:cNvPr id="4" name="Shape 2"/>
-          <p:cNvSpPr/>
-          <p:nvPr/>
-        </p:nvSpPr>
-        <p:spPr>
-          <a:xfrm>
-            <a:off x="457200" y="1737360"/>
-            <a:ext cx="8229600" cy="1097280"/>
-          </a:xfrm>
-          <a:prstGeom prst="rect">
-            <a:avLst/>
+          <p:cNvPr id="5" name="Shape 3"/>
+          <p:cNvSpPr/>
+          <p:nvPr/>
+        </p:nvSpPr>
+        <p:spPr>
+          <a:xfrm>
+            <a:off x="457200" y="1554480"/>
+            <a:ext cx="8229600" cy="1188720"/>
+          </a:xfrm>
+          <a:prstGeom prst="roundRect">
+            <a:avLst>
+              <a:gd name="adj" fmla="val 6154"/>
+            </a:avLst>
           </a:prstGeom>
           <a:solidFill>
-            <a:srgbClr val="F7F7F7"/>
+            <a:srgbClr val="1B2A4A"/>
           </a:solidFill>
-          <a:ln/>
-        </p:spPr>
-      </p:sp>
-      <p:sp>
-        <p:nvSpPr>
-          <p:cNvPr id="5" name="Text 3"/>
-          <p:cNvSpPr/>
-          <p:nvPr/>
-        </p:nvSpPr>
-        <p:spPr>
-          <a:xfrm>
-            <a:off x="731520" y="1965960"/>
-            <a:ext cx="7680960" cy="640080"/>
-          </a:xfrm>
-          <a:prstGeom prst="rect">
-            <a:avLst/>
-          </a:prstGeom>
-          <a:noFill/>
-          <a:ln/>
-        </p:spPr>
-        <p:txBody>
-          <a:bodyPr wrap="square" lIns="0" tIns="0" rIns="0" bIns="0" rtlCol="0" anchor="ctr"/>
-          <a:lstStyle/>
-          <a:p>
-            <a:pPr indent="0" marL="0">
-              <a:buNone/>
-            </a:pPr>
-            <a:r>
-              <a:rPr lang="en-US" sz="1600" dirty="0">
-                <a:solidFill>
-                  <a:srgbClr val="1A1A1A"/>
+          <a:ln w="12700">
+            <a:solidFill>
+              <a:srgbClr val="1B2A4A"/>
+            </a:solidFill>
+            <a:prstDash val="solid"/>
+          </a:ln>
+        </p:spPr>
+      </p:sp>
+      <p:sp>
+        <p:nvSpPr>
+          <p:cNvPr id="6" name="Text 4"/>
+          <p:cNvSpPr/>
+          <p:nvPr/>
+        </p:nvSpPr>
+        <p:spPr>
+          <a:xfrm>
+            <a:off x="731520" y="1828800"/>
+            <a:ext cx="7680960" cy="731520"/>
+          </a:xfrm>
+          <a:prstGeom prst="rect">
+            <a:avLst/>
+          </a:prstGeom>
+          <a:noFill/>
+          <a:ln/>
+        </p:spPr>
+        <p:txBody>
+          <a:bodyPr wrap="square" lIns="0" tIns="0" rIns="0" bIns="0" rtlCol="0" anchor="ctr"/>
+          <a:lstStyle/>
+          <a:p>
+            <a:pPr indent="0" marL="0">
+              <a:buNone/>
+            </a:pPr>
+            <a:r>
+              <a:rPr lang="en-US" sz="1500" dirty="0">
+                <a:solidFill>
+                  <a:srgbClr val="FFFFFF"/>
                 </a:solidFill>
                 <a:latin typeface="Arial" pitchFamily="34" charset="0"/>
                 <a:ea typeface="Arial" pitchFamily="34" charset="-122"/>
@@ -6151,58 +6570,65 @@
               </a:rPr>
               <a:t>1. Does this step increase or decrease our dependence on short-cycle or temporary non-sovereign labor?</a:t>
             </a:r>
-            <a:endParaRPr lang="en-US" sz="1600" dirty="0"/>
-          </a:p>
-        </p:txBody>
-      </p:sp>
-      <p:sp>
-        <p:nvSpPr>
-          <p:cNvPr id="6" name="Shape 4"/>
-          <p:cNvSpPr/>
-          <p:nvPr/>
-        </p:nvSpPr>
-        <p:spPr>
-          <a:xfrm>
-            <a:off x="457200" y="3017520"/>
-            <a:ext cx="8229600" cy="1097280"/>
-          </a:xfrm>
-          <a:prstGeom prst="rect">
-            <a:avLst/>
+            <a:endParaRPr lang="en-US" sz="1500" dirty="0"/>
+          </a:p>
+        </p:txBody>
+      </p:sp>
+      <p:sp>
+        <p:nvSpPr>
+          <p:cNvPr id="7" name="Shape 5"/>
+          <p:cNvSpPr/>
+          <p:nvPr/>
+        </p:nvSpPr>
+        <p:spPr>
+          <a:xfrm>
+            <a:off x="457200" y="2926080"/>
+            <a:ext cx="8229600" cy="1188720"/>
+          </a:xfrm>
+          <a:prstGeom prst="roundRect">
+            <a:avLst>
+              <a:gd name="adj" fmla="val 6154"/>
+            </a:avLst>
           </a:prstGeom>
           <a:solidFill>
-            <a:srgbClr val="111111"/>
+            <a:srgbClr val="1B2A4A"/>
           </a:solidFill>
-          <a:ln/>
-        </p:spPr>
-      </p:sp>
-      <p:sp>
-        <p:nvSpPr>
-          <p:cNvPr id="7" name="Text 5"/>
-          <p:cNvSpPr/>
-          <p:nvPr/>
-        </p:nvSpPr>
-        <p:spPr>
-          <a:xfrm>
-            <a:off x="731520" y="3246120"/>
-            <a:ext cx="7680960" cy="640080"/>
-          </a:xfrm>
-          <a:prstGeom prst="rect">
-            <a:avLst/>
-          </a:prstGeom>
-          <a:noFill/>
-          <a:ln/>
-        </p:spPr>
-        <p:txBody>
-          <a:bodyPr wrap="square" lIns="0" tIns="0" rIns="0" bIns="0" rtlCol="0" anchor="ctr"/>
-          <a:lstStyle/>
-          <a:p>
-            <a:pPr indent="0" marL="0">
-              <a:buNone/>
-            </a:pPr>
-            <a:r>
-              <a:rPr lang="en-US" sz="1600" dirty="0">
-                <a:solidFill>
-                  <a:srgbClr val="F5F5F5"/>
+          <a:ln w="12700">
+            <a:solidFill>
+              <a:srgbClr val="1B2A4A"/>
+            </a:solidFill>
+            <a:prstDash val="solid"/>
+          </a:ln>
+        </p:spPr>
+      </p:sp>
+      <p:sp>
+        <p:nvSpPr>
+          <p:cNvPr id="8" name="Text 6"/>
+          <p:cNvSpPr/>
+          <p:nvPr/>
+        </p:nvSpPr>
+        <p:spPr>
+          <a:xfrm>
+            <a:off x="731520" y="3200400"/>
+            <a:ext cx="7680960" cy="731520"/>
+          </a:xfrm>
+          <a:prstGeom prst="rect">
+            <a:avLst/>
+          </a:prstGeom>
+          <a:noFill/>
+          <a:ln/>
+        </p:spPr>
+        <p:txBody>
+          <a:bodyPr wrap="square" lIns="0" tIns="0" rIns="0" bIns="0" rtlCol="0" anchor="ctr"/>
+          <a:lstStyle/>
+          <a:p>
+            <a:pPr indent="0" marL="0">
+              <a:buNone/>
+            </a:pPr>
+            <a:r>
+              <a:rPr lang="en-US" sz="1500" dirty="0">
+                <a:solidFill>
+                  <a:srgbClr val="FFFFFF"/>
                 </a:solidFill>
                 <a:latin typeface="Arial" pitchFamily="34" charset="0"/>
                 <a:ea typeface="Arial" pitchFamily="34" charset="-122"/>
@@ -6210,38 +6636,38 @@
               </a:rPr>
               <a:t>2. If we improved this step, would the improvement create higher-skill American work or simply remove hours?</a:t>
             </a:r>
-            <a:endParaRPr lang="en-US" sz="1600" dirty="0"/>
-          </a:p>
-        </p:txBody>
-      </p:sp>
-      <p:sp>
-        <p:nvSpPr>
-          <p:cNvPr id="8" name="Text 6"/>
+            <a:endParaRPr lang="en-US" sz="1500" dirty="0"/>
+          </a:p>
+        </p:txBody>
+      </p:sp>
+      <p:sp>
+        <p:nvSpPr>
+          <p:cNvPr id="9" name="Text 7"/>
           <p:cNvSpPr/>
           <p:nvPr/>
         </p:nvSpPr>
         <p:spPr>
           <a:xfrm>
             <a:off x="457200" y="4800600"/>
-            <a:ext cx="5943600" cy="228600"/>
-          </a:xfrm>
-          <a:prstGeom prst="rect">
-            <a:avLst/>
-          </a:prstGeom>
-          <a:noFill/>
-          <a:ln/>
-        </p:spPr>
-        <p:txBody>
-          <a:bodyPr wrap="square" lIns="0" tIns="0" rIns="0" bIns="0" rtlCol="0" anchor="ctr"/>
-          <a:lstStyle/>
-          <a:p>
-            <a:pPr indent="0" marL="0">
-              <a:buNone/>
-            </a:pPr>
-            <a:r>
-              <a:rPr lang="en-US" sz="1000" dirty="0">
-                <a:solidFill>
-                  <a:srgbClr val="555555"/>
+            <a:ext cx="5943600" cy="256032"/>
+          </a:xfrm>
+          <a:prstGeom prst="rect">
+            <a:avLst/>
+          </a:prstGeom>
+          <a:noFill/>
+          <a:ln/>
+        </p:spPr>
+        <p:txBody>
+          <a:bodyPr wrap="square" lIns="0" tIns="0" rIns="0" bIns="0" rtlCol="0" anchor="ctr"/>
+          <a:lstStyle/>
+          <a:p>
+            <a:pPr indent="0" marL="0">
+              <a:buNone/>
+            </a:pPr>
+            <a:r>
+              <a:rPr lang="en-US" sz="1100" dirty="0">
+                <a:solidFill>
+                  <a:srgbClr val="6A6A6A"/>
                 </a:solidFill>
                 <a:latin typeface="Arial" pitchFamily="34" charset="0"/>
                 <a:ea typeface="Arial" pitchFamily="34" charset="-122"/>
@@ -6249,20 +6675,20 @@
               </a:rPr>
               <a:t>Joshua Konkle  |  Chief of Staff Strategist</a:t>
             </a:r>
-            <a:endParaRPr lang="en-US" sz="1000" dirty="0"/>
-          </a:p>
-        </p:txBody>
-      </p:sp>
-      <p:sp>
-        <p:nvSpPr>
-          <p:cNvPr id="9" name="Text 7"/>
-          <p:cNvSpPr/>
-          <p:nvPr/>
-        </p:nvSpPr>
-        <p:spPr>
-          <a:xfrm>
-            <a:off x="7772400" y="4800600"/>
-            <a:ext cx="914400" cy="228600"/>
+            <a:endParaRPr lang="en-US" sz="1100" dirty="0"/>
+          </a:p>
+        </p:txBody>
+      </p:sp>
+      <p:sp>
+        <p:nvSpPr>
+          <p:cNvPr id="10" name="Text 8"/>
+          <p:cNvSpPr/>
+          <p:nvPr/>
+        </p:nvSpPr>
+        <p:spPr>
+          <a:xfrm>
+            <a:off x="7498080" y="4800600"/>
+            <a:ext cx="1188720" cy="256032"/>
           </a:xfrm>
           <a:prstGeom prst="rect">
             <a:avLst/>
@@ -6278,9 +6704,9 @@
               <a:buNone/>
             </a:pPr>
             <a:r>
-              <a:rPr lang="en-US" sz="1000" dirty="0">
-                <a:solidFill>
-                  <a:srgbClr val="555555"/>
+              <a:rPr lang="en-US" sz="1100" dirty="0">
+                <a:solidFill>
+                  <a:srgbClr val="6A6A6A"/>
                 </a:solidFill>
                 <a:latin typeface="Arial" pitchFamily="34" charset="0"/>
                 <a:ea typeface="Arial" pitchFamily="34" charset="-122"/>
@@ -6288,7 +6714,7 @@
               </a:rPr>
               <a:t>9 / 12</a:t>
             </a:r>
-            <a:endParaRPr lang="en-US" sz="1000" dirty="0"/>
+            <a:endParaRPr lang="en-US" sz="1100" dirty="0"/>
           </a:p>
         </p:txBody>
       </p:sp>
